--- a/docs/exports/soutenance-workshop-pv.pptx
+++ b/docs/exports/soutenance-workshop-pv.pptx
@@ -4688,7 +4688,7 @@
       </p:sp>
       <p:pic>
         <p:nvPicPr>
-          <p:cNvPr id="3" name="Picture 2" descr="schema-complet.png"/>
+          <p:cNvPr id="3" name="Picture 2" descr="schema-complet.jpg"/>
           <p:cNvPicPr>
             <a:picLocks noChangeAspect="1"/>
           </p:cNvPicPr>
@@ -10257,7 +10257,7 @@
       </p:sp>
       <p:pic>
         <p:nvPicPr>
-          <p:cNvPr id="3" name="Picture 2" descr="carte_facteur.png"/>
+          <p:cNvPr id="3" name="Picture 2" descr="carte_facteur.jpg"/>
           <p:cNvPicPr>
             <a:picLocks noChangeAspect="1"/>
           </p:cNvPicPr>
@@ -10272,7 +10272,7 @@
         <p:spPr>
           <a:xfrm>
             <a:off x="2011680" y="1371600"/>
-            <a:ext cx="2567815" cy="2057400"/>
+            <a:ext cx="2568136" cy="2057400"/>
           </a:xfrm>
           <a:prstGeom prst="rect">
             <a:avLst/>
@@ -10288,7 +10288,7 @@
         <p:spPr>
           <a:xfrm>
             <a:off x="1737360" y="3474720"/>
-            <a:ext cx="3116455" cy="320040"/>
+            <a:ext cx="3116776" cy="320040"/>
           </a:xfrm>
           <a:prstGeom prst="rect">
             <a:avLst/>
@@ -10323,7 +10323,7 @@
       </p:sp>
       <p:pic>
         <p:nvPicPr>
-          <p:cNvPr id="5" name="Picture 4" descr="carte_lcoe.png"/>
+          <p:cNvPr id="5" name="Picture 4" descr="carte_lcoe.jpg"/>
           <p:cNvPicPr>
             <a:picLocks noChangeAspect="1"/>
           </p:cNvPicPr>
@@ -10338,7 +10338,7 @@
         <p:spPr>
           <a:xfrm>
             <a:off x="7680960" y="1371600"/>
-            <a:ext cx="2522845" cy="2057400"/>
+            <a:ext cx="2524772" cy="2057400"/>
           </a:xfrm>
           <a:prstGeom prst="rect">
             <a:avLst/>
@@ -10354,7 +10354,7 @@
         <p:spPr>
           <a:xfrm>
             <a:off x="7406640" y="3474720"/>
-            <a:ext cx="3071485" cy="320040"/>
+            <a:ext cx="3073412" cy="320040"/>
           </a:xfrm>
           <a:prstGeom prst="rect">
             <a:avLst/>
@@ -10389,7 +10389,7 @@
       </p:sp>
       <p:pic>
         <p:nvPicPr>
-          <p:cNvPr id="7" name="Picture 6" descr="carte_payback.png"/>
+          <p:cNvPr id="7" name="Picture 6" descr="carte_payback.jpg"/>
           <p:cNvPicPr>
             <a:picLocks noChangeAspect="1"/>
           </p:cNvPicPr>
@@ -10404,7 +10404,7 @@
         <p:spPr>
           <a:xfrm>
             <a:off x="2011680" y="3931920"/>
-            <a:ext cx="2552075" cy="2057400"/>
+            <a:ext cx="2553681" cy="2057400"/>
           </a:xfrm>
           <a:prstGeom prst="rect">
             <a:avLst/>
@@ -10420,7 +10420,7 @@
         <p:spPr>
           <a:xfrm>
             <a:off x="1737360" y="6035040"/>
-            <a:ext cx="3100715" cy="320040"/>
+            <a:ext cx="3102321" cy="320040"/>
           </a:xfrm>
           <a:prstGeom prst="rect">
             <a:avLst/>
@@ -10455,7 +10455,7 @@
       </p:sp>
       <p:pic>
         <p:nvPicPr>
-          <p:cNvPr id="9" name="Picture 8" descr="carte_tri.png"/>
+          <p:cNvPr id="9" name="Picture 8" descr="carte_tri.jpg"/>
           <p:cNvPicPr>
             <a:picLocks noChangeAspect="1"/>
           </p:cNvPicPr>
@@ -10470,7 +10470,7 @@
         <p:spPr>
           <a:xfrm>
             <a:off x="7680960" y="3931920"/>
-            <a:ext cx="2507105" cy="2057400"/>
+            <a:ext cx="2507908" cy="2057400"/>
           </a:xfrm>
           <a:prstGeom prst="rect">
             <a:avLst/>
@@ -10486,7 +10486,7 @@
         <p:spPr>
           <a:xfrm>
             <a:off x="7406640" y="6035040"/>
-            <a:ext cx="3055745" cy="320040"/>
+            <a:ext cx="3056548" cy="320040"/>
           </a:xfrm>
           <a:prstGeom prst="rect">
             <a:avLst/>

--- a/docs/exports/soutenance-workshop-pv.pptx
+++ b/docs/exports/soutenance-workshop-pv.pptx
@@ -14,6 +14,7 @@
     <p:sldId id="259" r:id="rId5"/>
     <p:sldId id="260" r:id="rId6"/>
     <p:sldId id="261" r:id="rId7"/>
+    <p:sldId id="269" r:id="rId20"/>
     <p:sldId id="262" r:id="rId8"/>
     <p:sldId id="263" r:id="rId9"/>
     <p:sldId id="264" r:id="rId10"/>
@@ -5512,6 +5513,2141 @@
                 <a:latin typeface="Calibri"/>
               </a:rPr>
               <a:t>·   Workshop client — Oxand   ·   MBA M2 Big Data &amp; IA</a:t>
+            </a:r>
+          </a:p>
+        </p:txBody>
+      </p:sp>
+    </p:spTree>
+  </p:cSld>
+  <p:clrMapOvr>
+    <a:masterClrMapping/>
+  </p:clrMapOvr>
+</p:sld>
+</file>
+
+<file path=ppt/slides/slide13.xml><?xml version="1.0" encoding="utf-8"?>
+<p:sld xmlns:a="http://schemas.openxmlformats.org/drawingml/2006/main" xmlns:p="http://schemas.openxmlformats.org/presentationml/2006/main" xmlns:r="http://schemas.openxmlformats.org/officeDocument/2006/relationships">
+  <p:cSld>
+    <p:bg>
+      <p:bgPr>
+        <a:solidFill>
+          <a:srgbClr val="FFFFFF"/>
+        </a:solidFill>
+        <a:effectLst/>
+      </p:bgPr>
+    </p:bg>
+    <p:spTree>
+      <p:nvGrpSpPr>
+        <p:cNvPr id="1" name=""/>
+        <p:cNvGrpSpPr/>
+        <p:nvPr/>
+      </p:nvGrpSpPr>
+      <p:grpSpPr/>
+      <p:sp>
+        <p:nvSpPr>
+          <p:cNvPr id="2" name="TextBox 1"/>
+          <p:cNvSpPr txBox="1"/>
+          <p:nvPr/>
+        </p:nvSpPr>
+        <p:spPr>
+          <a:xfrm>
+            <a:off x="914400" y="640080"/>
+            <a:ext cx="10972800" cy="822960"/>
+          </a:xfrm>
+          <a:prstGeom prst="rect">
+            <a:avLst/>
+          </a:prstGeom>
+          <a:noFill/>
+        </p:spPr>
+        <p:txBody>
+          <a:bodyPr wrap="square" anchor="t" lIns="0" rIns="0" tIns="0" bIns="0">
+            <a:spAutoFit/>
+          </a:bodyPr>
+          <a:lstStyle/>
+          <a:p>
+            <a:pPr algn="l">
+              <a:spcAft>
+                <a:spcPts val="0"/>
+              </a:spcAft>
+            </a:pPr>
+            <a:r>
+              <a:rPr sz="3000" b="1">
+                <a:solidFill>
+                  <a:srgbClr val="12293D"/>
+                </a:solidFill>
+                <a:latin typeface="Cambria"/>
+              </a:rPr>
+              <a:t>Les hypothèses clés — et d'où elles viennent</a:t>
+            </a:r>
+          </a:p>
+        </p:txBody>
+      </p:sp>
+      <p:sp>
+        <p:nvSpPr>
+          <p:cNvPr id="3" name="TextBox 2"/>
+          <p:cNvSpPr txBox="1"/>
+          <p:nvPr/>
+        </p:nvSpPr>
+        <p:spPr>
+          <a:xfrm>
+            <a:off x="914400" y="1508760"/>
+            <a:ext cx="10424160" cy="457200"/>
+          </a:xfrm>
+          <a:prstGeom prst="rect">
+            <a:avLst/>
+          </a:prstGeom>
+          <a:noFill/>
+        </p:spPr>
+        <p:txBody>
+          <a:bodyPr wrap="square" anchor="t" lIns="0" rIns="0" tIns="0" bIns="0">
+            <a:spAutoFit/>
+          </a:bodyPr>
+          <a:lstStyle/>
+          <a:p>
+            <a:pPr algn="l">
+              <a:spcAft>
+                <a:spcPts val="0"/>
+              </a:spcAft>
+            </a:pPr>
+            <a:r>
+              <a:rPr sz="1400" b="0">
+                <a:solidFill>
+                  <a:srgbClr val="647486"/>
+                </a:solidFill>
+                <a:latin typeface="Calibri"/>
+              </a:rPr>
+              <a:t>Tous les chiffres du modèle sont explicites et assumés comme des hypothèses.</a:t>
+            </a:r>
+          </a:p>
+        </p:txBody>
+      </p:sp>
+      <p:sp>
+        <p:nvSpPr>
+          <p:cNvPr id="4" name="Rectangle 3"/>
+          <p:cNvSpPr/>
+          <p:nvPr/>
+        </p:nvSpPr>
+        <p:spPr>
+          <a:xfrm>
+            <a:off x="914400" y="2148840"/>
+            <a:ext cx="3657600" cy="457200"/>
+          </a:xfrm>
+          <a:prstGeom prst="rect">
+            <a:avLst/>
+          </a:prstGeom>
+          <a:solidFill>
+            <a:srgbClr val="12293D"/>
+          </a:solidFill>
+          <a:ln>
+            <a:noFill/>
+          </a:ln>
+          <a:effectLst/>
+        </p:spPr>
+        <p:style>
+          <a:lnRef idx="1">
+            <a:schemeClr val="accent1"/>
+          </a:lnRef>
+          <a:fillRef idx="3">
+            <a:schemeClr val="accent1"/>
+          </a:fillRef>
+          <a:effectRef idx="2">
+            <a:schemeClr val="accent1"/>
+          </a:effectRef>
+          <a:fontRef idx="minor">
+            <a:schemeClr val="lt1"/>
+          </a:fontRef>
+        </p:style>
+        <p:txBody>
+          <a:bodyPr rtlCol="0" anchor="ctr"/>
+          <a:lstStyle/>
+          <a:p>
+            <a:pPr algn="ctr"/>
+          </a:p>
+        </p:txBody>
+      </p:sp>
+      <p:sp>
+        <p:nvSpPr>
+          <p:cNvPr id="5" name="TextBox 4"/>
+          <p:cNvSpPr txBox="1"/>
+          <p:nvPr/>
+        </p:nvSpPr>
+        <p:spPr>
+          <a:xfrm>
+            <a:off x="1051560" y="2148840"/>
+            <a:ext cx="3383280" cy="457200"/>
+          </a:xfrm>
+          <a:prstGeom prst="rect">
+            <a:avLst/>
+          </a:prstGeom>
+          <a:noFill/>
+        </p:spPr>
+        <p:txBody>
+          <a:bodyPr wrap="square" anchor="ctr" lIns="0" rIns="0" tIns="0" bIns="0">
+            <a:spAutoFit/>
+          </a:bodyPr>
+          <a:lstStyle/>
+          <a:p>
+            <a:pPr algn="l">
+              <a:spcAft>
+                <a:spcPts val="0"/>
+              </a:spcAft>
+            </a:pPr>
+            <a:r>
+              <a:rPr sz="1250" b="1">
+                <a:solidFill>
+                  <a:srgbClr val="FFFFFF"/>
+                </a:solidFill>
+                <a:latin typeface="Calibri"/>
+              </a:rPr>
+              <a:t>Hypothèse</a:t>
+            </a:r>
+          </a:p>
+        </p:txBody>
+      </p:sp>
+      <p:sp>
+        <p:nvSpPr>
+          <p:cNvPr id="6" name="Rectangle 5"/>
+          <p:cNvSpPr/>
+          <p:nvPr/>
+        </p:nvSpPr>
+        <p:spPr>
+          <a:xfrm>
+            <a:off x="4572000" y="2148840"/>
+            <a:ext cx="2377440" cy="457200"/>
+          </a:xfrm>
+          <a:prstGeom prst="rect">
+            <a:avLst/>
+          </a:prstGeom>
+          <a:solidFill>
+            <a:srgbClr val="12293D"/>
+          </a:solidFill>
+          <a:ln>
+            <a:noFill/>
+          </a:ln>
+          <a:effectLst/>
+        </p:spPr>
+        <p:style>
+          <a:lnRef idx="1">
+            <a:schemeClr val="accent1"/>
+          </a:lnRef>
+          <a:fillRef idx="3">
+            <a:schemeClr val="accent1"/>
+          </a:fillRef>
+          <a:effectRef idx="2">
+            <a:schemeClr val="accent1"/>
+          </a:effectRef>
+          <a:fontRef idx="minor">
+            <a:schemeClr val="lt1"/>
+          </a:fontRef>
+        </p:style>
+        <p:txBody>
+          <a:bodyPr rtlCol="0" anchor="ctr"/>
+          <a:lstStyle/>
+          <a:p>
+            <a:pPr algn="ctr"/>
+          </a:p>
+        </p:txBody>
+      </p:sp>
+      <p:sp>
+        <p:nvSpPr>
+          <p:cNvPr id="7" name="TextBox 6"/>
+          <p:cNvSpPr txBox="1"/>
+          <p:nvPr/>
+        </p:nvSpPr>
+        <p:spPr>
+          <a:xfrm>
+            <a:off x="4709160" y="2148840"/>
+            <a:ext cx="2103120" cy="457200"/>
+          </a:xfrm>
+          <a:prstGeom prst="rect">
+            <a:avLst/>
+          </a:prstGeom>
+          <a:noFill/>
+        </p:spPr>
+        <p:txBody>
+          <a:bodyPr wrap="square" anchor="ctr" lIns="0" rIns="0" tIns="0" bIns="0">
+            <a:spAutoFit/>
+          </a:bodyPr>
+          <a:lstStyle/>
+          <a:p>
+            <a:pPr algn="l">
+              <a:spcAft>
+                <a:spcPts val="0"/>
+              </a:spcAft>
+            </a:pPr>
+            <a:r>
+              <a:rPr sz="1250" b="1">
+                <a:solidFill>
+                  <a:srgbClr val="FFFFFF"/>
+                </a:solidFill>
+                <a:latin typeface="Calibri"/>
+              </a:rPr>
+              <a:t>Valeur</a:t>
+            </a:r>
+          </a:p>
+        </p:txBody>
+      </p:sp>
+      <p:sp>
+        <p:nvSpPr>
+          <p:cNvPr id="8" name="Rectangle 7"/>
+          <p:cNvSpPr/>
+          <p:nvPr/>
+        </p:nvSpPr>
+        <p:spPr>
+          <a:xfrm>
+            <a:off x="6949440" y="2148840"/>
+            <a:ext cx="4389120" cy="457200"/>
+          </a:xfrm>
+          <a:prstGeom prst="rect">
+            <a:avLst/>
+          </a:prstGeom>
+          <a:solidFill>
+            <a:srgbClr val="12293D"/>
+          </a:solidFill>
+          <a:ln>
+            <a:noFill/>
+          </a:ln>
+          <a:effectLst/>
+        </p:spPr>
+        <p:style>
+          <a:lnRef idx="1">
+            <a:schemeClr val="accent1"/>
+          </a:lnRef>
+          <a:fillRef idx="3">
+            <a:schemeClr val="accent1"/>
+          </a:fillRef>
+          <a:effectRef idx="2">
+            <a:schemeClr val="accent1"/>
+          </a:effectRef>
+          <a:fontRef idx="minor">
+            <a:schemeClr val="lt1"/>
+          </a:fontRef>
+        </p:style>
+        <p:txBody>
+          <a:bodyPr rtlCol="0" anchor="ctr"/>
+          <a:lstStyle/>
+          <a:p>
+            <a:pPr algn="ctr"/>
+          </a:p>
+        </p:txBody>
+      </p:sp>
+      <p:sp>
+        <p:nvSpPr>
+          <p:cNvPr id="9" name="TextBox 8"/>
+          <p:cNvSpPr txBox="1"/>
+          <p:nvPr/>
+        </p:nvSpPr>
+        <p:spPr>
+          <a:xfrm>
+            <a:off x="7086600" y="2148840"/>
+            <a:ext cx="4114800" cy="457200"/>
+          </a:xfrm>
+          <a:prstGeom prst="rect">
+            <a:avLst/>
+          </a:prstGeom>
+          <a:noFill/>
+        </p:spPr>
+        <p:txBody>
+          <a:bodyPr wrap="square" anchor="ctr" lIns="0" rIns="0" tIns="0" bIns="0">
+            <a:spAutoFit/>
+          </a:bodyPr>
+          <a:lstStyle/>
+          <a:p>
+            <a:pPr algn="l">
+              <a:spcAft>
+                <a:spcPts val="0"/>
+              </a:spcAft>
+            </a:pPr>
+            <a:r>
+              <a:rPr sz="1250" b="1">
+                <a:solidFill>
+                  <a:srgbClr val="FFFFFF"/>
+                </a:solidFill>
+                <a:latin typeface="Calibri"/>
+              </a:rPr>
+              <a:t>D'où ça vient</a:t>
+            </a:r>
+          </a:p>
+        </p:txBody>
+      </p:sp>
+      <p:sp>
+        <p:nvSpPr>
+          <p:cNvPr id="10" name="Rectangle 9"/>
+          <p:cNvSpPr/>
+          <p:nvPr/>
+        </p:nvSpPr>
+        <p:spPr>
+          <a:xfrm>
+            <a:off x="914400" y="2606040"/>
+            <a:ext cx="3657600" cy="475488"/>
+          </a:xfrm>
+          <a:prstGeom prst="rect">
+            <a:avLst/>
+          </a:prstGeom>
+          <a:solidFill>
+            <a:srgbClr val="F5F8F7"/>
+          </a:solidFill>
+          <a:ln>
+            <a:noFill/>
+          </a:ln>
+          <a:effectLst/>
+        </p:spPr>
+        <p:style>
+          <a:lnRef idx="1">
+            <a:schemeClr val="accent1"/>
+          </a:lnRef>
+          <a:fillRef idx="3">
+            <a:schemeClr val="accent1"/>
+          </a:fillRef>
+          <a:effectRef idx="2">
+            <a:schemeClr val="accent1"/>
+          </a:effectRef>
+          <a:fontRef idx="minor">
+            <a:schemeClr val="lt1"/>
+          </a:fontRef>
+        </p:style>
+        <p:txBody>
+          <a:bodyPr rtlCol="0" anchor="ctr"/>
+          <a:lstStyle/>
+          <a:p>
+            <a:pPr algn="ctr"/>
+          </a:p>
+        </p:txBody>
+      </p:sp>
+      <p:sp>
+        <p:nvSpPr>
+          <p:cNvPr id="11" name="TextBox 10"/>
+          <p:cNvSpPr txBox="1"/>
+          <p:nvPr/>
+        </p:nvSpPr>
+        <p:spPr>
+          <a:xfrm>
+            <a:off x="1051560" y="2606040"/>
+            <a:ext cx="3383280" cy="475488"/>
+          </a:xfrm>
+          <a:prstGeom prst="rect">
+            <a:avLst/>
+          </a:prstGeom>
+          <a:noFill/>
+        </p:spPr>
+        <p:txBody>
+          <a:bodyPr wrap="square" anchor="ctr" lIns="0" rIns="0" tIns="0" bIns="0">
+            <a:spAutoFit/>
+          </a:bodyPr>
+          <a:lstStyle/>
+          <a:p>
+            <a:pPr algn="l">
+              <a:spcAft>
+                <a:spcPts val="0"/>
+              </a:spcAft>
+            </a:pPr>
+            <a:r>
+              <a:rPr sz="1150" b="0">
+                <a:solidFill>
+                  <a:srgbClr val="222B36"/>
+                </a:solidFill>
+                <a:latin typeface="Calibri"/>
+              </a:rPr>
+              <a:t>Durée de vie analysée</a:t>
+            </a:r>
+          </a:p>
+        </p:txBody>
+      </p:sp>
+      <p:sp>
+        <p:nvSpPr>
+          <p:cNvPr id="12" name="Rectangle 11"/>
+          <p:cNvSpPr/>
+          <p:nvPr/>
+        </p:nvSpPr>
+        <p:spPr>
+          <a:xfrm>
+            <a:off x="4572000" y="2606040"/>
+            <a:ext cx="2377440" cy="475488"/>
+          </a:xfrm>
+          <a:prstGeom prst="rect">
+            <a:avLst/>
+          </a:prstGeom>
+          <a:solidFill>
+            <a:srgbClr val="F5F8F7"/>
+          </a:solidFill>
+          <a:ln>
+            <a:noFill/>
+          </a:ln>
+          <a:effectLst/>
+        </p:spPr>
+        <p:style>
+          <a:lnRef idx="1">
+            <a:schemeClr val="accent1"/>
+          </a:lnRef>
+          <a:fillRef idx="3">
+            <a:schemeClr val="accent1"/>
+          </a:fillRef>
+          <a:effectRef idx="2">
+            <a:schemeClr val="accent1"/>
+          </a:effectRef>
+          <a:fontRef idx="minor">
+            <a:schemeClr val="lt1"/>
+          </a:fontRef>
+        </p:style>
+        <p:txBody>
+          <a:bodyPr rtlCol="0" anchor="ctr"/>
+          <a:lstStyle/>
+          <a:p>
+            <a:pPr algn="ctr"/>
+          </a:p>
+        </p:txBody>
+      </p:sp>
+      <p:sp>
+        <p:nvSpPr>
+          <p:cNvPr id="13" name="TextBox 12"/>
+          <p:cNvSpPr txBox="1"/>
+          <p:nvPr/>
+        </p:nvSpPr>
+        <p:spPr>
+          <a:xfrm>
+            <a:off x="4709160" y="2606040"/>
+            <a:ext cx="2103120" cy="475488"/>
+          </a:xfrm>
+          <a:prstGeom prst="rect">
+            <a:avLst/>
+          </a:prstGeom>
+          <a:noFill/>
+        </p:spPr>
+        <p:txBody>
+          <a:bodyPr wrap="square" anchor="ctr" lIns="0" rIns="0" tIns="0" bIns="0">
+            <a:spAutoFit/>
+          </a:bodyPr>
+          <a:lstStyle/>
+          <a:p>
+            <a:pPr algn="l">
+              <a:spcAft>
+                <a:spcPts val="0"/>
+              </a:spcAft>
+            </a:pPr>
+            <a:r>
+              <a:rPr sz="1150" b="1">
+                <a:solidFill>
+                  <a:srgbClr val="0E7C7B"/>
+                </a:solidFill>
+                <a:latin typeface="Calibri"/>
+              </a:rPr>
+              <a:t>25 ans</a:t>
+            </a:r>
+          </a:p>
+        </p:txBody>
+      </p:sp>
+      <p:sp>
+        <p:nvSpPr>
+          <p:cNvPr id="14" name="Rectangle 13"/>
+          <p:cNvSpPr/>
+          <p:nvPr/>
+        </p:nvSpPr>
+        <p:spPr>
+          <a:xfrm>
+            <a:off x="6949440" y="2606040"/>
+            <a:ext cx="4389120" cy="475488"/>
+          </a:xfrm>
+          <a:prstGeom prst="rect">
+            <a:avLst/>
+          </a:prstGeom>
+          <a:solidFill>
+            <a:srgbClr val="F5F8F7"/>
+          </a:solidFill>
+          <a:ln>
+            <a:noFill/>
+          </a:ln>
+          <a:effectLst/>
+        </p:spPr>
+        <p:style>
+          <a:lnRef idx="1">
+            <a:schemeClr val="accent1"/>
+          </a:lnRef>
+          <a:fillRef idx="3">
+            <a:schemeClr val="accent1"/>
+          </a:fillRef>
+          <a:effectRef idx="2">
+            <a:schemeClr val="accent1"/>
+          </a:effectRef>
+          <a:fontRef idx="minor">
+            <a:schemeClr val="lt1"/>
+          </a:fontRef>
+        </p:style>
+        <p:txBody>
+          <a:bodyPr rtlCol="0" anchor="ctr"/>
+          <a:lstStyle/>
+          <a:p>
+            <a:pPr algn="ctr"/>
+          </a:p>
+        </p:txBody>
+      </p:sp>
+      <p:sp>
+        <p:nvSpPr>
+          <p:cNvPr id="15" name="TextBox 14"/>
+          <p:cNvSpPr txBox="1"/>
+          <p:nvPr/>
+        </p:nvSpPr>
+        <p:spPr>
+          <a:xfrm>
+            <a:off x="7086600" y="2606040"/>
+            <a:ext cx="4114800" cy="475488"/>
+          </a:xfrm>
+          <a:prstGeom prst="rect">
+            <a:avLst/>
+          </a:prstGeom>
+          <a:noFill/>
+        </p:spPr>
+        <p:txBody>
+          <a:bodyPr wrap="square" anchor="ctr" lIns="0" rIns="0" tIns="0" bIns="0">
+            <a:spAutoFit/>
+          </a:bodyPr>
+          <a:lstStyle/>
+          <a:p>
+            <a:pPr algn="l">
+              <a:spcAft>
+                <a:spcPts val="0"/>
+              </a:spcAft>
+            </a:pPr>
+            <a:r>
+              <a:rPr sz="1150" b="0">
+                <a:solidFill>
+                  <a:srgbClr val="222B36"/>
+                </a:solidFill>
+                <a:latin typeface="Calibri"/>
+              </a:rPr>
+              <a:t>Durée de vie standard des panneaux</a:t>
+            </a:r>
+          </a:p>
+        </p:txBody>
+      </p:sp>
+      <p:sp>
+        <p:nvSpPr>
+          <p:cNvPr id="16" name="Rectangle 15"/>
+          <p:cNvSpPr/>
+          <p:nvPr/>
+        </p:nvSpPr>
+        <p:spPr>
+          <a:xfrm>
+            <a:off x="914400" y="3081528"/>
+            <a:ext cx="3657600" cy="475488"/>
+          </a:xfrm>
+          <a:prstGeom prst="rect">
+            <a:avLst/>
+          </a:prstGeom>
+          <a:solidFill>
+            <a:srgbClr val="FFFFFF"/>
+          </a:solidFill>
+          <a:ln>
+            <a:noFill/>
+          </a:ln>
+          <a:effectLst/>
+        </p:spPr>
+        <p:style>
+          <a:lnRef idx="1">
+            <a:schemeClr val="accent1"/>
+          </a:lnRef>
+          <a:fillRef idx="3">
+            <a:schemeClr val="accent1"/>
+          </a:fillRef>
+          <a:effectRef idx="2">
+            <a:schemeClr val="accent1"/>
+          </a:effectRef>
+          <a:fontRef idx="minor">
+            <a:schemeClr val="lt1"/>
+          </a:fontRef>
+        </p:style>
+        <p:txBody>
+          <a:bodyPr rtlCol="0" anchor="ctr"/>
+          <a:lstStyle/>
+          <a:p>
+            <a:pPr algn="ctr"/>
+          </a:p>
+        </p:txBody>
+      </p:sp>
+      <p:sp>
+        <p:nvSpPr>
+          <p:cNvPr id="17" name="TextBox 16"/>
+          <p:cNvSpPr txBox="1"/>
+          <p:nvPr/>
+        </p:nvSpPr>
+        <p:spPr>
+          <a:xfrm>
+            <a:off x="1051560" y="3081528"/>
+            <a:ext cx="3383280" cy="475488"/>
+          </a:xfrm>
+          <a:prstGeom prst="rect">
+            <a:avLst/>
+          </a:prstGeom>
+          <a:noFill/>
+        </p:spPr>
+        <p:txBody>
+          <a:bodyPr wrap="square" anchor="ctr" lIns="0" rIns="0" tIns="0" bIns="0">
+            <a:spAutoFit/>
+          </a:bodyPr>
+          <a:lstStyle/>
+          <a:p>
+            <a:pPr algn="l">
+              <a:spcAft>
+                <a:spcPts val="0"/>
+              </a:spcAft>
+            </a:pPr>
+            <a:r>
+              <a:rPr sz="1150" b="0">
+                <a:solidFill>
+                  <a:srgbClr val="222B36"/>
+                </a:solidFill>
+                <a:latin typeface="Calibri"/>
+              </a:rPr>
+              <a:t>Prix de l'électricité réseau</a:t>
+            </a:r>
+          </a:p>
+        </p:txBody>
+      </p:sp>
+      <p:sp>
+        <p:nvSpPr>
+          <p:cNvPr id="18" name="Rectangle 17"/>
+          <p:cNvSpPr/>
+          <p:nvPr/>
+        </p:nvSpPr>
+        <p:spPr>
+          <a:xfrm>
+            <a:off x="4572000" y="3081528"/>
+            <a:ext cx="2377440" cy="475488"/>
+          </a:xfrm>
+          <a:prstGeom prst="rect">
+            <a:avLst/>
+          </a:prstGeom>
+          <a:solidFill>
+            <a:srgbClr val="FFFFFF"/>
+          </a:solidFill>
+          <a:ln>
+            <a:noFill/>
+          </a:ln>
+          <a:effectLst/>
+        </p:spPr>
+        <p:style>
+          <a:lnRef idx="1">
+            <a:schemeClr val="accent1"/>
+          </a:lnRef>
+          <a:fillRef idx="3">
+            <a:schemeClr val="accent1"/>
+          </a:fillRef>
+          <a:effectRef idx="2">
+            <a:schemeClr val="accent1"/>
+          </a:effectRef>
+          <a:fontRef idx="minor">
+            <a:schemeClr val="lt1"/>
+          </a:fontRef>
+        </p:style>
+        <p:txBody>
+          <a:bodyPr rtlCol="0" anchor="ctr"/>
+          <a:lstStyle/>
+          <a:p>
+            <a:pPr algn="ctr"/>
+          </a:p>
+        </p:txBody>
+      </p:sp>
+      <p:sp>
+        <p:nvSpPr>
+          <p:cNvPr id="19" name="TextBox 18"/>
+          <p:cNvSpPr txBox="1"/>
+          <p:nvPr/>
+        </p:nvSpPr>
+        <p:spPr>
+          <a:xfrm>
+            <a:off x="4709160" y="3081528"/>
+            <a:ext cx="2103120" cy="475488"/>
+          </a:xfrm>
+          <a:prstGeom prst="rect">
+            <a:avLst/>
+          </a:prstGeom>
+          <a:noFill/>
+        </p:spPr>
+        <p:txBody>
+          <a:bodyPr wrap="square" anchor="ctr" lIns="0" rIns="0" tIns="0" bIns="0">
+            <a:spAutoFit/>
+          </a:bodyPr>
+          <a:lstStyle/>
+          <a:p>
+            <a:pPr algn="l">
+              <a:spcAft>
+                <a:spcPts val="0"/>
+              </a:spcAft>
+            </a:pPr>
+            <a:r>
+              <a:rPr sz="1150" b="1">
+                <a:solidFill>
+                  <a:srgbClr val="0E7C7B"/>
+                </a:solidFill>
+                <a:latin typeface="Calibri"/>
+              </a:rPr>
+              <a:t>~20 c/kWh</a:t>
+            </a:r>
+          </a:p>
+        </p:txBody>
+      </p:sp>
+      <p:sp>
+        <p:nvSpPr>
+          <p:cNvPr id="20" name="Rectangle 19"/>
+          <p:cNvSpPr/>
+          <p:nvPr/>
+        </p:nvSpPr>
+        <p:spPr>
+          <a:xfrm>
+            <a:off x="6949440" y="3081528"/>
+            <a:ext cx="4389120" cy="475488"/>
+          </a:xfrm>
+          <a:prstGeom prst="rect">
+            <a:avLst/>
+          </a:prstGeom>
+          <a:solidFill>
+            <a:srgbClr val="FFFFFF"/>
+          </a:solidFill>
+          <a:ln>
+            <a:noFill/>
+          </a:ln>
+          <a:effectLst/>
+        </p:spPr>
+        <p:style>
+          <a:lnRef idx="1">
+            <a:schemeClr val="accent1"/>
+          </a:lnRef>
+          <a:fillRef idx="3">
+            <a:schemeClr val="accent1"/>
+          </a:fillRef>
+          <a:effectRef idx="2">
+            <a:schemeClr val="accent1"/>
+          </a:effectRef>
+          <a:fontRef idx="minor">
+            <a:schemeClr val="lt1"/>
+          </a:fontRef>
+        </p:style>
+        <p:txBody>
+          <a:bodyPr rtlCol="0" anchor="ctr"/>
+          <a:lstStyle/>
+          <a:p>
+            <a:pPr algn="ctr"/>
+          </a:p>
+        </p:txBody>
+      </p:sp>
+      <p:sp>
+        <p:nvSpPr>
+          <p:cNvPr id="21" name="TextBox 20"/>
+          <p:cNvSpPr txBox="1"/>
+          <p:nvPr/>
+        </p:nvSpPr>
+        <p:spPr>
+          <a:xfrm>
+            <a:off x="7086600" y="3081528"/>
+            <a:ext cx="4114800" cy="475488"/>
+          </a:xfrm>
+          <a:prstGeom prst="rect">
+            <a:avLst/>
+          </a:prstGeom>
+          <a:noFill/>
+        </p:spPr>
+        <p:txBody>
+          <a:bodyPr wrap="square" anchor="ctr" lIns="0" rIns="0" tIns="0" bIns="0">
+            <a:spAutoFit/>
+          </a:bodyPr>
+          <a:lstStyle/>
+          <a:p>
+            <a:pPr algn="l">
+              <a:spcAft>
+                <a:spcPts val="0"/>
+              </a:spcAft>
+            </a:pPr>
+            <a:r>
+              <a:rPr sz="1150" b="0">
+                <a:solidFill>
+                  <a:srgbClr val="222B36"/>
+                </a:solidFill>
+                <a:latin typeface="Calibri"/>
+              </a:rPr>
+              <a:t>Prix moyen évité en tertiaire</a:t>
+            </a:r>
+          </a:p>
+        </p:txBody>
+      </p:sp>
+      <p:sp>
+        <p:nvSpPr>
+          <p:cNvPr id="22" name="Rectangle 21"/>
+          <p:cNvSpPr/>
+          <p:nvPr/>
+        </p:nvSpPr>
+        <p:spPr>
+          <a:xfrm>
+            <a:off x="914400" y="3557016"/>
+            <a:ext cx="3657600" cy="475488"/>
+          </a:xfrm>
+          <a:prstGeom prst="rect">
+            <a:avLst/>
+          </a:prstGeom>
+          <a:solidFill>
+            <a:srgbClr val="F5F8F7"/>
+          </a:solidFill>
+          <a:ln>
+            <a:noFill/>
+          </a:ln>
+          <a:effectLst/>
+        </p:spPr>
+        <p:style>
+          <a:lnRef idx="1">
+            <a:schemeClr val="accent1"/>
+          </a:lnRef>
+          <a:fillRef idx="3">
+            <a:schemeClr val="accent1"/>
+          </a:fillRef>
+          <a:effectRef idx="2">
+            <a:schemeClr val="accent1"/>
+          </a:effectRef>
+          <a:fontRef idx="minor">
+            <a:schemeClr val="lt1"/>
+          </a:fontRef>
+        </p:style>
+        <p:txBody>
+          <a:bodyPr rtlCol="0" anchor="ctr"/>
+          <a:lstStyle/>
+          <a:p>
+            <a:pPr algn="ctr"/>
+          </a:p>
+        </p:txBody>
+      </p:sp>
+      <p:sp>
+        <p:nvSpPr>
+          <p:cNvPr id="23" name="TextBox 22"/>
+          <p:cNvSpPr txBox="1"/>
+          <p:nvPr/>
+        </p:nvSpPr>
+        <p:spPr>
+          <a:xfrm>
+            <a:off x="1051560" y="3557016"/>
+            <a:ext cx="3383280" cy="475488"/>
+          </a:xfrm>
+          <a:prstGeom prst="rect">
+            <a:avLst/>
+          </a:prstGeom>
+          <a:noFill/>
+        </p:spPr>
+        <p:txBody>
+          <a:bodyPr wrap="square" anchor="ctr" lIns="0" rIns="0" tIns="0" bIns="0">
+            <a:spAutoFit/>
+          </a:bodyPr>
+          <a:lstStyle/>
+          <a:p>
+            <a:pPr algn="l">
+              <a:spcAft>
+                <a:spcPts val="0"/>
+              </a:spcAft>
+            </a:pPr>
+            <a:r>
+              <a:rPr sz="1150" b="0">
+                <a:solidFill>
+                  <a:srgbClr val="222B36"/>
+                </a:solidFill>
+                <a:latin typeface="Calibri"/>
+              </a:rPr>
+              <a:t>Tarif de revente</a:t>
+            </a:r>
+          </a:p>
+        </p:txBody>
+      </p:sp>
+      <p:sp>
+        <p:nvSpPr>
+          <p:cNvPr id="24" name="Rectangle 23"/>
+          <p:cNvSpPr/>
+          <p:nvPr/>
+        </p:nvSpPr>
+        <p:spPr>
+          <a:xfrm>
+            <a:off x="4572000" y="3557016"/>
+            <a:ext cx="2377440" cy="475488"/>
+          </a:xfrm>
+          <a:prstGeom prst="rect">
+            <a:avLst/>
+          </a:prstGeom>
+          <a:solidFill>
+            <a:srgbClr val="F5F8F7"/>
+          </a:solidFill>
+          <a:ln>
+            <a:noFill/>
+          </a:ln>
+          <a:effectLst/>
+        </p:spPr>
+        <p:style>
+          <a:lnRef idx="1">
+            <a:schemeClr val="accent1"/>
+          </a:lnRef>
+          <a:fillRef idx="3">
+            <a:schemeClr val="accent1"/>
+          </a:fillRef>
+          <a:effectRef idx="2">
+            <a:schemeClr val="accent1"/>
+          </a:effectRef>
+          <a:fontRef idx="minor">
+            <a:schemeClr val="lt1"/>
+          </a:fontRef>
+        </p:style>
+        <p:txBody>
+          <a:bodyPr rtlCol="0" anchor="ctr"/>
+          <a:lstStyle/>
+          <a:p>
+            <a:pPr algn="ctr"/>
+          </a:p>
+        </p:txBody>
+      </p:sp>
+      <p:sp>
+        <p:nvSpPr>
+          <p:cNvPr id="25" name="TextBox 24"/>
+          <p:cNvSpPr txBox="1"/>
+          <p:nvPr/>
+        </p:nvSpPr>
+        <p:spPr>
+          <a:xfrm>
+            <a:off x="4709160" y="3557016"/>
+            <a:ext cx="2103120" cy="475488"/>
+          </a:xfrm>
+          <a:prstGeom prst="rect">
+            <a:avLst/>
+          </a:prstGeom>
+          <a:noFill/>
+        </p:spPr>
+        <p:txBody>
+          <a:bodyPr wrap="square" anchor="ctr" lIns="0" rIns="0" tIns="0" bIns="0">
+            <a:spAutoFit/>
+          </a:bodyPr>
+          <a:lstStyle/>
+          <a:p>
+            <a:pPr algn="l">
+              <a:spcAft>
+                <a:spcPts val="0"/>
+              </a:spcAft>
+            </a:pPr>
+            <a:r>
+              <a:rPr sz="1150" b="1">
+                <a:solidFill>
+                  <a:srgbClr val="0E7C7B"/>
+                </a:solidFill>
+                <a:latin typeface="Calibri"/>
+              </a:rPr>
+              <a:t>8–13 c/kWh</a:t>
+            </a:r>
+          </a:p>
+        </p:txBody>
+      </p:sp>
+      <p:sp>
+        <p:nvSpPr>
+          <p:cNvPr id="26" name="Rectangle 25"/>
+          <p:cNvSpPr/>
+          <p:nvPr/>
+        </p:nvSpPr>
+        <p:spPr>
+          <a:xfrm>
+            <a:off x="6949440" y="3557016"/>
+            <a:ext cx="4389120" cy="475488"/>
+          </a:xfrm>
+          <a:prstGeom prst="rect">
+            <a:avLst/>
+          </a:prstGeom>
+          <a:solidFill>
+            <a:srgbClr val="F5F8F7"/>
+          </a:solidFill>
+          <a:ln>
+            <a:noFill/>
+          </a:ln>
+          <a:effectLst/>
+        </p:spPr>
+        <p:style>
+          <a:lnRef idx="1">
+            <a:schemeClr val="accent1"/>
+          </a:lnRef>
+          <a:fillRef idx="3">
+            <a:schemeClr val="accent1"/>
+          </a:fillRef>
+          <a:effectRef idx="2">
+            <a:schemeClr val="accent1"/>
+          </a:effectRef>
+          <a:fontRef idx="minor">
+            <a:schemeClr val="lt1"/>
+          </a:fontRef>
+        </p:style>
+        <p:txBody>
+          <a:bodyPr rtlCol="0" anchor="ctr"/>
+          <a:lstStyle/>
+          <a:p>
+            <a:pPr algn="ctr"/>
+          </a:p>
+        </p:txBody>
+      </p:sp>
+      <p:sp>
+        <p:nvSpPr>
+          <p:cNvPr id="27" name="TextBox 26"/>
+          <p:cNvSpPr txBox="1"/>
+          <p:nvPr/>
+        </p:nvSpPr>
+        <p:spPr>
+          <a:xfrm>
+            <a:off x="7086600" y="3557016"/>
+            <a:ext cx="4114800" cy="475488"/>
+          </a:xfrm>
+          <a:prstGeom prst="rect">
+            <a:avLst/>
+          </a:prstGeom>
+          <a:noFill/>
+        </p:spPr>
+        <p:txBody>
+          <a:bodyPr wrap="square" anchor="ctr" lIns="0" rIns="0" tIns="0" bIns="0">
+            <a:spAutoFit/>
+          </a:bodyPr>
+          <a:lstStyle/>
+          <a:p>
+            <a:pPr algn="l">
+              <a:spcAft>
+                <a:spcPts val="0"/>
+              </a:spcAft>
+            </a:pPr>
+            <a:r>
+              <a:rPr sz="1150" b="0">
+                <a:solidFill>
+                  <a:srgbClr val="222B36"/>
+                </a:solidFill>
+                <a:latin typeface="Calibri"/>
+              </a:rPr>
+              <a:t>Arrêté tarifaire S21 (réglementé)</a:t>
+            </a:r>
+          </a:p>
+        </p:txBody>
+      </p:sp>
+      <p:sp>
+        <p:nvSpPr>
+          <p:cNvPr id="28" name="Rectangle 27"/>
+          <p:cNvSpPr/>
+          <p:nvPr/>
+        </p:nvSpPr>
+        <p:spPr>
+          <a:xfrm>
+            <a:off x="914400" y="4032504"/>
+            <a:ext cx="3657600" cy="475488"/>
+          </a:xfrm>
+          <a:prstGeom prst="rect">
+            <a:avLst/>
+          </a:prstGeom>
+          <a:solidFill>
+            <a:srgbClr val="FFFFFF"/>
+          </a:solidFill>
+          <a:ln>
+            <a:noFill/>
+          </a:ln>
+          <a:effectLst/>
+        </p:spPr>
+        <p:style>
+          <a:lnRef idx="1">
+            <a:schemeClr val="accent1"/>
+          </a:lnRef>
+          <a:fillRef idx="3">
+            <a:schemeClr val="accent1"/>
+          </a:fillRef>
+          <a:effectRef idx="2">
+            <a:schemeClr val="accent1"/>
+          </a:effectRef>
+          <a:fontRef idx="minor">
+            <a:schemeClr val="lt1"/>
+          </a:fontRef>
+        </p:style>
+        <p:txBody>
+          <a:bodyPr rtlCol="0" anchor="ctr"/>
+          <a:lstStyle/>
+          <a:p>
+            <a:pPr algn="ctr"/>
+          </a:p>
+        </p:txBody>
+      </p:sp>
+      <p:sp>
+        <p:nvSpPr>
+          <p:cNvPr id="29" name="TextBox 28"/>
+          <p:cNvSpPr txBox="1"/>
+          <p:nvPr/>
+        </p:nvSpPr>
+        <p:spPr>
+          <a:xfrm>
+            <a:off x="1051560" y="4032504"/>
+            <a:ext cx="3383280" cy="475488"/>
+          </a:xfrm>
+          <a:prstGeom prst="rect">
+            <a:avLst/>
+          </a:prstGeom>
+          <a:noFill/>
+        </p:spPr>
+        <p:txBody>
+          <a:bodyPr wrap="square" anchor="ctr" lIns="0" rIns="0" tIns="0" bIns="0">
+            <a:spAutoFit/>
+          </a:bodyPr>
+          <a:lstStyle/>
+          <a:p>
+            <a:pPr algn="l">
+              <a:spcAft>
+                <a:spcPts val="0"/>
+              </a:spcAft>
+            </a:pPr>
+            <a:r>
+              <a:rPr sz="1150" b="0">
+                <a:solidFill>
+                  <a:srgbClr val="222B36"/>
+                </a:solidFill>
+                <a:latin typeface="Calibri"/>
+              </a:rPr>
+              <a:t>Coût d'installation (CAPEX)</a:t>
+            </a:r>
+          </a:p>
+        </p:txBody>
+      </p:sp>
+      <p:sp>
+        <p:nvSpPr>
+          <p:cNvPr id="30" name="Rectangle 29"/>
+          <p:cNvSpPr/>
+          <p:nvPr/>
+        </p:nvSpPr>
+        <p:spPr>
+          <a:xfrm>
+            <a:off x="4572000" y="4032504"/>
+            <a:ext cx="2377440" cy="475488"/>
+          </a:xfrm>
+          <a:prstGeom prst="rect">
+            <a:avLst/>
+          </a:prstGeom>
+          <a:solidFill>
+            <a:srgbClr val="FFFFFF"/>
+          </a:solidFill>
+          <a:ln>
+            <a:noFill/>
+          </a:ln>
+          <a:effectLst/>
+        </p:spPr>
+        <p:style>
+          <a:lnRef idx="1">
+            <a:schemeClr val="accent1"/>
+          </a:lnRef>
+          <a:fillRef idx="3">
+            <a:schemeClr val="accent1"/>
+          </a:fillRef>
+          <a:effectRef idx="2">
+            <a:schemeClr val="accent1"/>
+          </a:effectRef>
+          <a:fontRef idx="minor">
+            <a:schemeClr val="lt1"/>
+          </a:fontRef>
+        </p:style>
+        <p:txBody>
+          <a:bodyPr rtlCol="0" anchor="ctr"/>
+          <a:lstStyle/>
+          <a:p>
+            <a:pPr algn="ctr"/>
+          </a:p>
+        </p:txBody>
+      </p:sp>
+      <p:sp>
+        <p:nvSpPr>
+          <p:cNvPr id="31" name="TextBox 30"/>
+          <p:cNvSpPr txBox="1"/>
+          <p:nvPr/>
+        </p:nvSpPr>
+        <p:spPr>
+          <a:xfrm>
+            <a:off x="4709160" y="4032504"/>
+            <a:ext cx="2103120" cy="475488"/>
+          </a:xfrm>
+          <a:prstGeom prst="rect">
+            <a:avLst/>
+          </a:prstGeom>
+          <a:noFill/>
+        </p:spPr>
+        <p:txBody>
+          <a:bodyPr wrap="square" anchor="ctr" lIns="0" rIns="0" tIns="0" bIns="0">
+            <a:spAutoFit/>
+          </a:bodyPr>
+          <a:lstStyle/>
+          <a:p>
+            <a:pPr algn="l">
+              <a:spcAft>
+                <a:spcPts val="0"/>
+              </a:spcAft>
+            </a:pPr>
+            <a:r>
+              <a:rPr sz="1150" b="1">
+                <a:solidFill>
+                  <a:srgbClr val="0E7C7B"/>
+                </a:solidFill>
+                <a:latin typeface="Calibri"/>
+              </a:rPr>
+              <a:t>1100–1850 €/kWc</a:t>
+            </a:r>
+          </a:p>
+        </p:txBody>
+      </p:sp>
+      <p:sp>
+        <p:nvSpPr>
+          <p:cNvPr id="32" name="Rectangle 31"/>
+          <p:cNvSpPr/>
+          <p:nvPr/>
+        </p:nvSpPr>
+        <p:spPr>
+          <a:xfrm>
+            <a:off x="6949440" y="4032504"/>
+            <a:ext cx="4389120" cy="475488"/>
+          </a:xfrm>
+          <a:prstGeom prst="rect">
+            <a:avLst/>
+          </a:prstGeom>
+          <a:solidFill>
+            <a:srgbClr val="FFFFFF"/>
+          </a:solidFill>
+          <a:ln>
+            <a:noFill/>
+          </a:ln>
+          <a:effectLst/>
+        </p:spPr>
+        <p:style>
+          <a:lnRef idx="1">
+            <a:schemeClr val="accent1"/>
+          </a:lnRef>
+          <a:fillRef idx="3">
+            <a:schemeClr val="accent1"/>
+          </a:fillRef>
+          <a:effectRef idx="2">
+            <a:schemeClr val="accent1"/>
+          </a:effectRef>
+          <a:fontRef idx="minor">
+            <a:schemeClr val="lt1"/>
+          </a:fontRef>
+        </p:style>
+        <p:txBody>
+          <a:bodyPr rtlCol="0" anchor="ctr"/>
+          <a:lstStyle/>
+          <a:p>
+            <a:pPr algn="ctr"/>
+          </a:p>
+        </p:txBody>
+      </p:sp>
+      <p:sp>
+        <p:nvSpPr>
+          <p:cNvPr id="33" name="TextBox 32"/>
+          <p:cNvSpPr txBox="1"/>
+          <p:nvPr/>
+        </p:nvSpPr>
+        <p:spPr>
+          <a:xfrm>
+            <a:off x="7086600" y="4032504"/>
+            <a:ext cx="4114800" cy="475488"/>
+          </a:xfrm>
+          <a:prstGeom prst="rect">
+            <a:avLst/>
+          </a:prstGeom>
+          <a:noFill/>
+        </p:spPr>
+        <p:txBody>
+          <a:bodyPr wrap="square" anchor="ctr" lIns="0" rIns="0" tIns="0" bIns="0">
+            <a:spAutoFit/>
+          </a:bodyPr>
+          <a:lstStyle/>
+          <a:p>
+            <a:pPr algn="l">
+              <a:spcAft>
+                <a:spcPts val="0"/>
+              </a:spcAft>
+            </a:pPr>
+            <a:r>
+              <a:rPr sz="1150" b="0">
+                <a:solidFill>
+                  <a:srgbClr val="222B36"/>
+                </a:solidFill>
+                <a:latin typeface="Calibri"/>
+              </a:rPr>
+              <a:t>Fourchettes de marché selon la taille</a:t>
+            </a:r>
+          </a:p>
+        </p:txBody>
+      </p:sp>
+      <p:sp>
+        <p:nvSpPr>
+          <p:cNvPr id="34" name="Rectangle 33"/>
+          <p:cNvSpPr/>
+          <p:nvPr/>
+        </p:nvSpPr>
+        <p:spPr>
+          <a:xfrm>
+            <a:off x="914400" y="4507992"/>
+            <a:ext cx="3657600" cy="475488"/>
+          </a:xfrm>
+          <a:prstGeom prst="rect">
+            <a:avLst/>
+          </a:prstGeom>
+          <a:solidFill>
+            <a:srgbClr val="F5F8F7"/>
+          </a:solidFill>
+          <a:ln>
+            <a:noFill/>
+          </a:ln>
+          <a:effectLst/>
+        </p:spPr>
+        <p:style>
+          <a:lnRef idx="1">
+            <a:schemeClr val="accent1"/>
+          </a:lnRef>
+          <a:fillRef idx="3">
+            <a:schemeClr val="accent1"/>
+          </a:fillRef>
+          <a:effectRef idx="2">
+            <a:schemeClr val="accent1"/>
+          </a:effectRef>
+          <a:fontRef idx="minor">
+            <a:schemeClr val="lt1"/>
+          </a:fontRef>
+        </p:style>
+        <p:txBody>
+          <a:bodyPr rtlCol="0" anchor="ctr"/>
+          <a:lstStyle/>
+          <a:p>
+            <a:pPr algn="ctr"/>
+          </a:p>
+        </p:txBody>
+      </p:sp>
+      <p:sp>
+        <p:nvSpPr>
+          <p:cNvPr id="35" name="TextBox 34"/>
+          <p:cNvSpPr txBox="1"/>
+          <p:nvPr/>
+        </p:nvSpPr>
+        <p:spPr>
+          <a:xfrm>
+            <a:off x="1051560" y="4507992"/>
+            <a:ext cx="3383280" cy="475488"/>
+          </a:xfrm>
+          <a:prstGeom prst="rect">
+            <a:avLst/>
+          </a:prstGeom>
+          <a:noFill/>
+        </p:spPr>
+        <p:txBody>
+          <a:bodyPr wrap="square" anchor="ctr" lIns="0" rIns="0" tIns="0" bIns="0">
+            <a:spAutoFit/>
+          </a:bodyPr>
+          <a:lstStyle/>
+          <a:p>
+            <a:pPr algn="l">
+              <a:spcAft>
+                <a:spcPts val="0"/>
+              </a:spcAft>
+            </a:pPr>
+            <a:r>
+              <a:rPr sz="1150" b="0">
+                <a:solidFill>
+                  <a:srgbClr val="222B36"/>
+                </a:solidFill>
+                <a:latin typeface="Calibri"/>
+              </a:rPr>
+              <a:t>Entretien (OPEX)</a:t>
+            </a:r>
+          </a:p>
+        </p:txBody>
+      </p:sp>
+      <p:sp>
+        <p:nvSpPr>
+          <p:cNvPr id="36" name="Rectangle 35"/>
+          <p:cNvSpPr/>
+          <p:nvPr/>
+        </p:nvSpPr>
+        <p:spPr>
+          <a:xfrm>
+            <a:off x="4572000" y="4507992"/>
+            <a:ext cx="2377440" cy="475488"/>
+          </a:xfrm>
+          <a:prstGeom prst="rect">
+            <a:avLst/>
+          </a:prstGeom>
+          <a:solidFill>
+            <a:srgbClr val="F5F8F7"/>
+          </a:solidFill>
+          <a:ln>
+            <a:noFill/>
+          </a:ln>
+          <a:effectLst/>
+        </p:spPr>
+        <p:style>
+          <a:lnRef idx="1">
+            <a:schemeClr val="accent1"/>
+          </a:lnRef>
+          <a:fillRef idx="3">
+            <a:schemeClr val="accent1"/>
+          </a:fillRef>
+          <a:effectRef idx="2">
+            <a:schemeClr val="accent1"/>
+          </a:effectRef>
+          <a:fontRef idx="minor">
+            <a:schemeClr val="lt1"/>
+          </a:fontRef>
+        </p:style>
+        <p:txBody>
+          <a:bodyPr rtlCol="0" anchor="ctr"/>
+          <a:lstStyle/>
+          <a:p>
+            <a:pPr algn="ctr"/>
+          </a:p>
+        </p:txBody>
+      </p:sp>
+      <p:sp>
+        <p:nvSpPr>
+          <p:cNvPr id="37" name="TextBox 36"/>
+          <p:cNvSpPr txBox="1"/>
+          <p:nvPr/>
+        </p:nvSpPr>
+        <p:spPr>
+          <a:xfrm>
+            <a:off x="4709160" y="4507992"/>
+            <a:ext cx="2103120" cy="475488"/>
+          </a:xfrm>
+          <a:prstGeom prst="rect">
+            <a:avLst/>
+          </a:prstGeom>
+          <a:noFill/>
+        </p:spPr>
+        <p:txBody>
+          <a:bodyPr wrap="square" anchor="ctr" lIns="0" rIns="0" tIns="0" bIns="0">
+            <a:spAutoFit/>
+          </a:bodyPr>
+          <a:lstStyle/>
+          <a:p>
+            <a:pPr algn="l">
+              <a:spcAft>
+                <a:spcPts val="0"/>
+              </a:spcAft>
+            </a:pPr>
+            <a:r>
+              <a:rPr sz="1150" b="1">
+                <a:solidFill>
+                  <a:srgbClr val="0E7C7B"/>
+                </a:solidFill>
+                <a:latin typeface="Calibri"/>
+              </a:rPr>
+              <a:t>1,5 %/an</a:t>
+            </a:r>
+          </a:p>
+        </p:txBody>
+      </p:sp>
+      <p:sp>
+        <p:nvSpPr>
+          <p:cNvPr id="38" name="Rectangle 37"/>
+          <p:cNvSpPr/>
+          <p:nvPr/>
+        </p:nvSpPr>
+        <p:spPr>
+          <a:xfrm>
+            <a:off x="6949440" y="4507992"/>
+            <a:ext cx="4389120" cy="475488"/>
+          </a:xfrm>
+          <a:prstGeom prst="rect">
+            <a:avLst/>
+          </a:prstGeom>
+          <a:solidFill>
+            <a:srgbClr val="F5F8F7"/>
+          </a:solidFill>
+          <a:ln>
+            <a:noFill/>
+          </a:ln>
+          <a:effectLst/>
+        </p:spPr>
+        <p:style>
+          <a:lnRef idx="1">
+            <a:schemeClr val="accent1"/>
+          </a:lnRef>
+          <a:fillRef idx="3">
+            <a:schemeClr val="accent1"/>
+          </a:fillRef>
+          <a:effectRef idx="2">
+            <a:schemeClr val="accent1"/>
+          </a:effectRef>
+          <a:fontRef idx="minor">
+            <a:schemeClr val="lt1"/>
+          </a:fontRef>
+        </p:style>
+        <p:txBody>
+          <a:bodyPr rtlCol="0" anchor="ctr"/>
+          <a:lstStyle/>
+          <a:p>
+            <a:pPr algn="ctr"/>
+          </a:p>
+        </p:txBody>
+      </p:sp>
+      <p:sp>
+        <p:nvSpPr>
+          <p:cNvPr id="39" name="TextBox 38"/>
+          <p:cNvSpPr txBox="1"/>
+          <p:nvPr/>
+        </p:nvSpPr>
+        <p:spPr>
+          <a:xfrm>
+            <a:off x="7086600" y="4507992"/>
+            <a:ext cx="4114800" cy="475488"/>
+          </a:xfrm>
+          <a:prstGeom prst="rect">
+            <a:avLst/>
+          </a:prstGeom>
+          <a:noFill/>
+        </p:spPr>
+        <p:txBody>
+          <a:bodyPr wrap="square" anchor="ctr" lIns="0" rIns="0" tIns="0" bIns="0">
+            <a:spAutoFit/>
+          </a:bodyPr>
+          <a:lstStyle/>
+          <a:p>
+            <a:pPr algn="l">
+              <a:spcAft>
+                <a:spcPts val="0"/>
+              </a:spcAft>
+            </a:pPr>
+            <a:r>
+              <a:rPr sz="1150" b="0">
+                <a:solidFill>
+                  <a:srgbClr val="222B36"/>
+                </a:solidFill>
+                <a:latin typeface="Calibri"/>
+              </a:rPr>
+              <a:t>Maintenance courante d'une installation PV</a:t>
+            </a:r>
+          </a:p>
+        </p:txBody>
+      </p:sp>
+      <p:sp>
+        <p:nvSpPr>
+          <p:cNvPr id="40" name="Rectangle 39"/>
+          <p:cNvSpPr/>
+          <p:nvPr/>
+        </p:nvSpPr>
+        <p:spPr>
+          <a:xfrm>
+            <a:off x="914400" y="4983480"/>
+            <a:ext cx="3657600" cy="475488"/>
+          </a:xfrm>
+          <a:prstGeom prst="rect">
+            <a:avLst/>
+          </a:prstGeom>
+          <a:solidFill>
+            <a:srgbClr val="FFFFFF"/>
+          </a:solidFill>
+          <a:ln>
+            <a:noFill/>
+          </a:ln>
+          <a:effectLst/>
+        </p:spPr>
+        <p:style>
+          <a:lnRef idx="1">
+            <a:schemeClr val="accent1"/>
+          </a:lnRef>
+          <a:fillRef idx="3">
+            <a:schemeClr val="accent1"/>
+          </a:fillRef>
+          <a:effectRef idx="2">
+            <a:schemeClr val="accent1"/>
+          </a:effectRef>
+          <a:fontRef idx="minor">
+            <a:schemeClr val="lt1"/>
+          </a:fontRef>
+        </p:style>
+        <p:txBody>
+          <a:bodyPr rtlCol="0" anchor="ctr"/>
+          <a:lstStyle/>
+          <a:p>
+            <a:pPr algn="ctr"/>
+          </a:p>
+        </p:txBody>
+      </p:sp>
+      <p:sp>
+        <p:nvSpPr>
+          <p:cNvPr id="41" name="TextBox 40"/>
+          <p:cNvSpPr txBox="1"/>
+          <p:nvPr/>
+        </p:nvSpPr>
+        <p:spPr>
+          <a:xfrm>
+            <a:off x="1051560" y="4983480"/>
+            <a:ext cx="3383280" cy="475488"/>
+          </a:xfrm>
+          <a:prstGeom prst="rect">
+            <a:avLst/>
+          </a:prstGeom>
+          <a:noFill/>
+        </p:spPr>
+        <p:txBody>
+          <a:bodyPr wrap="square" anchor="ctr" lIns="0" rIns="0" tIns="0" bIns="0">
+            <a:spAutoFit/>
+          </a:bodyPr>
+          <a:lstStyle/>
+          <a:p>
+            <a:pPr algn="l">
+              <a:spcAft>
+                <a:spcPts val="0"/>
+              </a:spcAft>
+            </a:pPr>
+            <a:r>
+              <a:rPr sz="1150" b="0">
+                <a:solidFill>
+                  <a:srgbClr val="222B36"/>
+                </a:solidFill>
+                <a:latin typeface="Calibri"/>
+              </a:rPr>
+              <a:t>Taux d'autoconsommation</a:t>
+            </a:r>
+          </a:p>
+        </p:txBody>
+      </p:sp>
+      <p:sp>
+        <p:nvSpPr>
+          <p:cNvPr id="42" name="Rectangle 41"/>
+          <p:cNvSpPr/>
+          <p:nvPr/>
+        </p:nvSpPr>
+        <p:spPr>
+          <a:xfrm>
+            <a:off x="4572000" y="4983480"/>
+            <a:ext cx="2377440" cy="475488"/>
+          </a:xfrm>
+          <a:prstGeom prst="rect">
+            <a:avLst/>
+          </a:prstGeom>
+          <a:solidFill>
+            <a:srgbClr val="FFFFFF"/>
+          </a:solidFill>
+          <a:ln>
+            <a:noFill/>
+          </a:ln>
+          <a:effectLst/>
+        </p:spPr>
+        <p:style>
+          <a:lnRef idx="1">
+            <a:schemeClr val="accent1"/>
+          </a:lnRef>
+          <a:fillRef idx="3">
+            <a:schemeClr val="accent1"/>
+          </a:fillRef>
+          <a:effectRef idx="2">
+            <a:schemeClr val="accent1"/>
+          </a:effectRef>
+          <a:fontRef idx="minor">
+            <a:schemeClr val="lt1"/>
+          </a:fontRef>
+        </p:style>
+        <p:txBody>
+          <a:bodyPr rtlCol="0" anchor="ctr"/>
+          <a:lstStyle/>
+          <a:p>
+            <a:pPr algn="ctr"/>
+          </a:p>
+        </p:txBody>
+      </p:sp>
+      <p:sp>
+        <p:nvSpPr>
+          <p:cNvPr id="43" name="TextBox 42"/>
+          <p:cNvSpPr txBox="1"/>
+          <p:nvPr/>
+        </p:nvSpPr>
+        <p:spPr>
+          <a:xfrm>
+            <a:off x="4709160" y="4983480"/>
+            <a:ext cx="2103120" cy="475488"/>
+          </a:xfrm>
+          <a:prstGeom prst="rect">
+            <a:avLst/>
+          </a:prstGeom>
+          <a:noFill/>
+        </p:spPr>
+        <p:txBody>
+          <a:bodyPr wrap="square" anchor="ctr" lIns="0" rIns="0" tIns="0" bIns="0">
+            <a:spAutoFit/>
+          </a:bodyPr>
+          <a:lstStyle/>
+          <a:p>
+            <a:pPr algn="l">
+              <a:spcAft>
+                <a:spcPts val="0"/>
+              </a:spcAft>
+            </a:pPr>
+            <a:r>
+              <a:rPr sz="1150" b="1">
+                <a:solidFill>
+                  <a:srgbClr val="0E7C7B"/>
+                </a:solidFill>
+                <a:latin typeface="Calibri"/>
+              </a:rPr>
+              <a:t>65 %</a:t>
+            </a:r>
+          </a:p>
+        </p:txBody>
+      </p:sp>
+      <p:sp>
+        <p:nvSpPr>
+          <p:cNvPr id="44" name="Rectangle 43"/>
+          <p:cNvSpPr/>
+          <p:nvPr/>
+        </p:nvSpPr>
+        <p:spPr>
+          <a:xfrm>
+            <a:off x="6949440" y="4983480"/>
+            <a:ext cx="4389120" cy="475488"/>
+          </a:xfrm>
+          <a:prstGeom prst="rect">
+            <a:avLst/>
+          </a:prstGeom>
+          <a:solidFill>
+            <a:srgbClr val="FFFFFF"/>
+          </a:solidFill>
+          <a:ln>
+            <a:noFill/>
+          </a:ln>
+          <a:effectLst/>
+        </p:spPr>
+        <p:style>
+          <a:lnRef idx="1">
+            <a:schemeClr val="accent1"/>
+          </a:lnRef>
+          <a:fillRef idx="3">
+            <a:schemeClr val="accent1"/>
+          </a:fillRef>
+          <a:effectRef idx="2">
+            <a:schemeClr val="accent1"/>
+          </a:effectRef>
+          <a:fontRef idx="minor">
+            <a:schemeClr val="lt1"/>
+          </a:fontRef>
+        </p:style>
+        <p:txBody>
+          <a:bodyPr rtlCol="0" anchor="ctr"/>
+          <a:lstStyle/>
+          <a:p>
+            <a:pPr algn="ctr"/>
+          </a:p>
+        </p:txBody>
+      </p:sp>
+      <p:sp>
+        <p:nvSpPr>
+          <p:cNvPr id="45" name="TextBox 44"/>
+          <p:cNvSpPr txBox="1"/>
+          <p:nvPr/>
+        </p:nvSpPr>
+        <p:spPr>
+          <a:xfrm>
+            <a:off x="7086600" y="4983480"/>
+            <a:ext cx="4114800" cy="475488"/>
+          </a:xfrm>
+          <a:prstGeom prst="rect">
+            <a:avLst/>
+          </a:prstGeom>
+          <a:noFill/>
+        </p:spPr>
+        <p:txBody>
+          <a:bodyPr wrap="square" anchor="ctr" lIns="0" rIns="0" tIns="0" bIns="0">
+            <a:spAutoFit/>
+          </a:bodyPr>
+          <a:lstStyle/>
+          <a:p>
+            <a:pPr algn="l">
+              <a:spcAft>
+                <a:spcPts val="0"/>
+              </a:spcAft>
+            </a:pPr>
+            <a:r>
+              <a:rPr sz="1150" b="0">
+                <a:solidFill>
+                  <a:srgbClr val="222B36"/>
+                </a:solidFill>
+                <a:latin typeface="Calibri"/>
+              </a:rPr>
+              <a:t>Usage réaliste pour du tertiaire</a:t>
+            </a:r>
+          </a:p>
+        </p:txBody>
+      </p:sp>
+      <p:sp>
+        <p:nvSpPr>
+          <p:cNvPr id="46" name="Rectangle 45"/>
+          <p:cNvSpPr/>
+          <p:nvPr/>
+        </p:nvSpPr>
+        <p:spPr>
+          <a:xfrm>
+            <a:off x="914400" y="5458968"/>
+            <a:ext cx="3657600" cy="475488"/>
+          </a:xfrm>
+          <a:prstGeom prst="rect">
+            <a:avLst/>
+          </a:prstGeom>
+          <a:solidFill>
+            <a:srgbClr val="F5F8F7"/>
+          </a:solidFill>
+          <a:ln>
+            <a:noFill/>
+          </a:ln>
+          <a:effectLst/>
+        </p:spPr>
+        <p:style>
+          <a:lnRef idx="1">
+            <a:schemeClr val="accent1"/>
+          </a:lnRef>
+          <a:fillRef idx="3">
+            <a:schemeClr val="accent1"/>
+          </a:fillRef>
+          <a:effectRef idx="2">
+            <a:schemeClr val="accent1"/>
+          </a:effectRef>
+          <a:fontRef idx="minor">
+            <a:schemeClr val="lt1"/>
+          </a:fontRef>
+        </p:style>
+        <p:txBody>
+          <a:bodyPr rtlCol="0" anchor="ctr"/>
+          <a:lstStyle/>
+          <a:p>
+            <a:pPr algn="ctr"/>
+          </a:p>
+        </p:txBody>
+      </p:sp>
+      <p:sp>
+        <p:nvSpPr>
+          <p:cNvPr id="47" name="TextBox 46"/>
+          <p:cNvSpPr txBox="1"/>
+          <p:nvPr/>
+        </p:nvSpPr>
+        <p:spPr>
+          <a:xfrm>
+            <a:off x="1051560" y="5458968"/>
+            <a:ext cx="3383280" cy="475488"/>
+          </a:xfrm>
+          <a:prstGeom prst="rect">
+            <a:avLst/>
+          </a:prstGeom>
+          <a:noFill/>
+        </p:spPr>
+        <p:txBody>
+          <a:bodyPr wrap="square" anchor="ctr" lIns="0" rIns="0" tIns="0" bIns="0">
+            <a:spAutoFit/>
+          </a:bodyPr>
+          <a:lstStyle/>
+          <a:p>
+            <a:pPr algn="l">
+              <a:spcAft>
+                <a:spcPts val="0"/>
+              </a:spcAft>
+            </a:pPr>
+            <a:r>
+              <a:rPr sz="1150" b="0">
+                <a:solidFill>
+                  <a:srgbClr val="222B36"/>
+                </a:solidFill>
+                <a:latin typeface="Calibri"/>
+              </a:rPr>
+              <a:t>Taux d'actualisation</a:t>
+            </a:r>
+          </a:p>
+        </p:txBody>
+      </p:sp>
+      <p:sp>
+        <p:nvSpPr>
+          <p:cNvPr id="48" name="Rectangle 47"/>
+          <p:cNvSpPr/>
+          <p:nvPr/>
+        </p:nvSpPr>
+        <p:spPr>
+          <a:xfrm>
+            <a:off x="4572000" y="5458968"/>
+            <a:ext cx="2377440" cy="475488"/>
+          </a:xfrm>
+          <a:prstGeom prst="rect">
+            <a:avLst/>
+          </a:prstGeom>
+          <a:solidFill>
+            <a:srgbClr val="F5F8F7"/>
+          </a:solidFill>
+          <a:ln>
+            <a:noFill/>
+          </a:ln>
+          <a:effectLst/>
+        </p:spPr>
+        <p:style>
+          <a:lnRef idx="1">
+            <a:schemeClr val="accent1"/>
+          </a:lnRef>
+          <a:fillRef idx="3">
+            <a:schemeClr val="accent1"/>
+          </a:fillRef>
+          <a:effectRef idx="2">
+            <a:schemeClr val="accent1"/>
+          </a:effectRef>
+          <a:fontRef idx="minor">
+            <a:schemeClr val="lt1"/>
+          </a:fontRef>
+        </p:style>
+        <p:txBody>
+          <a:bodyPr rtlCol="0" anchor="ctr"/>
+          <a:lstStyle/>
+          <a:p>
+            <a:pPr algn="ctr"/>
+          </a:p>
+        </p:txBody>
+      </p:sp>
+      <p:sp>
+        <p:nvSpPr>
+          <p:cNvPr id="49" name="TextBox 48"/>
+          <p:cNvSpPr txBox="1"/>
+          <p:nvPr/>
+        </p:nvSpPr>
+        <p:spPr>
+          <a:xfrm>
+            <a:off x="4709160" y="5458968"/>
+            <a:ext cx="2103120" cy="475488"/>
+          </a:xfrm>
+          <a:prstGeom prst="rect">
+            <a:avLst/>
+          </a:prstGeom>
+          <a:noFill/>
+        </p:spPr>
+        <p:txBody>
+          <a:bodyPr wrap="square" anchor="ctr" lIns="0" rIns="0" tIns="0" bIns="0">
+            <a:spAutoFit/>
+          </a:bodyPr>
+          <a:lstStyle/>
+          <a:p>
+            <a:pPr algn="l">
+              <a:spcAft>
+                <a:spcPts val="0"/>
+              </a:spcAft>
+            </a:pPr>
+            <a:r>
+              <a:rPr sz="1150" b="1">
+                <a:solidFill>
+                  <a:srgbClr val="0E7C7B"/>
+                </a:solidFill>
+                <a:latin typeface="Calibri"/>
+              </a:rPr>
+              <a:t>4 %</a:t>
+            </a:r>
+          </a:p>
+        </p:txBody>
+      </p:sp>
+      <p:sp>
+        <p:nvSpPr>
+          <p:cNvPr id="50" name="Rectangle 49"/>
+          <p:cNvSpPr/>
+          <p:nvPr/>
+        </p:nvSpPr>
+        <p:spPr>
+          <a:xfrm>
+            <a:off x="6949440" y="5458968"/>
+            <a:ext cx="4389120" cy="475488"/>
+          </a:xfrm>
+          <a:prstGeom prst="rect">
+            <a:avLst/>
+          </a:prstGeom>
+          <a:solidFill>
+            <a:srgbClr val="F5F8F7"/>
+          </a:solidFill>
+          <a:ln>
+            <a:noFill/>
+          </a:ln>
+          <a:effectLst/>
+        </p:spPr>
+        <p:style>
+          <a:lnRef idx="1">
+            <a:schemeClr val="accent1"/>
+          </a:lnRef>
+          <a:fillRef idx="3">
+            <a:schemeClr val="accent1"/>
+          </a:fillRef>
+          <a:effectRef idx="2">
+            <a:schemeClr val="accent1"/>
+          </a:effectRef>
+          <a:fontRef idx="minor">
+            <a:schemeClr val="lt1"/>
+          </a:fontRef>
+        </p:style>
+        <p:txBody>
+          <a:bodyPr rtlCol="0" anchor="ctr"/>
+          <a:lstStyle/>
+          <a:p>
+            <a:pPr algn="ctr"/>
+          </a:p>
+        </p:txBody>
+      </p:sp>
+      <p:sp>
+        <p:nvSpPr>
+          <p:cNvPr id="51" name="TextBox 50"/>
+          <p:cNvSpPr txBox="1"/>
+          <p:nvPr/>
+        </p:nvSpPr>
+        <p:spPr>
+          <a:xfrm>
+            <a:off x="7086600" y="5458968"/>
+            <a:ext cx="4114800" cy="475488"/>
+          </a:xfrm>
+          <a:prstGeom prst="rect">
+            <a:avLst/>
+          </a:prstGeom>
+          <a:noFill/>
+        </p:spPr>
+        <p:txBody>
+          <a:bodyPr wrap="square" anchor="ctr" lIns="0" rIns="0" tIns="0" bIns="0">
+            <a:spAutoFit/>
+          </a:bodyPr>
+          <a:lstStyle/>
+          <a:p>
+            <a:pPr algn="l">
+              <a:spcAft>
+                <a:spcPts val="0"/>
+              </a:spcAft>
+            </a:pPr>
+            <a:r>
+              <a:rPr sz="1150" b="0">
+                <a:solidFill>
+                  <a:srgbClr val="222B36"/>
+                </a:solidFill>
+                <a:latin typeface="Calibri"/>
+              </a:rPr>
+              <a:t>Standard d'analyse d'investissement</a:t>
+            </a:r>
+          </a:p>
+        </p:txBody>
+      </p:sp>
+      <p:sp>
+        <p:nvSpPr>
+          <p:cNvPr id="52" name="TextBox 51"/>
+          <p:cNvSpPr txBox="1"/>
+          <p:nvPr/>
+        </p:nvSpPr>
+        <p:spPr>
+          <a:xfrm>
+            <a:off x="914400" y="6071616"/>
+            <a:ext cx="10424160" cy="548640"/>
+          </a:xfrm>
+          <a:prstGeom prst="rect">
+            <a:avLst/>
+          </a:prstGeom>
+          <a:noFill/>
+        </p:spPr>
+        <p:txBody>
+          <a:bodyPr wrap="square" anchor="t" lIns="0" rIns="0" tIns="0" bIns="0">
+            <a:spAutoFit/>
+          </a:bodyPr>
+          <a:lstStyle/>
+          <a:p>
+            <a:pPr algn="l">
+              <a:spcAft>
+                <a:spcPts val="0"/>
+              </a:spcAft>
+            </a:pPr>
+            <a:r>
+              <a:rPr sz="1200" b="0">
+                <a:solidFill>
+                  <a:srgbClr val="647486"/>
+                </a:solidFill>
+                <a:latin typeface="Calibri"/>
+              </a:rPr>
+              <a:t>Source principale : note de cadrage (Annexe A) — ordres de grandeur de marché. La production, elle, vient de PVGIS (réel).</a:t>
             </a:r>
           </a:p>
         </p:txBody>

--- a/docs/exports/soutenance-workshop-pv.pptx
+++ b/docs/exports/soutenance-workshop-pv.pptx
@@ -14,7 +14,7 @@
     <p:sldId id="259" r:id="rId5"/>
     <p:sldId id="260" r:id="rId6"/>
     <p:sldId id="261" r:id="rId7"/>
-    <p:sldId id="269" r:id="rId20"/>
+    <p:sldId id="269" r:id="rId21"/>
     <p:sldId id="262" r:id="rId8"/>
     <p:sldId id="263" r:id="rId9"/>
     <p:sldId id="264" r:id="rId10"/>
@@ -4595,7 +4595,7 @@
         </p:nvSpPr>
         <p:spPr>
           <a:xfrm>
-            <a:off x="914400" y="457200"/>
+            <a:off x="914400" y="640080"/>
             <a:ext cx="10972800" cy="822960"/>
           </a:xfrm>
           <a:prstGeom prst="rect">
@@ -4624,35 +4624,168 @@
                 </a:solidFill>
                 <a:latin typeface="Cambria"/>
               </a:rPr>
-              <a:t>La démarche, en un schéma</a:t>
-            </a:r>
-          </a:p>
-        </p:txBody>
-      </p:sp>
-      <p:pic>
-        <p:nvPicPr>
-          <p:cNvPr id="3" name="Picture 2" descr="schema-complet.jpg"/>
-          <p:cNvPicPr>
-            <a:picLocks noChangeAspect="1"/>
-          </p:cNvPicPr>
-          <p:nvPr/>
-        </p:nvPicPr>
-        <p:blipFill>
-          <a:blip r:embed="rId3"/>
-          <a:stretch>
-            <a:fillRect/>
-          </a:stretch>
-        </p:blipFill>
-        <p:spPr>
-          <a:xfrm>
-            <a:off x="1842881" y="1234440"/>
-            <a:ext cx="8505933" cy="5486400"/>
-          </a:xfrm>
-          <a:prstGeom prst="rect">
-            <a:avLst/>
-          </a:prstGeom>
-        </p:spPr>
-      </p:pic>
+              <a:t>Démonstration : l'outil interactif</a:t>
+            </a:r>
+          </a:p>
+        </p:txBody>
+      </p:sp>
+      <p:sp>
+        <p:nvSpPr>
+          <p:cNvPr id="3" name="TextBox 2"/>
+          <p:cNvSpPr txBox="1"/>
+          <p:nvPr/>
+        </p:nvSpPr>
+        <p:spPr>
+          <a:xfrm>
+            <a:off x="914400" y="1691640"/>
+            <a:ext cx="6035040" cy="3200400"/>
+          </a:xfrm>
+          <a:prstGeom prst="rect">
+            <a:avLst/>
+          </a:prstGeom>
+          <a:noFill/>
+        </p:spPr>
+        <p:txBody>
+          <a:bodyPr wrap="square" lIns="0" tIns="0" rIns="0" bIns="0" anchor="t">
+            <a:spAutoFit/>
+          </a:bodyPr>
+          <a:lstStyle/>
+          <a:p>
+            <a:pPr algn="l">
+              <a:lnSpc>
+                <a:spcPct val="110000"/>
+              </a:lnSpc>
+              <a:spcBef>
+                <a:spcPts val="0"/>
+              </a:spcBef>
+              <a:spcAft>
+                <a:spcPts val="1100"/>
+              </a:spcAft>
+            </a:pPr>
+            <a:r>
+              <a:rPr sz="1500" b="0">
+                <a:solidFill>
+                  <a:srgbClr val="222B36"/>
+                </a:solidFill>
+                <a:latin typeface="Calibri"/>
+              </a:rPr>
+              <a:t>J'ai transformé l'analyse en une application web. On peut :</a:t>
+            </a:r>
+          </a:p>
+          <a:p>
+            <a:pPr algn="l">
+              <a:lnSpc>
+                <a:spcPct val="110000"/>
+              </a:lnSpc>
+              <a:spcBef>
+                <a:spcPts val="0"/>
+              </a:spcBef>
+              <a:spcAft>
+                <a:spcPts val="1100"/>
+              </a:spcAft>
+            </a:pPr>
+            <a:endParaRPr sz="1500" b="0">
+              <a:solidFill>
+                <a:srgbClr val="222B36"/>
+              </a:solidFill>
+              <a:latin typeface="Calibri"/>
+            </a:endParaRPr>
+          </a:p>
+          <a:p>
+            <a:pPr algn="l">
+              <a:lnSpc>
+                <a:spcPct val="110000"/>
+              </a:lnSpc>
+              <a:spcBef>
+                <a:spcPts val="0"/>
+              </a:spcBef>
+              <a:spcAft>
+                <a:spcPts val="1100"/>
+              </a:spcAft>
+            </a:pPr>
+            <a:r>
+              <a:rPr sz="1450" b="1">
+                <a:solidFill>
+                  <a:srgbClr val="F2A900"/>
+                </a:solidFill>
+                <a:latin typeface="Calibri"/>
+              </a:rPr>
+              <a:t>•  </a:t>
+            </a:r>
+            <a:r>
+              <a:rPr sz="1450" b="0">
+                <a:solidFill>
+                  <a:srgbClr val="222B36"/>
+                </a:solidFill>
+                <a:latin typeface="Calibri"/>
+              </a:rPr>
+              <a:t>explorer la carte de France, indicateur par indicateur ;</a:t>
+            </a:r>
+          </a:p>
+          <a:p>
+            <a:pPr algn="l">
+              <a:lnSpc>
+                <a:spcPct val="110000"/>
+              </a:lnSpc>
+              <a:spcBef>
+                <a:spcPts val="0"/>
+              </a:spcBef>
+              <a:spcAft>
+                <a:spcPts val="1100"/>
+              </a:spcAft>
+            </a:pPr>
+            <a:r>
+              <a:rPr sz="1450" b="1">
+                <a:solidFill>
+                  <a:srgbClr val="F2A900"/>
+                </a:solidFill>
+                <a:latin typeface="Calibri"/>
+              </a:rPr>
+              <a:t>•  </a:t>
+            </a:r>
+            <a:r>
+              <a:rPr sz="1450" b="0">
+                <a:solidFill>
+                  <a:srgbClr val="222B36"/>
+                </a:solidFill>
+                <a:latin typeface="Calibri"/>
+              </a:rPr>
+              <a:t>choisir le scénario (régime, puissance) — hypothèses fixes ;</a:t>
+            </a:r>
+          </a:p>
+          <a:p>
+            <a:pPr algn="l">
+              <a:lnSpc>
+                <a:spcPct val="110000"/>
+              </a:lnSpc>
+              <a:spcBef>
+                <a:spcPts val="0"/>
+              </a:spcBef>
+              <a:spcAft>
+                <a:spcPts val="1100"/>
+              </a:spcAft>
+            </a:pPr>
+            <a:r>
+              <a:rPr sz="1450" b="1">
+                <a:solidFill>
+                  <a:srgbClr val="F2A900"/>
+                </a:solidFill>
+                <a:latin typeface="Calibri"/>
+              </a:rPr>
+              <a:t>•  </a:t>
+            </a:r>
+            <a:r>
+              <a:rPr sz="1450" b="0">
+                <a:solidFill>
+                  <a:srgbClr val="222B36"/>
+                </a:solidFill>
+                <a:latin typeface="Calibri"/>
+              </a:rPr>
+              <a:t>consulter le détail d'un département et exporter les données.</a:t>
+            </a:r>
+          </a:p>
+        </p:txBody>
+      </p:sp>
     </p:spTree>
   </p:cSld>
   <p:clrMapOvr>
@@ -4667,7 +4800,7 @@
     <p:bg>
       <p:bgPr>
         <a:solidFill>
-          <a:srgbClr val="12293D"/>
+          <a:srgbClr val="FFFFFF"/>
         </a:solidFill>
         <a:effectLst/>
       </p:bgPr>
@@ -4688,58 +4821,13 @@
       </p:grpSpPr>
       <p:sp>
         <p:nvSpPr>
-          <p:cNvPr id="2" name="Rectangle 1"/>
-          <p:cNvSpPr/>
-          <p:nvPr/>
-        </p:nvSpPr>
-        <p:spPr>
-          <a:xfrm>
-            <a:off x="0" y="0"/>
-            <a:ext cx="12191695" cy="91440"/>
-          </a:xfrm>
-          <a:prstGeom prst="rect">
-            <a:avLst/>
-          </a:prstGeom>
-          <a:solidFill>
-            <a:srgbClr val="F2A900"/>
-          </a:solidFill>
-          <a:ln>
-            <a:noFill/>
-          </a:ln>
-          <a:effectLst/>
-        </p:spPr>
-        <p:style>
-          <a:lnRef idx="1">
-            <a:schemeClr val="accent1"/>
-          </a:lnRef>
-          <a:fillRef idx="3">
-            <a:schemeClr val="accent1"/>
-          </a:fillRef>
-          <a:effectRef idx="2">
-            <a:schemeClr val="accent1"/>
-          </a:effectRef>
-          <a:fontRef idx="minor">
-            <a:schemeClr val="lt1"/>
-          </a:fontRef>
-        </p:style>
-        <p:txBody>
-          <a:bodyPr rtlCol="0" anchor="ctr"/>
-          <a:lstStyle/>
-          <a:p>
-            <a:pPr algn="ctr"/>
-            <a:endParaRPr/>
-          </a:p>
-        </p:txBody>
-      </p:sp>
-      <p:sp>
-        <p:nvSpPr>
-          <p:cNvPr id="3" name="TextBox 2"/>
+          <p:cNvPr id="2" name="TextBox 1"/>
           <p:cNvSpPr txBox="1"/>
           <p:nvPr/>
         </p:nvSpPr>
         <p:spPr>
           <a:xfrm>
-            <a:off x="914400" y="685800"/>
+            <a:off x="914400" y="457200"/>
             <a:ext cx="10972800" cy="822960"/>
           </a:xfrm>
           <a:prstGeom prst="rect">
@@ -4762,494 +4850,41 @@
               </a:spcAft>
             </a:pPr>
             <a:r>
-              <a:rPr sz="3200" b="1">
-                <a:solidFill>
-                  <a:srgbClr val="FFFFFF"/>
+              <a:rPr sz="3000" b="1">
+                <a:solidFill>
+                  <a:srgbClr val="12293D"/>
                 </a:solidFill>
                 <a:latin typeface="Cambria"/>
               </a:rPr>
-              <a:t>Ce que l'analyse conclut</a:t>
-            </a:r>
-          </a:p>
-        </p:txBody>
-      </p:sp>
-      <p:sp>
-        <p:nvSpPr>
-          <p:cNvPr id="4" name="TextBox 3"/>
-          <p:cNvSpPr txBox="1"/>
-          <p:nvPr/>
-        </p:nvSpPr>
-        <p:spPr>
-          <a:xfrm>
-            <a:off x="914400" y="1874519"/>
-            <a:ext cx="2377440" cy="1097280"/>
-          </a:xfrm>
-          <a:prstGeom prst="rect">
-            <a:avLst/>
-          </a:prstGeom>
-          <a:noFill/>
-        </p:spPr>
-        <p:txBody>
-          <a:bodyPr wrap="square" lIns="0" tIns="0" rIns="0" bIns="0" anchor="ctr">
-            <a:spAutoFit/>
-          </a:bodyPr>
-          <a:lstStyle/>
-          <a:p>
-            <a:pPr algn="l">
-              <a:spcBef>
-                <a:spcPts val="0"/>
-              </a:spcBef>
-              <a:spcAft>
-                <a:spcPts val="0"/>
-              </a:spcAft>
-            </a:pPr>
-            <a:r>
-              <a:rPr sz="3000" b="1">
-                <a:solidFill>
-                  <a:srgbClr val="F2A900"/>
-                </a:solidFill>
-                <a:latin typeface="Cambria"/>
-              </a:rPr>
-              <a:t>6–8 ans</a:t>
-            </a:r>
-          </a:p>
-        </p:txBody>
-      </p:sp>
-      <p:sp>
-        <p:nvSpPr>
-          <p:cNvPr id="5" name="TextBox 4"/>
-          <p:cNvSpPr txBox="1"/>
-          <p:nvPr/>
-        </p:nvSpPr>
-        <p:spPr>
-          <a:xfrm>
-            <a:off x="3474720" y="1920239"/>
-            <a:ext cx="7863840" cy="457200"/>
-          </a:xfrm>
-          <a:prstGeom prst="rect">
-            <a:avLst/>
-          </a:prstGeom>
-          <a:noFill/>
-        </p:spPr>
-        <p:txBody>
-          <a:bodyPr wrap="square" lIns="0" tIns="0" rIns="0" bIns="0" anchor="t">
-            <a:spAutoFit/>
-          </a:bodyPr>
-          <a:lstStyle/>
-          <a:p>
-            <a:pPr algn="l">
-              <a:spcBef>
-                <a:spcPts val="0"/>
-              </a:spcBef>
-              <a:spcAft>
-                <a:spcPts val="0"/>
-              </a:spcAft>
-            </a:pPr>
-            <a:r>
-              <a:rPr sz="1800" b="1">
-                <a:solidFill>
-                  <a:srgbClr val="FFFFFF"/>
-                </a:solidFill>
-                <a:latin typeface="Cambria"/>
-              </a:rPr>
-              <a:t>Rentable partout en France.</a:t>
-            </a:r>
-          </a:p>
-        </p:txBody>
-      </p:sp>
-      <p:sp>
-        <p:nvSpPr>
-          <p:cNvPr id="6" name="TextBox 5"/>
-          <p:cNvSpPr txBox="1"/>
-          <p:nvPr/>
-        </p:nvSpPr>
-        <p:spPr>
-          <a:xfrm>
-            <a:off x="3474720" y="2423160"/>
-            <a:ext cx="7863840" cy="822960"/>
-          </a:xfrm>
-          <a:prstGeom prst="rect">
-            <a:avLst/>
-          </a:prstGeom>
-          <a:noFill/>
-        </p:spPr>
-        <p:txBody>
-          <a:bodyPr wrap="square" lIns="0" tIns="0" rIns="0" bIns="0" anchor="t">
-            <a:spAutoFit/>
-          </a:bodyPr>
-          <a:lstStyle/>
-          <a:p>
-            <a:pPr algn="l">
-              <a:lnSpc>
-                <a:spcPct val="108000"/>
-              </a:lnSpc>
-              <a:spcBef>
-                <a:spcPts val="0"/>
-              </a:spcBef>
-              <a:spcAft>
-                <a:spcPts val="0"/>
-              </a:spcAft>
-            </a:pPr>
-            <a:r>
-              <a:rPr sz="1350" b="0">
-                <a:solidFill>
-                  <a:srgbClr val="E6EDF4"/>
-                </a:solidFill>
-                <a:latin typeface="Calibri"/>
-              </a:rPr>
-              <a:t>Temps de retour court, TRI ~14 % — produire coûte 2 à 3× moins cher qu'acheter au réseau.</a:t>
-            </a:r>
-          </a:p>
-        </p:txBody>
-      </p:sp>
-      <p:sp>
-        <p:nvSpPr>
-          <p:cNvPr id="7" name="Rectangle 6"/>
-          <p:cNvSpPr/>
-          <p:nvPr/>
-        </p:nvSpPr>
-        <p:spPr>
-          <a:xfrm>
-            <a:off x="3474720" y="3172968"/>
-            <a:ext cx="7863840" cy="15240"/>
-          </a:xfrm>
-          <a:prstGeom prst="rect">
-            <a:avLst/>
-          </a:prstGeom>
-          <a:solidFill>
-            <a:srgbClr val="2A455E"/>
-          </a:solidFill>
-          <a:ln>
-            <a:noFill/>
-          </a:ln>
-          <a:effectLst/>
-        </p:spPr>
-        <p:style>
-          <a:lnRef idx="1">
-            <a:schemeClr val="accent1"/>
-          </a:lnRef>
-          <a:fillRef idx="3">
-            <a:schemeClr val="accent1"/>
-          </a:fillRef>
-          <a:effectRef idx="2">
-            <a:schemeClr val="accent1"/>
-          </a:effectRef>
-          <a:fontRef idx="minor">
-            <a:schemeClr val="lt1"/>
-          </a:fontRef>
-        </p:style>
-        <p:txBody>
-          <a:bodyPr rtlCol="0" anchor="ctr"/>
-          <a:lstStyle/>
-          <a:p>
-            <a:pPr algn="ctr"/>
-            <a:endParaRPr/>
-          </a:p>
-        </p:txBody>
-      </p:sp>
-      <p:sp>
-        <p:nvSpPr>
-          <p:cNvPr id="8" name="TextBox 7"/>
-          <p:cNvSpPr txBox="1"/>
-          <p:nvPr/>
-        </p:nvSpPr>
-        <p:spPr>
-          <a:xfrm>
-            <a:off x="914400" y="3291839"/>
-            <a:ext cx="2377440" cy="1097280"/>
-          </a:xfrm>
-          <a:prstGeom prst="rect">
-            <a:avLst/>
-          </a:prstGeom>
-          <a:noFill/>
-        </p:spPr>
-        <p:txBody>
-          <a:bodyPr wrap="square" lIns="0" tIns="0" rIns="0" bIns="0" anchor="ctr">
-            <a:spAutoFit/>
-          </a:bodyPr>
-          <a:lstStyle/>
-          <a:p>
-            <a:pPr algn="l">
-              <a:spcBef>
-                <a:spcPts val="0"/>
-              </a:spcBef>
-              <a:spcAft>
-                <a:spcPts val="0"/>
-              </a:spcAft>
-            </a:pPr>
-            <a:r>
-              <a:rPr sz="3000" b="1">
-                <a:solidFill>
-                  <a:srgbClr val="F2A900"/>
-                </a:solidFill>
-                <a:latin typeface="Cambria"/>
-              </a:rPr>
-              <a:t>+43 %</a:t>
-            </a:r>
-          </a:p>
-        </p:txBody>
-      </p:sp>
-      <p:sp>
-        <p:nvSpPr>
-          <p:cNvPr id="9" name="TextBox 8"/>
-          <p:cNvSpPr txBox="1"/>
-          <p:nvPr/>
-        </p:nvSpPr>
-        <p:spPr>
-          <a:xfrm>
-            <a:off x="3474720" y="3337559"/>
-            <a:ext cx="7863840" cy="457200"/>
-          </a:xfrm>
-          <a:prstGeom prst="rect">
-            <a:avLst/>
-          </a:prstGeom>
-          <a:noFill/>
-        </p:spPr>
-        <p:txBody>
-          <a:bodyPr wrap="square" lIns="0" tIns="0" rIns="0" bIns="0" anchor="t">
-            <a:spAutoFit/>
-          </a:bodyPr>
-          <a:lstStyle/>
-          <a:p>
-            <a:pPr algn="l">
-              <a:spcBef>
-                <a:spcPts val="0"/>
-              </a:spcBef>
-              <a:spcAft>
-                <a:spcPts val="0"/>
-              </a:spcAft>
-            </a:pPr>
-            <a:r>
-              <a:rPr sz="1800" b="1">
-                <a:solidFill>
-                  <a:srgbClr val="FFFFFF"/>
-                </a:solidFill>
-                <a:latin typeface="Cambria"/>
-              </a:rPr>
-              <a:t>Plus performant au Sud.</a:t>
-            </a:r>
-          </a:p>
-        </p:txBody>
-      </p:sp>
-      <p:sp>
-        <p:nvSpPr>
-          <p:cNvPr id="10" name="TextBox 9"/>
-          <p:cNvSpPr txBox="1"/>
-          <p:nvPr/>
-        </p:nvSpPr>
-        <p:spPr>
-          <a:xfrm>
-            <a:off x="3474720" y="3840479"/>
-            <a:ext cx="7863840" cy="822960"/>
-          </a:xfrm>
-          <a:prstGeom prst="rect">
-            <a:avLst/>
-          </a:prstGeom>
-          <a:noFill/>
-        </p:spPr>
-        <p:txBody>
-          <a:bodyPr wrap="square" lIns="0" tIns="0" rIns="0" bIns="0" anchor="t">
-            <a:spAutoFit/>
-          </a:bodyPr>
-          <a:lstStyle/>
-          <a:p>
-            <a:pPr algn="l">
-              <a:lnSpc>
-                <a:spcPct val="108000"/>
-              </a:lnSpc>
-              <a:spcBef>
-                <a:spcPts val="0"/>
-              </a:spcBef>
-              <a:spcAft>
-                <a:spcPts val="0"/>
-              </a:spcAft>
-            </a:pPr>
-            <a:r>
-              <a:rPr sz="1350" b="0">
-                <a:solidFill>
-                  <a:srgbClr val="E6EDF4"/>
-                </a:solidFill>
-                <a:latin typeface="Calibri"/>
-              </a:rPr>
-              <a:t>Production et rentabilité augmentent vers le Sud, mais restent attractives partout.</a:t>
-            </a:r>
-          </a:p>
-        </p:txBody>
-      </p:sp>
-      <p:sp>
-        <p:nvSpPr>
-          <p:cNvPr id="11" name="Rectangle 10"/>
-          <p:cNvSpPr/>
-          <p:nvPr/>
-        </p:nvSpPr>
-        <p:spPr>
-          <a:xfrm>
-            <a:off x="3474720" y="4590288"/>
-            <a:ext cx="7863840" cy="15240"/>
-          </a:xfrm>
-          <a:prstGeom prst="rect">
-            <a:avLst/>
-          </a:prstGeom>
-          <a:solidFill>
-            <a:srgbClr val="2A455E"/>
-          </a:solidFill>
-          <a:ln>
-            <a:noFill/>
-          </a:ln>
-          <a:effectLst/>
-        </p:spPr>
-        <p:style>
-          <a:lnRef idx="1">
-            <a:schemeClr val="accent1"/>
-          </a:lnRef>
-          <a:fillRef idx="3">
-            <a:schemeClr val="accent1"/>
-          </a:fillRef>
-          <a:effectRef idx="2">
-            <a:schemeClr val="accent1"/>
-          </a:effectRef>
-          <a:fontRef idx="minor">
-            <a:schemeClr val="lt1"/>
-          </a:fontRef>
-        </p:style>
-        <p:txBody>
-          <a:bodyPr rtlCol="0" anchor="ctr"/>
-          <a:lstStyle/>
-          <a:p>
-            <a:pPr algn="ctr"/>
-            <a:endParaRPr/>
-          </a:p>
-        </p:txBody>
-      </p:sp>
-      <p:sp>
-        <p:nvSpPr>
-          <p:cNvPr id="12" name="TextBox 11"/>
-          <p:cNvSpPr txBox="1"/>
-          <p:nvPr/>
-        </p:nvSpPr>
-        <p:spPr>
-          <a:xfrm>
-            <a:off x="914400" y="4709160"/>
-            <a:ext cx="2377440" cy="1097280"/>
-          </a:xfrm>
-          <a:prstGeom prst="rect">
-            <a:avLst/>
-          </a:prstGeom>
-          <a:noFill/>
-        </p:spPr>
-        <p:txBody>
-          <a:bodyPr wrap="square" lIns="0" tIns="0" rIns="0" bIns="0" anchor="ctr">
-            <a:spAutoFit/>
-          </a:bodyPr>
-          <a:lstStyle/>
-          <a:p>
-            <a:pPr algn="l">
-              <a:spcBef>
-                <a:spcPts val="0"/>
-              </a:spcBef>
-              <a:spcAft>
-                <a:spcPts val="0"/>
-              </a:spcAft>
-            </a:pPr>
-            <a:r>
-              <a:rPr sz="3000" b="1">
-                <a:solidFill>
-                  <a:srgbClr val="F2A900"/>
-                </a:solidFill>
-                <a:latin typeface="Cambria"/>
-              </a:rPr>
-              <a:t>Autoconso</a:t>
-            </a:r>
-          </a:p>
-        </p:txBody>
-      </p:sp>
-      <p:sp>
-        <p:nvSpPr>
-          <p:cNvPr id="13" name="TextBox 12"/>
-          <p:cNvSpPr txBox="1"/>
-          <p:nvPr/>
-        </p:nvSpPr>
-        <p:spPr>
-          <a:xfrm>
-            <a:off x="3474720" y="4754880"/>
-            <a:ext cx="7863840" cy="457200"/>
-          </a:xfrm>
-          <a:prstGeom prst="rect">
-            <a:avLst/>
-          </a:prstGeom>
-          <a:noFill/>
-        </p:spPr>
-        <p:txBody>
-          <a:bodyPr wrap="square" lIns="0" tIns="0" rIns="0" bIns="0" anchor="t">
-            <a:spAutoFit/>
-          </a:bodyPr>
-          <a:lstStyle/>
-          <a:p>
-            <a:pPr algn="l">
-              <a:spcBef>
-                <a:spcPts val="0"/>
-              </a:spcBef>
-              <a:spcAft>
-                <a:spcPts val="0"/>
-              </a:spcAft>
-            </a:pPr>
-            <a:r>
-              <a:rPr sz="1800" b="1">
-                <a:solidFill>
-                  <a:srgbClr val="FFFFFF"/>
-                </a:solidFill>
-                <a:latin typeface="Cambria"/>
-              </a:rPr>
-              <a:t>Consommer plutôt que revendre.</a:t>
-            </a:r>
-          </a:p>
-        </p:txBody>
-      </p:sp>
-      <p:sp>
-        <p:nvSpPr>
-          <p:cNvPr id="14" name="TextBox 13"/>
-          <p:cNvSpPr txBox="1"/>
-          <p:nvPr/>
-        </p:nvSpPr>
-        <p:spPr>
-          <a:xfrm>
-            <a:off x="3474720" y="5257800"/>
-            <a:ext cx="7863840" cy="822960"/>
-          </a:xfrm>
-          <a:prstGeom prst="rect">
-            <a:avLst/>
-          </a:prstGeom>
-          <a:noFill/>
-        </p:spPr>
-        <p:txBody>
-          <a:bodyPr wrap="square" lIns="0" tIns="0" rIns="0" bIns="0" anchor="t">
-            <a:spAutoFit/>
-          </a:bodyPr>
-          <a:lstStyle/>
-          <a:p>
-            <a:pPr algn="l">
-              <a:lnSpc>
-                <a:spcPct val="108000"/>
-              </a:lnSpc>
-              <a:spcBef>
-                <a:spcPts val="0"/>
-              </a:spcBef>
-              <a:spcAft>
-                <a:spcPts val="0"/>
-              </a:spcAft>
-            </a:pPr>
-            <a:r>
-              <a:rPr sz="1350" b="0">
-                <a:solidFill>
-                  <a:srgbClr val="E6EDF4"/>
-                </a:solidFill>
-                <a:latin typeface="Calibri"/>
-              </a:rPr>
-              <a:t>L'électricité qu'on évite d'acheter vaut plus que celle qu'on revend.</a:t>
-            </a:r>
-          </a:p>
-        </p:txBody>
-      </p:sp>
+              <a:t>La démarche, en un schéma</a:t>
+            </a:r>
+          </a:p>
+        </p:txBody>
+      </p:sp>
+      <p:pic>
+        <p:nvPicPr>
+          <p:cNvPr id="3" name="Picture 2" descr="schema-complet.jpg"/>
+          <p:cNvPicPr>
+            <a:picLocks noChangeAspect="1"/>
+          </p:cNvPicPr>
+          <p:nvPr/>
+        </p:nvPicPr>
+        <p:blipFill>
+          <a:blip r:embed="rId3"/>
+          <a:stretch>
+            <a:fillRect/>
+          </a:stretch>
+        </p:blipFill>
+        <p:spPr>
+          <a:xfrm>
+            <a:off x="1842881" y="1234440"/>
+            <a:ext cx="8505933" cy="5486400"/>
+          </a:xfrm>
+          <a:prstGeom prst="rect">
+            <a:avLst/>
+          </a:prstGeom>
+        </p:spPr>
+      </p:pic>
     </p:spTree>
   </p:cSld>
   <p:clrMapOvr>
@@ -5336,8 +4971,8 @@
         </p:nvSpPr>
         <p:spPr>
           <a:xfrm>
-            <a:off x="914400" y="2194560"/>
-            <a:ext cx="10332720" cy="914400"/>
+            <a:off x="914400" y="685800"/>
+            <a:ext cx="10972800" cy="822960"/>
           </a:xfrm>
           <a:prstGeom prst="rect">
             <a:avLst/>
@@ -5359,13 +4994,13 @@
               </a:spcAft>
             </a:pPr>
             <a:r>
-              <a:rPr sz="3800" b="1">
+              <a:rPr sz="3200" b="1">
                 <a:solidFill>
                   <a:srgbClr val="FFFFFF"/>
                 </a:solidFill>
                 <a:latin typeface="Cambria"/>
               </a:rPr>
-              <a:t>Merci de votre attention</a:t>
+              <a:t>Ce que l'analyse conclut</a:t>
             </a:r>
           </a:p>
         </p:txBody>
@@ -5378,8 +5013,50 @@
         </p:nvSpPr>
         <p:spPr>
           <a:xfrm>
-            <a:off x="914400" y="3291840"/>
-            <a:ext cx="10332720" cy="914400"/>
+            <a:off x="914400" y="1874519"/>
+            <a:ext cx="2377440" cy="1097280"/>
+          </a:xfrm>
+          <a:prstGeom prst="rect">
+            <a:avLst/>
+          </a:prstGeom>
+          <a:noFill/>
+        </p:spPr>
+        <p:txBody>
+          <a:bodyPr wrap="square" lIns="0" tIns="0" rIns="0" bIns="0" anchor="ctr">
+            <a:spAutoFit/>
+          </a:bodyPr>
+          <a:lstStyle/>
+          <a:p>
+            <a:pPr algn="l">
+              <a:spcBef>
+                <a:spcPts val="0"/>
+              </a:spcBef>
+              <a:spcAft>
+                <a:spcPts val="0"/>
+              </a:spcAft>
+            </a:pPr>
+            <a:r>
+              <a:rPr sz="3000" b="1">
+                <a:solidFill>
+                  <a:srgbClr val="F2A900"/>
+                </a:solidFill>
+                <a:latin typeface="Cambria"/>
+              </a:rPr>
+              <a:t>6–8 ans</a:t>
+            </a:r>
+          </a:p>
+        </p:txBody>
+      </p:sp>
+      <p:sp>
+        <p:nvSpPr>
+          <p:cNvPr id="5" name="TextBox 4"/>
+          <p:cNvSpPr txBox="1"/>
+          <p:nvPr/>
+        </p:nvSpPr>
+        <p:spPr>
+          <a:xfrm>
+            <a:off x="3474720" y="1920239"/>
+            <a:ext cx="7863840" cy="457200"/>
           </a:xfrm>
           <a:prstGeom prst="rect">
             <a:avLst/>
@@ -5393,9 +5070,6 @@
           <a:lstStyle/>
           <a:p>
             <a:pPr algn="l">
-              <a:lnSpc>
-                <a:spcPct val="110000"/>
-              </a:lnSpc>
               <a:spcBef>
                 <a:spcPts val="0"/>
               </a:spcBef>
@@ -5404,36 +5078,27 @@
               </a:spcAft>
             </a:pPr>
             <a:r>
-              <a:rPr sz="1600" b="0">
-                <a:solidFill>
-                  <a:srgbClr val="CADCFC"/>
-                </a:solidFill>
-                <a:latin typeface="Calibri"/>
-              </a:rPr>
-              <a:t>Le solaire sur les toits d'entreprise est rentable partout en France — </a:t>
-            </a:r>
-            <a:r>
-              <a:rPr sz="1600" b="1">
-                <a:solidFill>
-                  <a:srgbClr val="F2A900"/>
-                </a:solidFill>
-                <a:latin typeface="Calibri"/>
-              </a:rPr>
-              <a:t>et encore plus au Sud.</a:t>
-            </a:r>
-          </a:p>
-        </p:txBody>
-      </p:sp>
-      <p:sp>
-        <p:nvSpPr>
-          <p:cNvPr id="5" name="TextBox 4"/>
+              <a:rPr sz="1800" b="1">
+                <a:solidFill>
+                  <a:srgbClr val="FFFFFF"/>
+                </a:solidFill>
+                <a:latin typeface="Cambria"/>
+              </a:rPr>
+              <a:t>Rentable partout en France.</a:t>
+            </a:r>
+          </a:p>
+        </p:txBody>
+      </p:sp>
+      <p:sp>
+        <p:nvSpPr>
+          <p:cNvPr id="6" name="TextBox 5"/>
           <p:cNvSpPr txBox="1"/>
           <p:nvPr/>
         </p:nvSpPr>
         <p:spPr>
           <a:xfrm>
-            <a:off x="914400" y="4572000"/>
-            <a:ext cx="10332720" cy="457200"/>
+            <a:off x="3474720" y="2423160"/>
+            <a:ext cx="7863840" cy="822960"/>
           </a:xfrm>
           <a:prstGeom prst="rect">
             <a:avLst/>
@@ -5447,6 +5112,9 @@
           <a:lstStyle/>
           <a:p>
             <a:pPr algn="l">
+              <a:lnSpc>
+                <a:spcPct val="108000"/>
+              </a:lnSpc>
               <a:spcBef>
                 <a:spcPts val="0"/>
               </a:spcBef>
@@ -5455,27 +5123,114 @@
               </a:spcAft>
             </a:pPr>
             <a:r>
-              <a:rPr sz="1700" b="1">
+              <a:rPr sz="1350" b="0">
+                <a:solidFill>
+                  <a:srgbClr val="E6EDF4"/>
+                </a:solidFill>
+                <a:latin typeface="Calibri"/>
+              </a:rPr>
+              <a:t>Temps de retour court, TRI ~14 % — produire coûte 2 à 3× moins cher qu'acheter au réseau.</a:t>
+            </a:r>
+          </a:p>
+        </p:txBody>
+      </p:sp>
+      <p:sp>
+        <p:nvSpPr>
+          <p:cNvPr id="7" name="Rectangle 6"/>
+          <p:cNvSpPr/>
+          <p:nvPr/>
+        </p:nvSpPr>
+        <p:spPr>
+          <a:xfrm>
+            <a:off x="3474720" y="3172968"/>
+            <a:ext cx="7863840" cy="15240"/>
+          </a:xfrm>
+          <a:prstGeom prst="rect">
+            <a:avLst/>
+          </a:prstGeom>
+          <a:solidFill>
+            <a:srgbClr val="2A455E"/>
+          </a:solidFill>
+          <a:ln>
+            <a:noFill/>
+          </a:ln>
+          <a:effectLst/>
+        </p:spPr>
+        <p:style>
+          <a:lnRef idx="1">
+            <a:schemeClr val="accent1"/>
+          </a:lnRef>
+          <a:fillRef idx="3">
+            <a:schemeClr val="accent1"/>
+          </a:fillRef>
+          <a:effectRef idx="2">
+            <a:schemeClr val="accent1"/>
+          </a:effectRef>
+          <a:fontRef idx="minor">
+            <a:schemeClr val="lt1"/>
+          </a:fontRef>
+        </p:style>
+        <p:txBody>
+          <a:bodyPr rtlCol="0" anchor="ctr"/>
+          <a:lstStyle/>
+          <a:p>
+            <a:pPr algn="ctr"/>
+            <a:endParaRPr/>
+          </a:p>
+        </p:txBody>
+      </p:sp>
+      <p:sp>
+        <p:nvSpPr>
+          <p:cNvPr id="8" name="TextBox 7"/>
+          <p:cNvSpPr txBox="1"/>
+          <p:nvPr/>
+        </p:nvSpPr>
+        <p:spPr>
+          <a:xfrm>
+            <a:off x="914400" y="3291839"/>
+            <a:ext cx="2377440" cy="1097280"/>
+          </a:xfrm>
+          <a:prstGeom prst="rect">
+            <a:avLst/>
+          </a:prstGeom>
+          <a:noFill/>
+        </p:spPr>
+        <p:txBody>
+          <a:bodyPr wrap="square" lIns="0" tIns="0" rIns="0" bIns="0" anchor="ctr">
+            <a:spAutoFit/>
+          </a:bodyPr>
+          <a:lstStyle/>
+          <a:p>
+            <a:pPr algn="l">
+              <a:spcBef>
+                <a:spcPts val="0"/>
+              </a:spcBef>
+              <a:spcAft>
+                <a:spcPts val="0"/>
+              </a:spcAft>
+            </a:pPr>
+            <a:r>
+              <a:rPr sz="3000" b="1">
                 <a:solidFill>
                   <a:srgbClr val="F2A900"/>
                 </a:solidFill>
                 <a:latin typeface="Cambria"/>
               </a:rPr>
-              <a:t>Place à vos questions</a:t>
-            </a:r>
-          </a:p>
-        </p:txBody>
-      </p:sp>
-      <p:sp>
-        <p:nvSpPr>
-          <p:cNvPr id="6" name="TextBox 5"/>
+              <a:t>+43 %</a:t>
+            </a:r>
+          </a:p>
+        </p:txBody>
+      </p:sp>
+      <p:sp>
+        <p:nvSpPr>
+          <p:cNvPr id="9" name="TextBox 8"/>
           <p:cNvSpPr txBox="1"/>
           <p:nvPr/>
         </p:nvSpPr>
         <p:spPr>
           <a:xfrm>
-            <a:off x="914400" y="5897880"/>
-            <a:ext cx="10332720" cy="184666"/>
+            <a:off x="3474720" y="3337559"/>
+            <a:ext cx="7863840" cy="457200"/>
           </a:xfrm>
           <a:prstGeom prst="rect">
             <a:avLst/>
@@ -5497,22 +5252,232 @@
               </a:spcAft>
             </a:pPr>
             <a:r>
-              <a:rPr lang="fr-FR" sz="1200" b="0" dirty="0">
-                <a:solidFill>
-                  <a:srgbClr val="9EB2C9"/>
-                </a:solidFill>
-                <a:latin typeface="Calibri"/>
-              </a:rPr>
-              <a:t>Imene BELHOCINE </a:t>
-            </a:r>
-            <a:r>
-              <a:rPr sz="1200" b="0" dirty="0">
-                <a:solidFill>
-                  <a:srgbClr val="9EB2C9"/>
-                </a:solidFill>
-                <a:latin typeface="Calibri"/>
-              </a:rPr>
-              <a:t>·   Workshop client — Oxand   ·   MBA M2 Big Data &amp; IA</a:t>
+              <a:rPr sz="1800" b="1">
+                <a:solidFill>
+                  <a:srgbClr val="FFFFFF"/>
+                </a:solidFill>
+                <a:latin typeface="Cambria"/>
+              </a:rPr>
+              <a:t>Plus performant au Sud.</a:t>
+            </a:r>
+          </a:p>
+        </p:txBody>
+      </p:sp>
+      <p:sp>
+        <p:nvSpPr>
+          <p:cNvPr id="10" name="TextBox 9"/>
+          <p:cNvSpPr txBox="1"/>
+          <p:nvPr/>
+        </p:nvSpPr>
+        <p:spPr>
+          <a:xfrm>
+            <a:off x="3474720" y="3840479"/>
+            <a:ext cx="7863840" cy="822960"/>
+          </a:xfrm>
+          <a:prstGeom prst="rect">
+            <a:avLst/>
+          </a:prstGeom>
+          <a:noFill/>
+        </p:spPr>
+        <p:txBody>
+          <a:bodyPr wrap="square" lIns="0" tIns="0" rIns="0" bIns="0" anchor="t">
+            <a:spAutoFit/>
+          </a:bodyPr>
+          <a:lstStyle/>
+          <a:p>
+            <a:pPr algn="l">
+              <a:lnSpc>
+                <a:spcPct val="108000"/>
+              </a:lnSpc>
+              <a:spcBef>
+                <a:spcPts val="0"/>
+              </a:spcBef>
+              <a:spcAft>
+                <a:spcPts val="0"/>
+              </a:spcAft>
+            </a:pPr>
+            <a:r>
+              <a:rPr sz="1350" b="0">
+                <a:solidFill>
+                  <a:srgbClr val="E6EDF4"/>
+                </a:solidFill>
+                <a:latin typeface="Calibri"/>
+              </a:rPr>
+              <a:t>Production et rentabilité augmentent vers le Sud, mais restent attractives partout.</a:t>
+            </a:r>
+          </a:p>
+        </p:txBody>
+      </p:sp>
+      <p:sp>
+        <p:nvSpPr>
+          <p:cNvPr id="11" name="Rectangle 10"/>
+          <p:cNvSpPr/>
+          <p:nvPr/>
+        </p:nvSpPr>
+        <p:spPr>
+          <a:xfrm>
+            <a:off x="3474720" y="4590288"/>
+            <a:ext cx="7863840" cy="15240"/>
+          </a:xfrm>
+          <a:prstGeom prst="rect">
+            <a:avLst/>
+          </a:prstGeom>
+          <a:solidFill>
+            <a:srgbClr val="2A455E"/>
+          </a:solidFill>
+          <a:ln>
+            <a:noFill/>
+          </a:ln>
+          <a:effectLst/>
+        </p:spPr>
+        <p:style>
+          <a:lnRef idx="1">
+            <a:schemeClr val="accent1"/>
+          </a:lnRef>
+          <a:fillRef idx="3">
+            <a:schemeClr val="accent1"/>
+          </a:fillRef>
+          <a:effectRef idx="2">
+            <a:schemeClr val="accent1"/>
+          </a:effectRef>
+          <a:fontRef idx="minor">
+            <a:schemeClr val="lt1"/>
+          </a:fontRef>
+        </p:style>
+        <p:txBody>
+          <a:bodyPr rtlCol="0" anchor="ctr"/>
+          <a:lstStyle/>
+          <a:p>
+            <a:pPr algn="ctr"/>
+            <a:endParaRPr/>
+          </a:p>
+        </p:txBody>
+      </p:sp>
+      <p:sp>
+        <p:nvSpPr>
+          <p:cNvPr id="12" name="TextBox 11"/>
+          <p:cNvSpPr txBox="1"/>
+          <p:nvPr/>
+        </p:nvSpPr>
+        <p:spPr>
+          <a:xfrm>
+            <a:off x="914400" y="4709160"/>
+            <a:ext cx="2377440" cy="1097280"/>
+          </a:xfrm>
+          <a:prstGeom prst="rect">
+            <a:avLst/>
+          </a:prstGeom>
+          <a:noFill/>
+        </p:spPr>
+        <p:txBody>
+          <a:bodyPr wrap="square" lIns="0" tIns="0" rIns="0" bIns="0" anchor="ctr">
+            <a:spAutoFit/>
+          </a:bodyPr>
+          <a:lstStyle/>
+          <a:p>
+            <a:pPr algn="l">
+              <a:spcBef>
+                <a:spcPts val="0"/>
+              </a:spcBef>
+              <a:spcAft>
+                <a:spcPts val="0"/>
+              </a:spcAft>
+            </a:pPr>
+            <a:r>
+              <a:rPr sz="3000" b="1">
+                <a:solidFill>
+                  <a:srgbClr val="F2A900"/>
+                </a:solidFill>
+                <a:latin typeface="Cambria"/>
+              </a:rPr>
+              <a:t>Autoconso</a:t>
+            </a:r>
+          </a:p>
+        </p:txBody>
+      </p:sp>
+      <p:sp>
+        <p:nvSpPr>
+          <p:cNvPr id="13" name="TextBox 12"/>
+          <p:cNvSpPr txBox="1"/>
+          <p:nvPr/>
+        </p:nvSpPr>
+        <p:spPr>
+          <a:xfrm>
+            <a:off x="3474720" y="4754880"/>
+            <a:ext cx="7863840" cy="457200"/>
+          </a:xfrm>
+          <a:prstGeom prst="rect">
+            <a:avLst/>
+          </a:prstGeom>
+          <a:noFill/>
+        </p:spPr>
+        <p:txBody>
+          <a:bodyPr wrap="square" lIns="0" tIns="0" rIns="0" bIns="0" anchor="t">
+            <a:spAutoFit/>
+          </a:bodyPr>
+          <a:lstStyle/>
+          <a:p>
+            <a:pPr algn="l">
+              <a:spcBef>
+                <a:spcPts val="0"/>
+              </a:spcBef>
+              <a:spcAft>
+                <a:spcPts val="0"/>
+              </a:spcAft>
+            </a:pPr>
+            <a:r>
+              <a:rPr sz="1800" b="1">
+                <a:solidFill>
+                  <a:srgbClr val="FFFFFF"/>
+                </a:solidFill>
+                <a:latin typeface="Cambria"/>
+              </a:rPr>
+              <a:t>Consommer plutôt que revendre.</a:t>
+            </a:r>
+          </a:p>
+        </p:txBody>
+      </p:sp>
+      <p:sp>
+        <p:nvSpPr>
+          <p:cNvPr id="14" name="TextBox 13"/>
+          <p:cNvSpPr txBox="1"/>
+          <p:nvPr/>
+        </p:nvSpPr>
+        <p:spPr>
+          <a:xfrm>
+            <a:off x="3474720" y="5257800"/>
+            <a:ext cx="7863840" cy="822960"/>
+          </a:xfrm>
+          <a:prstGeom prst="rect">
+            <a:avLst/>
+          </a:prstGeom>
+          <a:noFill/>
+        </p:spPr>
+        <p:txBody>
+          <a:bodyPr wrap="square" lIns="0" tIns="0" rIns="0" bIns="0" anchor="t">
+            <a:spAutoFit/>
+          </a:bodyPr>
+          <a:lstStyle/>
+          <a:p>
+            <a:pPr algn="l">
+              <a:lnSpc>
+                <a:spcPct val="108000"/>
+              </a:lnSpc>
+              <a:spcBef>
+                <a:spcPts val="0"/>
+              </a:spcBef>
+              <a:spcAft>
+                <a:spcPts val="0"/>
+              </a:spcAft>
+            </a:pPr>
+            <a:r>
+              <a:rPr sz="1350" b="0">
+                <a:solidFill>
+                  <a:srgbClr val="E6EDF4"/>
+                </a:solidFill>
+                <a:latin typeface="Calibri"/>
+              </a:rPr>
+              <a:t>L'électricité qu'on évite d'acheter vaut plus que celle qu'on revend.</a:t>
             </a:r>
           </a:p>
         </p:txBody>
@@ -5565,11 +5530,7 @@
           </a:bodyPr>
           <a:lstStyle/>
           <a:p>
-            <a:pPr algn="l">
-              <a:spcAft>
-                <a:spcPts val="0"/>
-              </a:spcAft>
-            </a:pPr>
+            <a:pPr algn="l"/>
             <a:r>
               <a:rPr sz="3000" b="1">
                 <a:solidFill>
@@ -5604,11 +5565,7 @@
           </a:bodyPr>
           <a:lstStyle/>
           <a:p>
-            <a:pPr algn="l">
-              <a:spcAft>
-                <a:spcPts val="0"/>
-              </a:spcAft>
-            </a:pPr>
+            <a:pPr algn="l"/>
             <a:r>
               <a:rPr sz="1400" b="0">
                 <a:solidFill>
@@ -5629,8 +5586,8 @@
         </p:nvSpPr>
         <p:spPr>
           <a:xfrm>
-            <a:off x="914400" y="2148840"/>
-            <a:ext cx="3657600" cy="457200"/>
+            <a:off x="914400" y="2286000"/>
+            <a:ext cx="3657600" cy="502920"/>
           </a:xfrm>
           <a:prstGeom prst="rect">
             <a:avLst/>
@@ -5673,8 +5630,8 @@
         </p:nvSpPr>
         <p:spPr>
           <a:xfrm>
-            <a:off x="1051560" y="2148840"/>
-            <a:ext cx="3383280" cy="457200"/>
+            <a:off x="1051560" y="2286000"/>
+            <a:ext cx="3383280" cy="502920"/>
           </a:xfrm>
           <a:prstGeom prst="rect">
             <a:avLst/>
@@ -5687,11 +5644,7 @@
           </a:bodyPr>
           <a:lstStyle/>
           <a:p>
-            <a:pPr algn="l">
-              <a:spcAft>
-                <a:spcPts val="0"/>
-              </a:spcAft>
-            </a:pPr>
+            <a:pPr algn="l"/>
             <a:r>
               <a:rPr sz="1250" b="1">
                 <a:solidFill>
@@ -5712,8 +5665,8 @@
         </p:nvSpPr>
         <p:spPr>
           <a:xfrm>
-            <a:off x="4572000" y="2148840"/>
-            <a:ext cx="2377440" cy="457200"/>
+            <a:off x="4572000" y="2286000"/>
+            <a:ext cx="2377440" cy="502920"/>
           </a:xfrm>
           <a:prstGeom prst="rect">
             <a:avLst/>
@@ -5756,8 +5709,8 @@
         </p:nvSpPr>
         <p:spPr>
           <a:xfrm>
-            <a:off x="4709160" y="2148840"/>
-            <a:ext cx="2103120" cy="457200"/>
+            <a:off x="4709160" y="2286000"/>
+            <a:ext cx="2103120" cy="502920"/>
           </a:xfrm>
           <a:prstGeom prst="rect">
             <a:avLst/>
@@ -5770,11 +5723,7 @@
           </a:bodyPr>
           <a:lstStyle/>
           <a:p>
-            <a:pPr algn="l">
-              <a:spcAft>
-                <a:spcPts val="0"/>
-              </a:spcAft>
-            </a:pPr>
+            <a:pPr algn="l"/>
             <a:r>
               <a:rPr sz="1250" b="1">
                 <a:solidFill>
@@ -5795,8 +5744,8 @@
         </p:nvSpPr>
         <p:spPr>
           <a:xfrm>
-            <a:off x="6949440" y="2148840"/>
-            <a:ext cx="4389120" cy="457200"/>
+            <a:off x="6949440" y="2286000"/>
+            <a:ext cx="4389120" cy="502920"/>
           </a:xfrm>
           <a:prstGeom prst="rect">
             <a:avLst/>
@@ -5839,8 +5788,8 @@
         </p:nvSpPr>
         <p:spPr>
           <a:xfrm>
-            <a:off x="7086600" y="2148840"/>
-            <a:ext cx="4114800" cy="457200"/>
+            <a:off x="7086600" y="2286000"/>
+            <a:ext cx="4114800" cy="502920"/>
           </a:xfrm>
           <a:prstGeom prst="rect">
             <a:avLst/>
@@ -5853,11 +5802,7 @@
           </a:bodyPr>
           <a:lstStyle/>
           <a:p>
-            <a:pPr algn="l">
-              <a:spcAft>
-                <a:spcPts val="0"/>
-              </a:spcAft>
-            </a:pPr>
+            <a:pPr algn="l"/>
             <a:r>
               <a:rPr sz="1250" b="1">
                 <a:solidFill>
@@ -5878,8 +5823,8 @@
         </p:nvSpPr>
         <p:spPr>
           <a:xfrm>
-            <a:off x="914400" y="2606040"/>
-            <a:ext cx="3657600" cy="475488"/>
+            <a:off x="914400" y="2788920"/>
+            <a:ext cx="3657600" cy="530352"/>
           </a:xfrm>
           <a:prstGeom prst="rect">
             <a:avLst/>
@@ -5922,8 +5867,8 @@
         </p:nvSpPr>
         <p:spPr>
           <a:xfrm>
-            <a:off x="1051560" y="2606040"/>
-            <a:ext cx="3383280" cy="475488"/>
+            <a:off x="1051560" y="2788920"/>
+            <a:ext cx="3383280" cy="530352"/>
           </a:xfrm>
           <a:prstGeom prst="rect">
             <a:avLst/>
@@ -5936,13 +5881,9 @@
           </a:bodyPr>
           <a:lstStyle/>
           <a:p>
-            <a:pPr algn="l">
-              <a:spcAft>
-                <a:spcPts val="0"/>
-              </a:spcAft>
-            </a:pPr>
-            <a:r>
-              <a:rPr sz="1150" b="0">
+            <a:pPr algn="l"/>
+            <a:r>
+              <a:rPr sz="1200" b="0">
                 <a:solidFill>
                   <a:srgbClr val="222B36"/>
                 </a:solidFill>
@@ -5961,8 +5902,8 @@
         </p:nvSpPr>
         <p:spPr>
           <a:xfrm>
-            <a:off x="4572000" y="2606040"/>
-            <a:ext cx="2377440" cy="475488"/>
+            <a:off x="4572000" y="2788920"/>
+            <a:ext cx="2377440" cy="530352"/>
           </a:xfrm>
           <a:prstGeom prst="rect">
             <a:avLst/>
@@ -6005,8 +5946,8 @@
         </p:nvSpPr>
         <p:spPr>
           <a:xfrm>
-            <a:off x="4709160" y="2606040"/>
-            <a:ext cx="2103120" cy="475488"/>
+            <a:off x="4709160" y="2788920"/>
+            <a:ext cx="2103120" cy="530352"/>
           </a:xfrm>
           <a:prstGeom prst="rect">
             <a:avLst/>
@@ -6019,13 +5960,9 @@
           </a:bodyPr>
           <a:lstStyle/>
           <a:p>
-            <a:pPr algn="l">
-              <a:spcAft>
-                <a:spcPts val="0"/>
-              </a:spcAft>
-            </a:pPr>
-            <a:r>
-              <a:rPr sz="1150" b="1">
+            <a:pPr algn="l"/>
+            <a:r>
+              <a:rPr sz="1200" b="1">
                 <a:solidFill>
                   <a:srgbClr val="0E7C7B"/>
                 </a:solidFill>
@@ -6044,8 +5981,8 @@
         </p:nvSpPr>
         <p:spPr>
           <a:xfrm>
-            <a:off x="6949440" y="2606040"/>
-            <a:ext cx="4389120" cy="475488"/>
+            <a:off x="6949440" y="2788920"/>
+            <a:ext cx="4389120" cy="530352"/>
           </a:xfrm>
           <a:prstGeom prst="rect">
             <a:avLst/>
@@ -6088,8 +6025,8 @@
         </p:nvSpPr>
         <p:spPr>
           <a:xfrm>
-            <a:off x="7086600" y="2606040"/>
-            <a:ext cx="4114800" cy="475488"/>
+            <a:off x="7086600" y="2788920"/>
+            <a:ext cx="4114800" cy="530352"/>
           </a:xfrm>
           <a:prstGeom prst="rect">
             <a:avLst/>
@@ -6102,13 +6039,9 @@
           </a:bodyPr>
           <a:lstStyle/>
           <a:p>
-            <a:pPr algn="l">
-              <a:spcAft>
-                <a:spcPts val="0"/>
-              </a:spcAft>
-            </a:pPr>
-            <a:r>
-              <a:rPr sz="1150" b="0">
+            <a:pPr algn="l"/>
+            <a:r>
+              <a:rPr sz="1200" b="0">
                 <a:solidFill>
                   <a:srgbClr val="222B36"/>
                 </a:solidFill>
@@ -6127,8 +6060,8 @@
         </p:nvSpPr>
         <p:spPr>
           <a:xfrm>
-            <a:off x="914400" y="3081528"/>
-            <a:ext cx="3657600" cy="475488"/>
+            <a:off x="914400" y="3319272"/>
+            <a:ext cx="3657600" cy="530352"/>
           </a:xfrm>
           <a:prstGeom prst="rect">
             <a:avLst/>
@@ -6171,8 +6104,8 @@
         </p:nvSpPr>
         <p:spPr>
           <a:xfrm>
-            <a:off x="1051560" y="3081528"/>
-            <a:ext cx="3383280" cy="475488"/>
+            <a:off x="1051560" y="3319272"/>
+            <a:ext cx="3383280" cy="530352"/>
           </a:xfrm>
           <a:prstGeom prst="rect">
             <a:avLst/>
@@ -6185,13 +6118,9 @@
           </a:bodyPr>
           <a:lstStyle/>
           <a:p>
-            <a:pPr algn="l">
-              <a:spcAft>
-                <a:spcPts val="0"/>
-              </a:spcAft>
-            </a:pPr>
-            <a:r>
-              <a:rPr sz="1150" b="0">
+            <a:pPr algn="l"/>
+            <a:r>
+              <a:rPr sz="1200" b="0">
                 <a:solidFill>
                   <a:srgbClr val="222B36"/>
                 </a:solidFill>
@@ -6210,8 +6139,8 @@
         </p:nvSpPr>
         <p:spPr>
           <a:xfrm>
-            <a:off x="4572000" y="3081528"/>
-            <a:ext cx="2377440" cy="475488"/>
+            <a:off x="4572000" y="3319272"/>
+            <a:ext cx="2377440" cy="530352"/>
           </a:xfrm>
           <a:prstGeom prst="rect">
             <a:avLst/>
@@ -6254,8 +6183,8 @@
         </p:nvSpPr>
         <p:spPr>
           <a:xfrm>
-            <a:off x="4709160" y="3081528"/>
-            <a:ext cx="2103120" cy="475488"/>
+            <a:off x="4709160" y="3319272"/>
+            <a:ext cx="2103120" cy="530352"/>
           </a:xfrm>
           <a:prstGeom prst="rect">
             <a:avLst/>
@@ -6268,13 +6197,9 @@
           </a:bodyPr>
           <a:lstStyle/>
           <a:p>
-            <a:pPr algn="l">
-              <a:spcAft>
-                <a:spcPts val="0"/>
-              </a:spcAft>
-            </a:pPr>
-            <a:r>
-              <a:rPr sz="1150" b="1">
+            <a:pPr algn="l"/>
+            <a:r>
+              <a:rPr sz="1200" b="1">
                 <a:solidFill>
                   <a:srgbClr val="0E7C7B"/>
                 </a:solidFill>
@@ -6293,8 +6218,8 @@
         </p:nvSpPr>
         <p:spPr>
           <a:xfrm>
-            <a:off x="6949440" y="3081528"/>
-            <a:ext cx="4389120" cy="475488"/>
+            <a:off x="6949440" y="3319272"/>
+            <a:ext cx="4389120" cy="530352"/>
           </a:xfrm>
           <a:prstGeom prst="rect">
             <a:avLst/>
@@ -6337,8 +6262,8 @@
         </p:nvSpPr>
         <p:spPr>
           <a:xfrm>
-            <a:off x="7086600" y="3081528"/>
-            <a:ext cx="4114800" cy="475488"/>
+            <a:off x="7086600" y="3319272"/>
+            <a:ext cx="4114800" cy="530352"/>
           </a:xfrm>
           <a:prstGeom prst="rect">
             <a:avLst/>
@@ -6351,13 +6276,9 @@
           </a:bodyPr>
           <a:lstStyle/>
           <a:p>
-            <a:pPr algn="l">
-              <a:spcAft>
-                <a:spcPts val="0"/>
-              </a:spcAft>
-            </a:pPr>
-            <a:r>
-              <a:rPr sz="1150" b="0">
+            <a:pPr algn="l"/>
+            <a:r>
+              <a:rPr sz="1200" b="0">
                 <a:solidFill>
                   <a:srgbClr val="222B36"/>
                 </a:solidFill>
@@ -6376,8 +6297,8 @@
         </p:nvSpPr>
         <p:spPr>
           <a:xfrm>
-            <a:off x="914400" y="3557016"/>
-            <a:ext cx="3657600" cy="475488"/>
+            <a:off x="914400" y="3849624"/>
+            <a:ext cx="3657600" cy="530352"/>
           </a:xfrm>
           <a:prstGeom prst="rect">
             <a:avLst/>
@@ -6420,8 +6341,8 @@
         </p:nvSpPr>
         <p:spPr>
           <a:xfrm>
-            <a:off x="1051560" y="3557016"/>
-            <a:ext cx="3383280" cy="475488"/>
+            <a:off x="1051560" y="3849624"/>
+            <a:ext cx="3383280" cy="530352"/>
           </a:xfrm>
           <a:prstGeom prst="rect">
             <a:avLst/>
@@ -6434,13 +6355,9 @@
           </a:bodyPr>
           <a:lstStyle/>
           <a:p>
-            <a:pPr algn="l">
-              <a:spcAft>
-                <a:spcPts val="0"/>
-              </a:spcAft>
-            </a:pPr>
-            <a:r>
-              <a:rPr sz="1150" b="0">
+            <a:pPr algn="l"/>
+            <a:r>
+              <a:rPr sz="1200" b="0">
                 <a:solidFill>
                   <a:srgbClr val="222B36"/>
                 </a:solidFill>
@@ -6459,8 +6376,8 @@
         </p:nvSpPr>
         <p:spPr>
           <a:xfrm>
-            <a:off x="4572000" y="3557016"/>
-            <a:ext cx="2377440" cy="475488"/>
+            <a:off x="4572000" y="3849624"/>
+            <a:ext cx="2377440" cy="530352"/>
           </a:xfrm>
           <a:prstGeom prst="rect">
             <a:avLst/>
@@ -6503,8 +6420,8 @@
         </p:nvSpPr>
         <p:spPr>
           <a:xfrm>
-            <a:off x="4709160" y="3557016"/>
-            <a:ext cx="2103120" cy="475488"/>
+            <a:off x="4709160" y="3849624"/>
+            <a:ext cx="2103120" cy="530352"/>
           </a:xfrm>
           <a:prstGeom prst="rect">
             <a:avLst/>
@@ -6517,13 +6434,9 @@
           </a:bodyPr>
           <a:lstStyle/>
           <a:p>
-            <a:pPr algn="l">
-              <a:spcAft>
-                <a:spcPts val="0"/>
-              </a:spcAft>
-            </a:pPr>
-            <a:r>
-              <a:rPr sz="1150" b="1">
+            <a:pPr algn="l"/>
+            <a:r>
+              <a:rPr sz="1200" b="1">
                 <a:solidFill>
                   <a:srgbClr val="0E7C7B"/>
                 </a:solidFill>
@@ -6542,8 +6455,8 @@
         </p:nvSpPr>
         <p:spPr>
           <a:xfrm>
-            <a:off x="6949440" y="3557016"/>
-            <a:ext cx="4389120" cy="475488"/>
+            <a:off x="6949440" y="3849624"/>
+            <a:ext cx="4389120" cy="530352"/>
           </a:xfrm>
           <a:prstGeom prst="rect">
             <a:avLst/>
@@ -6586,8 +6499,8 @@
         </p:nvSpPr>
         <p:spPr>
           <a:xfrm>
-            <a:off x="7086600" y="3557016"/>
-            <a:ext cx="4114800" cy="475488"/>
+            <a:off x="7086600" y="3849624"/>
+            <a:ext cx="4114800" cy="530352"/>
           </a:xfrm>
           <a:prstGeom prst="rect">
             <a:avLst/>
@@ -6600,13 +6513,9 @@
           </a:bodyPr>
           <a:lstStyle/>
           <a:p>
-            <a:pPr algn="l">
-              <a:spcAft>
-                <a:spcPts val="0"/>
-              </a:spcAft>
-            </a:pPr>
-            <a:r>
-              <a:rPr sz="1150" b="0">
+            <a:pPr algn="l"/>
+            <a:r>
+              <a:rPr sz="1200" b="0">
                 <a:solidFill>
                   <a:srgbClr val="222B36"/>
                 </a:solidFill>
@@ -6625,8 +6534,8 @@
         </p:nvSpPr>
         <p:spPr>
           <a:xfrm>
-            <a:off x="914400" y="4032504"/>
-            <a:ext cx="3657600" cy="475488"/>
+            <a:off x="914400" y="4379975"/>
+            <a:ext cx="3657600" cy="530352"/>
           </a:xfrm>
           <a:prstGeom prst="rect">
             <a:avLst/>
@@ -6669,8 +6578,8 @@
         </p:nvSpPr>
         <p:spPr>
           <a:xfrm>
-            <a:off x="1051560" y="4032504"/>
-            <a:ext cx="3383280" cy="475488"/>
+            <a:off x="1051560" y="4379975"/>
+            <a:ext cx="3383280" cy="530352"/>
           </a:xfrm>
           <a:prstGeom prst="rect">
             <a:avLst/>
@@ -6683,13 +6592,9 @@
           </a:bodyPr>
           <a:lstStyle/>
           <a:p>
-            <a:pPr algn="l">
-              <a:spcAft>
-                <a:spcPts val="0"/>
-              </a:spcAft>
-            </a:pPr>
-            <a:r>
-              <a:rPr sz="1150" b="0">
+            <a:pPr algn="l"/>
+            <a:r>
+              <a:rPr sz="1200" b="0">
                 <a:solidFill>
                   <a:srgbClr val="222B36"/>
                 </a:solidFill>
@@ -6708,8 +6613,8 @@
         </p:nvSpPr>
         <p:spPr>
           <a:xfrm>
-            <a:off x="4572000" y="4032504"/>
-            <a:ext cx="2377440" cy="475488"/>
+            <a:off x="4572000" y="4379975"/>
+            <a:ext cx="2377440" cy="530352"/>
           </a:xfrm>
           <a:prstGeom prst="rect">
             <a:avLst/>
@@ -6752,8 +6657,8 @@
         </p:nvSpPr>
         <p:spPr>
           <a:xfrm>
-            <a:off x="4709160" y="4032504"/>
-            <a:ext cx="2103120" cy="475488"/>
+            <a:off x="4709160" y="4379975"/>
+            <a:ext cx="2103120" cy="530352"/>
           </a:xfrm>
           <a:prstGeom prst="rect">
             <a:avLst/>
@@ -6766,13 +6671,9 @@
           </a:bodyPr>
           <a:lstStyle/>
           <a:p>
-            <a:pPr algn="l">
-              <a:spcAft>
-                <a:spcPts val="0"/>
-              </a:spcAft>
-            </a:pPr>
-            <a:r>
-              <a:rPr sz="1150" b="1">
+            <a:pPr algn="l"/>
+            <a:r>
+              <a:rPr sz="1200" b="1">
                 <a:solidFill>
                   <a:srgbClr val="0E7C7B"/>
                 </a:solidFill>
@@ -6791,8 +6692,8 @@
         </p:nvSpPr>
         <p:spPr>
           <a:xfrm>
-            <a:off x="6949440" y="4032504"/>
-            <a:ext cx="4389120" cy="475488"/>
+            <a:off x="6949440" y="4379975"/>
+            <a:ext cx="4389120" cy="530352"/>
           </a:xfrm>
           <a:prstGeom prst="rect">
             <a:avLst/>
@@ -6835,8 +6736,8 @@
         </p:nvSpPr>
         <p:spPr>
           <a:xfrm>
-            <a:off x="7086600" y="4032504"/>
-            <a:ext cx="4114800" cy="475488"/>
+            <a:off x="7086600" y="4379975"/>
+            <a:ext cx="4114800" cy="530352"/>
           </a:xfrm>
           <a:prstGeom prst="rect">
             <a:avLst/>
@@ -6849,13 +6750,9 @@
           </a:bodyPr>
           <a:lstStyle/>
           <a:p>
-            <a:pPr algn="l">
-              <a:spcAft>
-                <a:spcPts val="0"/>
-              </a:spcAft>
-            </a:pPr>
-            <a:r>
-              <a:rPr sz="1150" b="0">
+            <a:pPr algn="l"/>
+            <a:r>
+              <a:rPr sz="1200" b="0">
                 <a:solidFill>
                   <a:srgbClr val="222B36"/>
                 </a:solidFill>
@@ -6874,8 +6771,8 @@
         </p:nvSpPr>
         <p:spPr>
           <a:xfrm>
-            <a:off x="914400" y="4507992"/>
-            <a:ext cx="3657600" cy="475488"/>
+            <a:off x="914400" y="4910327"/>
+            <a:ext cx="3657600" cy="530352"/>
           </a:xfrm>
           <a:prstGeom prst="rect">
             <a:avLst/>
@@ -6918,8 +6815,8 @@
         </p:nvSpPr>
         <p:spPr>
           <a:xfrm>
-            <a:off x="1051560" y="4507992"/>
-            <a:ext cx="3383280" cy="475488"/>
+            <a:off x="1051560" y="4910327"/>
+            <a:ext cx="3383280" cy="530352"/>
           </a:xfrm>
           <a:prstGeom prst="rect">
             <a:avLst/>
@@ -6932,13 +6829,9 @@
           </a:bodyPr>
           <a:lstStyle/>
           <a:p>
-            <a:pPr algn="l">
-              <a:spcAft>
-                <a:spcPts val="0"/>
-              </a:spcAft>
-            </a:pPr>
-            <a:r>
-              <a:rPr sz="1150" b="0">
+            <a:pPr algn="l"/>
+            <a:r>
+              <a:rPr sz="1200" b="0">
                 <a:solidFill>
                   <a:srgbClr val="222B36"/>
                 </a:solidFill>
@@ -6957,8 +6850,8 @@
         </p:nvSpPr>
         <p:spPr>
           <a:xfrm>
-            <a:off x="4572000" y="4507992"/>
-            <a:ext cx="2377440" cy="475488"/>
+            <a:off x="4572000" y="4910327"/>
+            <a:ext cx="2377440" cy="530352"/>
           </a:xfrm>
           <a:prstGeom prst="rect">
             <a:avLst/>
@@ -7001,8 +6894,8 @@
         </p:nvSpPr>
         <p:spPr>
           <a:xfrm>
-            <a:off x="4709160" y="4507992"/>
-            <a:ext cx="2103120" cy="475488"/>
+            <a:off x="4709160" y="4910327"/>
+            <a:ext cx="2103120" cy="530352"/>
           </a:xfrm>
           <a:prstGeom prst="rect">
             <a:avLst/>
@@ -7015,13 +6908,9 @@
           </a:bodyPr>
           <a:lstStyle/>
           <a:p>
-            <a:pPr algn="l">
-              <a:spcAft>
-                <a:spcPts val="0"/>
-              </a:spcAft>
-            </a:pPr>
-            <a:r>
-              <a:rPr sz="1150" b="1">
+            <a:pPr algn="l"/>
+            <a:r>
+              <a:rPr sz="1200" b="1">
                 <a:solidFill>
                   <a:srgbClr val="0E7C7B"/>
                 </a:solidFill>
@@ -7040,8 +6929,8 @@
         </p:nvSpPr>
         <p:spPr>
           <a:xfrm>
-            <a:off x="6949440" y="4507992"/>
-            <a:ext cx="4389120" cy="475488"/>
+            <a:off x="6949440" y="4910327"/>
+            <a:ext cx="4389120" cy="530352"/>
           </a:xfrm>
           <a:prstGeom prst="rect">
             <a:avLst/>
@@ -7084,8 +6973,8 @@
         </p:nvSpPr>
         <p:spPr>
           <a:xfrm>
-            <a:off x="7086600" y="4507992"/>
-            <a:ext cx="4114800" cy="475488"/>
+            <a:off x="7086600" y="4910327"/>
+            <a:ext cx="4114800" cy="530352"/>
           </a:xfrm>
           <a:prstGeom prst="rect">
             <a:avLst/>
@@ -7098,13 +6987,9 @@
           </a:bodyPr>
           <a:lstStyle/>
           <a:p>
-            <a:pPr algn="l">
-              <a:spcAft>
-                <a:spcPts val="0"/>
-              </a:spcAft>
-            </a:pPr>
-            <a:r>
-              <a:rPr sz="1150" b="0">
+            <a:pPr algn="l"/>
+            <a:r>
+              <a:rPr sz="1200" b="0">
                 <a:solidFill>
                   <a:srgbClr val="222B36"/>
                 </a:solidFill>
@@ -7123,8 +7008,8 @@
         </p:nvSpPr>
         <p:spPr>
           <a:xfrm>
-            <a:off x="914400" y="4983480"/>
-            <a:ext cx="3657600" cy="475488"/>
+            <a:off x="914400" y="5440679"/>
+            <a:ext cx="3657600" cy="530352"/>
           </a:xfrm>
           <a:prstGeom prst="rect">
             <a:avLst/>
@@ -7167,8 +7052,8 @@
         </p:nvSpPr>
         <p:spPr>
           <a:xfrm>
-            <a:off x="1051560" y="4983480"/>
-            <a:ext cx="3383280" cy="475488"/>
+            <a:off x="1051560" y="5440679"/>
+            <a:ext cx="3383280" cy="530352"/>
           </a:xfrm>
           <a:prstGeom prst="rect">
             <a:avLst/>
@@ -7181,13 +7066,9 @@
           </a:bodyPr>
           <a:lstStyle/>
           <a:p>
-            <a:pPr algn="l">
-              <a:spcAft>
-                <a:spcPts val="0"/>
-              </a:spcAft>
-            </a:pPr>
-            <a:r>
-              <a:rPr sz="1150" b="0">
+            <a:pPr algn="l"/>
+            <a:r>
+              <a:rPr sz="1200" b="0">
                 <a:solidFill>
                   <a:srgbClr val="222B36"/>
                 </a:solidFill>
@@ -7206,8 +7087,8 @@
         </p:nvSpPr>
         <p:spPr>
           <a:xfrm>
-            <a:off x="4572000" y="4983480"/>
-            <a:ext cx="2377440" cy="475488"/>
+            <a:off x="4572000" y="5440679"/>
+            <a:ext cx="2377440" cy="530352"/>
           </a:xfrm>
           <a:prstGeom prst="rect">
             <a:avLst/>
@@ -7250,8 +7131,8 @@
         </p:nvSpPr>
         <p:spPr>
           <a:xfrm>
-            <a:off x="4709160" y="4983480"/>
-            <a:ext cx="2103120" cy="475488"/>
+            <a:off x="4709160" y="5440679"/>
+            <a:ext cx="2103120" cy="530352"/>
           </a:xfrm>
           <a:prstGeom prst="rect">
             <a:avLst/>
@@ -7264,13 +7145,9 @@
           </a:bodyPr>
           <a:lstStyle/>
           <a:p>
-            <a:pPr algn="l">
-              <a:spcAft>
-                <a:spcPts val="0"/>
-              </a:spcAft>
-            </a:pPr>
-            <a:r>
-              <a:rPr sz="1150" b="1">
+            <a:pPr algn="l"/>
+            <a:r>
+              <a:rPr sz="1200" b="1">
                 <a:solidFill>
                   <a:srgbClr val="0E7C7B"/>
                 </a:solidFill>
@@ -7289,8 +7166,8 @@
         </p:nvSpPr>
         <p:spPr>
           <a:xfrm>
-            <a:off x="6949440" y="4983480"/>
-            <a:ext cx="4389120" cy="475488"/>
+            <a:off x="6949440" y="5440679"/>
+            <a:ext cx="4389120" cy="530352"/>
           </a:xfrm>
           <a:prstGeom prst="rect">
             <a:avLst/>
@@ -7333,8 +7210,8 @@
         </p:nvSpPr>
         <p:spPr>
           <a:xfrm>
-            <a:off x="7086600" y="4983480"/>
-            <a:ext cx="4114800" cy="475488"/>
+            <a:off x="7086600" y="5440679"/>
+            <a:ext cx="4114800" cy="530352"/>
           </a:xfrm>
           <a:prstGeom prst="rect">
             <a:avLst/>
@@ -7347,13 +7224,9 @@
           </a:bodyPr>
           <a:lstStyle/>
           <a:p>
-            <a:pPr algn="l">
-              <a:spcAft>
-                <a:spcPts val="0"/>
-              </a:spcAft>
-            </a:pPr>
-            <a:r>
-              <a:rPr sz="1150" b="0">
+            <a:pPr algn="l"/>
+            <a:r>
+              <a:rPr sz="1200" b="0">
                 <a:solidFill>
                   <a:srgbClr val="222B36"/>
                 </a:solidFill>
@@ -7366,14 +7239,382 @@
       </p:sp>
       <p:sp>
         <p:nvSpPr>
-          <p:cNvPr id="46" name="Rectangle 45"/>
+          <p:cNvPr id="46" name="TextBox 45"/>
+          <p:cNvSpPr txBox="1"/>
+          <p:nvPr/>
+        </p:nvSpPr>
+        <p:spPr>
+          <a:xfrm>
+            <a:off x="914400" y="6153912"/>
+            <a:ext cx="10424160" cy="548640"/>
+          </a:xfrm>
+          <a:prstGeom prst="rect">
+            <a:avLst/>
+          </a:prstGeom>
+          <a:noFill/>
+        </p:spPr>
+        <p:txBody>
+          <a:bodyPr wrap="square" anchor="t" lIns="0" rIns="0" tIns="0" bIns="0">
+            <a:spAutoFit/>
+          </a:bodyPr>
+          <a:lstStyle/>
+          <a:p>
+            <a:pPr algn="l"/>
+            <a:r>
+              <a:rPr sz="1200" b="0">
+                <a:solidFill>
+                  <a:srgbClr val="647486"/>
+                </a:solidFill>
+                <a:latin typeface="Calibri"/>
+              </a:rPr>
+              <a:t>Source principale : note de cadrage (Annexe A) — ordres de grandeur de marché. La production, elle, vient de PVGIS (réel).</a:t>
+            </a:r>
+          </a:p>
+        </p:txBody>
+      </p:sp>
+    </p:spTree>
+  </p:cSld>
+  <p:clrMapOvr>
+    <a:masterClrMapping/>
+  </p:clrMapOvr>
+</p:sld>
+</file>
+
+<file path=ppt/slides/slide13.xml><?xml version="1.0" encoding="utf-8"?>
+<p:sld xmlns:a="http://schemas.openxmlformats.org/drawingml/2006/main" xmlns:p="http://schemas.openxmlformats.org/presentationml/2006/main" xmlns:r="http://schemas.openxmlformats.org/officeDocument/2006/relationships">
+  <p:cSld>
+    <p:bg>
+      <p:bgPr>
+        <a:solidFill>
+          <a:srgbClr val="FFFFFF"/>
+        </a:solidFill>
+        <a:effectLst/>
+      </p:bgPr>
+    </p:bg>
+    <p:spTree>
+      <p:nvGrpSpPr>
+        <p:cNvPr id="1" name=""/>
+        <p:cNvGrpSpPr/>
+        <p:nvPr/>
+      </p:nvGrpSpPr>
+      <p:grpSpPr/>
+      <p:sp>
+        <p:nvSpPr>
+          <p:cNvPr id="2" name="TextBox 1"/>
+          <p:cNvSpPr txBox="1"/>
+          <p:nvPr/>
+        </p:nvSpPr>
+        <p:spPr>
+          <a:xfrm>
+            <a:off x="914400" y="640080"/>
+            <a:ext cx="10972800" cy="822960"/>
+          </a:xfrm>
+          <a:prstGeom prst="rect">
+            <a:avLst/>
+          </a:prstGeom>
+          <a:noFill/>
+        </p:spPr>
+        <p:txBody>
+          <a:bodyPr wrap="square" anchor="t" lIns="0" rIns="0" tIns="0" bIns="0">
+            <a:spAutoFit/>
+          </a:bodyPr>
+          <a:lstStyle/>
+          <a:p>
+            <a:pPr algn="l"/>
+            <a:r>
+              <a:rPr sz="3000" b="1">
+                <a:solidFill>
+                  <a:srgbClr val="12293D"/>
+                </a:solidFill>
+                <a:latin typeface="Cambria"/>
+              </a:rPr>
+              <a:t>Les hypothèses clés — et d'où elles viennent</a:t>
+            </a:r>
+          </a:p>
+        </p:txBody>
+      </p:sp>
+      <p:sp>
+        <p:nvSpPr>
+          <p:cNvPr id="3" name="TextBox 2"/>
+          <p:cNvSpPr txBox="1"/>
+          <p:nvPr/>
+        </p:nvSpPr>
+        <p:spPr>
+          <a:xfrm>
+            <a:off x="914400" y="1508760"/>
+            <a:ext cx="10424160" cy="457200"/>
+          </a:xfrm>
+          <a:prstGeom prst="rect">
+            <a:avLst/>
+          </a:prstGeom>
+          <a:noFill/>
+        </p:spPr>
+        <p:txBody>
+          <a:bodyPr wrap="square" anchor="t" lIns="0" rIns="0" tIns="0" bIns="0">
+            <a:spAutoFit/>
+          </a:bodyPr>
+          <a:lstStyle/>
+          <a:p>
+            <a:pPr algn="l"/>
+            <a:r>
+              <a:rPr sz="1400" b="0">
+                <a:solidFill>
+                  <a:srgbClr val="647486"/>
+                </a:solidFill>
+                <a:latin typeface="Calibri"/>
+              </a:rPr>
+              <a:t>Tous les chiffres du modèle sont explicites et assumés comme des hypothèses.</a:t>
+            </a:r>
+          </a:p>
+        </p:txBody>
+      </p:sp>
+      <p:sp>
+        <p:nvSpPr>
+          <p:cNvPr id="4" name="Rectangle 3"/>
           <p:cNvSpPr/>
           <p:nvPr/>
         </p:nvSpPr>
         <p:spPr>
           <a:xfrm>
-            <a:off x="914400" y="5458968"/>
-            <a:ext cx="3657600" cy="475488"/>
+            <a:off x="914400" y="2286000"/>
+            <a:ext cx="3657600" cy="502920"/>
+          </a:xfrm>
+          <a:prstGeom prst="rect">
+            <a:avLst/>
+          </a:prstGeom>
+          <a:solidFill>
+            <a:srgbClr val="12293D"/>
+          </a:solidFill>
+          <a:ln>
+            <a:noFill/>
+          </a:ln>
+          <a:effectLst/>
+        </p:spPr>
+        <p:style>
+          <a:lnRef idx="1">
+            <a:schemeClr val="accent1"/>
+          </a:lnRef>
+          <a:fillRef idx="3">
+            <a:schemeClr val="accent1"/>
+          </a:fillRef>
+          <a:effectRef idx="2">
+            <a:schemeClr val="accent1"/>
+          </a:effectRef>
+          <a:fontRef idx="minor">
+            <a:schemeClr val="lt1"/>
+          </a:fontRef>
+        </p:style>
+        <p:txBody>
+          <a:bodyPr rtlCol="0" anchor="ctr"/>
+          <a:lstStyle/>
+          <a:p>
+            <a:pPr algn="ctr"/>
+          </a:p>
+        </p:txBody>
+      </p:sp>
+      <p:sp>
+        <p:nvSpPr>
+          <p:cNvPr id="5" name="TextBox 4"/>
+          <p:cNvSpPr txBox="1"/>
+          <p:nvPr/>
+        </p:nvSpPr>
+        <p:spPr>
+          <a:xfrm>
+            <a:off x="1051560" y="2286000"/>
+            <a:ext cx="3383280" cy="502920"/>
+          </a:xfrm>
+          <a:prstGeom prst="rect">
+            <a:avLst/>
+          </a:prstGeom>
+          <a:noFill/>
+        </p:spPr>
+        <p:txBody>
+          <a:bodyPr wrap="square" anchor="ctr" lIns="0" rIns="0" tIns="0" bIns="0">
+            <a:spAutoFit/>
+          </a:bodyPr>
+          <a:lstStyle/>
+          <a:p>
+            <a:pPr algn="l"/>
+            <a:r>
+              <a:rPr sz="1250" b="1">
+                <a:solidFill>
+                  <a:srgbClr val="FFFFFF"/>
+                </a:solidFill>
+                <a:latin typeface="Calibri"/>
+              </a:rPr>
+              <a:t>Hypothèse</a:t>
+            </a:r>
+          </a:p>
+        </p:txBody>
+      </p:sp>
+      <p:sp>
+        <p:nvSpPr>
+          <p:cNvPr id="6" name="Rectangle 5"/>
+          <p:cNvSpPr/>
+          <p:nvPr/>
+        </p:nvSpPr>
+        <p:spPr>
+          <a:xfrm>
+            <a:off x="4572000" y="2286000"/>
+            <a:ext cx="2377440" cy="502920"/>
+          </a:xfrm>
+          <a:prstGeom prst="rect">
+            <a:avLst/>
+          </a:prstGeom>
+          <a:solidFill>
+            <a:srgbClr val="12293D"/>
+          </a:solidFill>
+          <a:ln>
+            <a:noFill/>
+          </a:ln>
+          <a:effectLst/>
+        </p:spPr>
+        <p:style>
+          <a:lnRef idx="1">
+            <a:schemeClr val="accent1"/>
+          </a:lnRef>
+          <a:fillRef idx="3">
+            <a:schemeClr val="accent1"/>
+          </a:fillRef>
+          <a:effectRef idx="2">
+            <a:schemeClr val="accent1"/>
+          </a:effectRef>
+          <a:fontRef idx="minor">
+            <a:schemeClr val="lt1"/>
+          </a:fontRef>
+        </p:style>
+        <p:txBody>
+          <a:bodyPr rtlCol="0" anchor="ctr"/>
+          <a:lstStyle/>
+          <a:p>
+            <a:pPr algn="ctr"/>
+          </a:p>
+        </p:txBody>
+      </p:sp>
+      <p:sp>
+        <p:nvSpPr>
+          <p:cNvPr id="7" name="TextBox 6"/>
+          <p:cNvSpPr txBox="1"/>
+          <p:nvPr/>
+        </p:nvSpPr>
+        <p:spPr>
+          <a:xfrm>
+            <a:off x="4709160" y="2286000"/>
+            <a:ext cx="2103120" cy="502920"/>
+          </a:xfrm>
+          <a:prstGeom prst="rect">
+            <a:avLst/>
+          </a:prstGeom>
+          <a:noFill/>
+        </p:spPr>
+        <p:txBody>
+          <a:bodyPr wrap="square" anchor="ctr" lIns="0" rIns="0" tIns="0" bIns="0">
+            <a:spAutoFit/>
+          </a:bodyPr>
+          <a:lstStyle/>
+          <a:p>
+            <a:pPr algn="l"/>
+            <a:r>
+              <a:rPr sz="1250" b="1">
+                <a:solidFill>
+                  <a:srgbClr val="FFFFFF"/>
+                </a:solidFill>
+                <a:latin typeface="Calibri"/>
+              </a:rPr>
+              <a:t>Valeur</a:t>
+            </a:r>
+          </a:p>
+        </p:txBody>
+      </p:sp>
+      <p:sp>
+        <p:nvSpPr>
+          <p:cNvPr id="8" name="Rectangle 7"/>
+          <p:cNvSpPr/>
+          <p:nvPr/>
+        </p:nvSpPr>
+        <p:spPr>
+          <a:xfrm>
+            <a:off x="6949440" y="2286000"/>
+            <a:ext cx="4389120" cy="502920"/>
+          </a:xfrm>
+          <a:prstGeom prst="rect">
+            <a:avLst/>
+          </a:prstGeom>
+          <a:solidFill>
+            <a:srgbClr val="12293D"/>
+          </a:solidFill>
+          <a:ln>
+            <a:noFill/>
+          </a:ln>
+          <a:effectLst/>
+        </p:spPr>
+        <p:style>
+          <a:lnRef idx="1">
+            <a:schemeClr val="accent1"/>
+          </a:lnRef>
+          <a:fillRef idx="3">
+            <a:schemeClr val="accent1"/>
+          </a:fillRef>
+          <a:effectRef idx="2">
+            <a:schemeClr val="accent1"/>
+          </a:effectRef>
+          <a:fontRef idx="minor">
+            <a:schemeClr val="lt1"/>
+          </a:fontRef>
+        </p:style>
+        <p:txBody>
+          <a:bodyPr rtlCol="0" anchor="ctr"/>
+          <a:lstStyle/>
+          <a:p>
+            <a:pPr algn="ctr"/>
+          </a:p>
+        </p:txBody>
+      </p:sp>
+      <p:sp>
+        <p:nvSpPr>
+          <p:cNvPr id="9" name="TextBox 8"/>
+          <p:cNvSpPr txBox="1"/>
+          <p:nvPr/>
+        </p:nvSpPr>
+        <p:spPr>
+          <a:xfrm>
+            <a:off x="7086600" y="2286000"/>
+            <a:ext cx="4114800" cy="502920"/>
+          </a:xfrm>
+          <a:prstGeom prst="rect">
+            <a:avLst/>
+          </a:prstGeom>
+          <a:noFill/>
+        </p:spPr>
+        <p:txBody>
+          <a:bodyPr wrap="square" anchor="ctr" lIns="0" rIns="0" tIns="0" bIns="0">
+            <a:spAutoFit/>
+          </a:bodyPr>
+          <a:lstStyle/>
+          <a:p>
+            <a:pPr algn="l"/>
+            <a:r>
+              <a:rPr sz="1250" b="1">
+                <a:solidFill>
+                  <a:srgbClr val="FFFFFF"/>
+                </a:solidFill>
+                <a:latin typeface="Calibri"/>
+              </a:rPr>
+              <a:t>D'où ça vient</a:t>
+            </a:r>
+          </a:p>
+        </p:txBody>
+      </p:sp>
+      <p:sp>
+        <p:nvSpPr>
+          <p:cNvPr id="10" name="Rectangle 9"/>
+          <p:cNvSpPr/>
+          <p:nvPr/>
+        </p:nvSpPr>
+        <p:spPr>
+          <a:xfrm>
+            <a:off x="914400" y="2788920"/>
+            <a:ext cx="3657600" cy="530352"/>
           </a:xfrm>
           <a:prstGeom prst="rect">
             <a:avLst/>
@@ -7410,14 +7651,14 @@
       </p:sp>
       <p:sp>
         <p:nvSpPr>
-          <p:cNvPr id="47" name="TextBox 46"/>
+          <p:cNvPr id="11" name="TextBox 10"/>
           <p:cNvSpPr txBox="1"/>
           <p:nvPr/>
         </p:nvSpPr>
         <p:spPr>
           <a:xfrm>
-            <a:off x="1051560" y="5458968"/>
-            <a:ext cx="3383280" cy="475488"/>
+            <a:off x="1051560" y="2788920"/>
+            <a:ext cx="3383280" cy="530352"/>
           </a:xfrm>
           <a:prstGeom prst="rect">
             <a:avLst/>
@@ -7430,33 +7671,29 @@
           </a:bodyPr>
           <a:lstStyle/>
           <a:p>
-            <a:pPr algn="l">
-              <a:spcAft>
-                <a:spcPts val="0"/>
-              </a:spcAft>
-            </a:pPr>
-            <a:r>
-              <a:rPr sz="1150" b="0">
+            <a:pPr algn="l"/>
+            <a:r>
+              <a:rPr sz="1200" b="0">
                 <a:solidFill>
                   <a:srgbClr val="222B36"/>
                 </a:solidFill>
                 <a:latin typeface="Calibri"/>
               </a:rPr>
-              <a:t>Taux d'actualisation</a:t>
-            </a:r>
-          </a:p>
-        </p:txBody>
-      </p:sp>
-      <p:sp>
-        <p:nvSpPr>
-          <p:cNvPr id="48" name="Rectangle 47"/>
+              <a:t>Durée de vie analysée</a:t>
+            </a:r>
+          </a:p>
+        </p:txBody>
+      </p:sp>
+      <p:sp>
+        <p:nvSpPr>
+          <p:cNvPr id="12" name="Rectangle 11"/>
           <p:cNvSpPr/>
           <p:nvPr/>
         </p:nvSpPr>
         <p:spPr>
           <a:xfrm>
-            <a:off x="4572000" y="5458968"/>
-            <a:ext cx="2377440" cy="475488"/>
+            <a:off x="4572000" y="2788920"/>
+            <a:ext cx="2377440" cy="530352"/>
           </a:xfrm>
           <a:prstGeom prst="rect">
             <a:avLst/>
@@ -7493,14 +7730,14 @@
       </p:sp>
       <p:sp>
         <p:nvSpPr>
-          <p:cNvPr id="49" name="TextBox 48"/>
+          <p:cNvPr id="13" name="TextBox 12"/>
           <p:cNvSpPr txBox="1"/>
           <p:nvPr/>
         </p:nvSpPr>
         <p:spPr>
           <a:xfrm>
-            <a:off x="4709160" y="5458968"/>
-            <a:ext cx="2103120" cy="475488"/>
+            <a:off x="4709160" y="2788920"/>
+            <a:ext cx="2103120" cy="530352"/>
           </a:xfrm>
           <a:prstGeom prst="rect">
             <a:avLst/>
@@ -7513,33 +7750,29 @@
           </a:bodyPr>
           <a:lstStyle/>
           <a:p>
-            <a:pPr algn="l">
-              <a:spcAft>
-                <a:spcPts val="0"/>
-              </a:spcAft>
-            </a:pPr>
-            <a:r>
-              <a:rPr sz="1150" b="1">
+            <a:pPr algn="l"/>
+            <a:r>
+              <a:rPr sz="1200" b="1">
                 <a:solidFill>
                   <a:srgbClr val="0E7C7B"/>
                 </a:solidFill>
                 <a:latin typeface="Calibri"/>
               </a:rPr>
-              <a:t>4 %</a:t>
-            </a:r>
-          </a:p>
-        </p:txBody>
-      </p:sp>
-      <p:sp>
-        <p:nvSpPr>
-          <p:cNvPr id="50" name="Rectangle 49"/>
+              <a:t>25 ans</a:t>
+            </a:r>
+          </a:p>
+        </p:txBody>
+      </p:sp>
+      <p:sp>
+        <p:nvSpPr>
+          <p:cNvPr id="14" name="Rectangle 13"/>
           <p:cNvSpPr/>
           <p:nvPr/>
         </p:nvSpPr>
         <p:spPr>
           <a:xfrm>
-            <a:off x="6949440" y="5458968"/>
-            <a:ext cx="4389120" cy="475488"/>
+            <a:off x="6949440" y="2788920"/>
+            <a:ext cx="4389120" cy="530352"/>
           </a:xfrm>
           <a:prstGeom prst="rect">
             <a:avLst/>
@@ -7576,14 +7809,14 @@
       </p:sp>
       <p:sp>
         <p:nvSpPr>
-          <p:cNvPr id="51" name="TextBox 50"/>
+          <p:cNvPr id="15" name="TextBox 14"/>
           <p:cNvSpPr txBox="1"/>
           <p:nvPr/>
         </p:nvSpPr>
         <p:spPr>
           <a:xfrm>
-            <a:off x="7086600" y="5458968"/>
-            <a:ext cx="4114800" cy="475488"/>
+            <a:off x="7086600" y="2788920"/>
+            <a:ext cx="4114800" cy="530352"/>
           </a:xfrm>
           <a:prstGeom prst="rect">
             <a:avLst/>
@@ -7596,32 +7829,1213 @@
           </a:bodyPr>
           <a:lstStyle/>
           <a:p>
-            <a:pPr algn="l">
-              <a:spcAft>
-                <a:spcPts val="0"/>
-              </a:spcAft>
-            </a:pPr>
-            <a:r>
-              <a:rPr sz="1150" b="0">
+            <a:pPr algn="l"/>
+            <a:r>
+              <a:rPr sz="1200" b="0">
                 <a:solidFill>
                   <a:srgbClr val="222B36"/>
                 </a:solidFill>
                 <a:latin typeface="Calibri"/>
               </a:rPr>
-              <a:t>Standard d'analyse d'investissement</a:t>
-            </a:r>
-          </a:p>
-        </p:txBody>
-      </p:sp>
-      <p:sp>
-        <p:nvSpPr>
-          <p:cNvPr id="52" name="TextBox 51"/>
+              <a:t>Durée de vie standard des panneaux</a:t>
+            </a:r>
+          </a:p>
+        </p:txBody>
+      </p:sp>
+      <p:sp>
+        <p:nvSpPr>
+          <p:cNvPr id="16" name="Rectangle 15"/>
+          <p:cNvSpPr/>
+          <p:nvPr/>
+        </p:nvSpPr>
+        <p:spPr>
+          <a:xfrm>
+            <a:off x="914400" y="3319272"/>
+            <a:ext cx="3657600" cy="530352"/>
+          </a:xfrm>
+          <a:prstGeom prst="rect">
+            <a:avLst/>
+          </a:prstGeom>
+          <a:solidFill>
+            <a:srgbClr val="FFFFFF"/>
+          </a:solidFill>
+          <a:ln>
+            <a:noFill/>
+          </a:ln>
+          <a:effectLst/>
+        </p:spPr>
+        <p:style>
+          <a:lnRef idx="1">
+            <a:schemeClr val="accent1"/>
+          </a:lnRef>
+          <a:fillRef idx="3">
+            <a:schemeClr val="accent1"/>
+          </a:fillRef>
+          <a:effectRef idx="2">
+            <a:schemeClr val="accent1"/>
+          </a:effectRef>
+          <a:fontRef idx="minor">
+            <a:schemeClr val="lt1"/>
+          </a:fontRef>
+        </p:style>
+        <p:txBody>
+          <a:bodyPr rtlCol="0" anchor="ctr"/>
+          <a:lstStyle/>
+          <a:p>
+            <a:pPr algn="ctr"/>
+          </a:p>
+        </p:txBody>
+      </p:sp>
+      <p:sp>
+        <p:nvSpPr>
+          <p:cNvPr id="17" name="TextBox 16"/>
           <p:cNvSpPr txBox="1"/>
           <p:nvPr/>
         </p:nvSpPr>
         <p:spPr>
           <a:xfrm>
-            <a:off x="914400" y="6071616"/>
+            <a:off x="1051560" y="3319272"/>
+            <a:ext cx="3383280" cy="530352"/>
+          </a:xfrm>
+          <a:prstGeom prst="rect">
+            <a:avLst/>
+          </a:prstGeom>
+          <a:noFill/>
+        </p:spPr>
+        <p:txBody>
+          <a:bodyPr wrap="square" anchor="ctr" lIns="0" rIns="0" tIns="0" bIns="0">
+            <a:spAutoFit/>
+          </a:bodyPr>
+          <a:lstStyle/>
+          <a:p>
+            <a:pPr algn="l"/>
+            <a:r>
+              <a:rPr sz="1200" b="0">
+                <a:solidFill>
+                  <a:srgbClr val="222B36"/>
+                </a:solidFill>
+                <a:latin typeface="Calibri"/>
+              </a:rPr>
+              <a:t>Prix de l'électricité réseau</a:t>
+            </a:r>
+          </a:p>
+        </p:txBody>
+      </p:sp>
+      <p:sp>
+        <p:nvSpPr>
+          <p:cNvPr id="18" name="Rectangle 17"/>
+          <p:cNvSpPr/>
+          <p:nvPr/>
+        </p:nvSpPr>
+        <p:spPr>
+          <a:xfrm>
+            <a:off x="4572000" y="3319272"/>
+            <a:ext cx="2377440" cy="530352"/>
+          </a:xfrm>
+          <a:prstGeom prst="rect">
+            <a:avLst/>
+          </a:prstGeom>
+          <a:solidFill>
+            <a:srgbClr val="FFFFFF"/>
+          </a:solidFill>
+          <a:ln>
+            <a:noFill/>
+          </a:ln>
+          <a:effectLst/>
+        </p:spPr>
+        <p:style>
+          <a:lnRef idx="1">
+            <a:schemeClr val="accent1"/>
+          </a:lnRef>
+          <a:fillRef idx="3">
+            <a:schemeClr val="accent1"/>
+          </a:fillRef>
+          <a:effectRef idx="2">
+            <a:schemeClr val="accent1"/>
+          </a:effectRef>
+          <a:fontRef idx="minor">
+            <a:schemeClr val="lt1"/>
+          </a:fontRef>
+        </p:style>
+        <p:txBody>
+          <a:bodyPr rtlCol="0" anchor="ctr"/>
+          <a:lstStyle/>
+          <a:p>
+            <a:pPr algn="ctr"/>
+          </a:p>
+        </p:txBody>
+      </p:sp>
+      <p:sp>
+        <p:nvSpPr>
+          <p:cNvPr id="19" name="TextBox 18"/>
+          <p:cNvSpPr txBox="1"/>
+          <p:nvPr/>
+        </p:nvSpPr>
+        <p:spPr>
+          <a:xfrm>
+            <a:off x="4709160" y="3319272"/>
+            <a:ext cx="2103120" cy="530352"/>
+          </a:xfrm>
+          <a:prstGeom prst="rect">
+            <a:avLst/>
+          </a:prstGeom>
+          <a:noFill/>
+        </p:spPr>
+        <p:txBody>
+          <a:bodyPr wrap="square" anchor="ctr" lIns="0" rIns="0" tIns="0" bIns="0">
+            <a:spAutoFit/>
+          </a:bodyPr>
+          <a:lstStyle/>
+          <a:p>
+            <a:pPr algn="l"/>
+            <a:r>
+              <a:rPr sz="1200" b="1">
+                <a:solidFill>
+                  <a:srgbClr val="0E7C7B"/>
+                </a:solidFill>
+                <a:latin typeface="Calibri"/>
+              </a:rPr>
+              <a:t>~20 c/kWh</a:t>
+            </a:r>
+          </a:p>
+        </p:txBody>
+      </p:sp>
+      <p:sp>
+        <p:nvSpPr>
+          <p:cNvPr id="20" name="Rectangle 19"/>
+          <p:cNvSpPr/>
+          <p:nvPr/>
+        </p:nvSpPr>
+        <p:spPr>
+          <a:xfrm>
+            <a:off x="6949440" y="3319272"/>
+            <a:ext cx="4389120" cy="530352"/>
+          </a:xfrm>
+          <a:prstGeom prst="rect">
+            <a:avLst/>
+          </a:prstGeom>
+          <a:solidFill>
+            <a:srgbClr val="FFFFFF"/>
+          </a:solidFill>
+          <a:ln>
+            <a:noFill/>
+          </a:ln>
+          <a:effectLst/>
+        </p:spPr>
+        <p:style>
+          <a:lnRef idx="1">
+            <a:schemeClr val="accent1"/>
+          </a:lnRef>
+          <a:fillRef idx="3">
+            <a:schemeClr val="accent1"/>
+          </a:fillRef>
+          <a:effectRef idx="2">
+            <a:schemeClr val="accent1"/>
+          </a:effectRef>
+          <a:fontRef idx="minor">
+            <a:schemeClr val="lt1"/>
+          </a:fontRef>
+        </p:style>
+        <p:txBody>
+          <a:bodyPr rtlCol="0" anchor="ctr"/>
+          <a:lstStyle/>
+          <a:p>
+            <a:pPr algn="ctr"/>
+          </a:p>
+        </p:txBody>
+      </p:sp>
+      <p:sp>
+        <p:nvSpPr>
+          <p:cNvPr id="21" name="TextBox 20"/>
+          <p:cNvSpPr txBox="1"/>
+          <p:nvPr/>
+        </p:nvSpPr>
+        <p:spPr>
+          <a:xfrm>
+            <a:off x="7086600" y="3319272"/>
+            <a:ext cx="4114800" cy="530352"/>
+          </a:xfrm>
+          <a:prstGeom prst="rect">
+            <a:avLst/>
+          </a:prstGeom>
+          <a:noFill/>
+        </p:spPr>
+        <p:txBody>
+          <a:bodyPr wrap="square" anchor="ctr" lIns="0" rIns="0" tIns="0" bIns="0">
+            <a:spAutoFit/>
+          </a:bodyPr>
+          <a:lstStyle/>
+          <a:p>
+            <a:pPr algn="l"/>
+            <a:r>
+              <a:rPr sz="1200" b="0">
+                <a:solidFill>
+                  <a:srgbClr val="222B36"/>
+                </a:solidFill>
+                <a:latin typeface="Calibri"/>
+              </a:rPr>
+              <a:t>Prix moyen évité en tertiaire</a:t>
+            </a:r>
+          </a:p>
+        </p:txBody>
+      </p:sp>
+      <p:sp>
+        <p:nvSpPr>
+          <p:cNvPr id="22" name="Rectangle 21"/>
+          <p:cNvSpPr/>
+          <p:nvPr/>
+        </p:nvSpPr>
+        <p:spPr>
+          <a:xfrm>
+            <a:off x="914400" y="3849624"/>
+            <a:ext cx="3657600" cy="530352"/>
+          </a:xfrm>
+          <a:prstGeom prst="rect">
+            <a:avLst/>
+          </a:prstGeom>
+          <a:solidFill>
+            <a:srgbClr val="F5F8F7"/>
+          </a:solidFill>
+          <a:ln>
+            <a:noFill/>
+          </a:ln>
+          <a:effectLst/>
+        </p:spPr>
+        <p:style>
+          <a:lnRef idx="1">
+            <a:schemeClr val="accent1"/>
+          </a:lnRef>
+          <a:fillRef idx="3">
+            <a:schemeClr val="accent1"/>
+          </a:fillRef>
+          <a:effectRef idx="2">
+            <a:schemeClr val="accent1"/>
+          </a:effectRef>
+          <a:fontRef idx="minor">
+            <a:schemeClr val="lt1"/>
+          </a:fontRef>
+        </p:style>
+        <p:txBody>
+          <a:bodyPr rtlCol="0" anchor="ctr"/>
+          <a:lstStyle/>
+          <a:p>
+            <a:pPr algn="ctr"/>
+          </a:p>
+        </p:txBody>
+      </p:sp>
+      <p:sp>
+        <p:nvSpPr>
+          <p:cNvPr id="23" name="TextBox 22"/>
+          <p:cNvSpPr txBox="1"/>
+          <p:nvPr/>
+        </p:nvSpPr>
+        <p:spPr>
+          <a:xfrm>
+            <a:off x="1051560" y="3849624"/>
+            <a:ext cx="3383280" cy="530352"/>
+          </a:xfrm>
+          <a:prstGeom prst="rect">
+            <a:avLst/>
+          </a:prstGeom>
+          <a:noFill/>
+        </p:spPr>
+        <p:txBody>
+          <a:bodyPr wrap="square" anchor="ctr" lIns="0" rIns="0" tIns="0" bIns="0">
+            <a:spAutoFit/>
+          </a:bodyPr>
+          <a:lstStyle/>
+          <a:p>
+            <a:pPr algn="l"/>
+            <a:r>
+              <a:rPr sz="1200" b="0">
+                <a:solidFill>
+                  <a:srgbClr val="222B36"/>
+                </a:solidFill>
+                <a:latin typeface="Calibri"/>
+              </a:rPr>
+              <a:t>Tarif de revente</a:t>
+            </a:r>
+          </a:p>
+        </p:txBody>
+      </p:sp>
+      <p:sp>
+        <p:nvSpPr>
+          <p:cNvPr id="24" name="Rectangle 23"/>
+          <p:cNvSpPr/>
+          <p:nvPr/>
+        </p:nvSpPr>
+        <p:spPr>
+          <a:xfrm>
+            <a:off x="4572000" y="3849624"/>
+            <a:ext cx="2377440" cy="530352"/>
+          </a:xfrm>
+          <a:prstGeom prst="rect">
+            <a:avLst/>
+          </a:prstGeom>
+          <a:solidFill>
+            <a:srgbClr val="F5F8F7"/>
+          </a:solidFill>
+          <a:ln>
+            <a:noFill/>
+          </a:ln>
+          <a:effectLst/>
+        </p:spPr>
+        <p:style>
+          <a:lnRef idx="1">
+            <a:schemeClr val="accent1"/>
+          </a:lnRef>
+          <a:fillRef idx="3">
+            <a:schemeClr val="accent1"/>
+          </a:fillRef>
+          <a:effectRef idx="2">
+            <a:schemeClr val="accent1"/>
+          </a:effectRef>
+          <a:fontRef idx="minor">
+            <a:schemeClr val="lt1"/>
+          </a:fontRef>
+        </p:style>
+        <p:txBody>
+          <a:bodyPr rtlCol="0" anchor="ctr"/>
+          <a:lstStyle/>
+          <a:p>
+            <a:pPr algn="ctr"/>
+          </a:p>
+        </p:txBody>
+      </p:sp>
+      <p:sp>
+        <p:nvSpPr>
+          <p:cNvPr id="25" name="TextBox 24"/>
+          <p:cNvSpPr txBox="1"/>
+          <p:nvPr/>
+        </p:nvSpPr>
+        <p:spPr>
+          <a:xfrm>
+            <a:off x="4709160" y="3849624"/>
+            <a:ext cx="2103120" cy="530352"/>
+          </a:xfrm>
+          <a:prstGeom prst="rect">
+            <a:avLst/>
+          </a:prstGeom>
+          <a:noFill/>
+        </p:spPr>
+        <p:txBody>
+          <a:bodyPr wrap="square" anchor="ctr" lIns="0" rIns="0" tIns="0" bIns="0">
+            <a:spAutoFit/>
+          </a:bodyPr>
+          <a:lstStyle/>
+          <a:p>
+            <a:pPr algn="l"/>
+            <a:r>
+              <a:rPr sz="1200" b="1">
+                <a:solidFill>
+                  <a:srgbClr val="0E7C7B"/>
+                </a:solidFill>
+                <a:latin typeface="Calibri"/>
+              </a:rPr>
+              <a:t>8–13 c/kWh</a:t>
+            </a:r>
+          </a:p>
+        </p:txBody>
+      </p:sp>
+      <p:sp>
+        <p:nvSpPr>
+          <p:cNvPr id="26" name="Rectangle 25"/>
+          <p:cNvSpPr/>
+          <p:nvPr/>
+        </p:nvSpPr>
+        <p:spPr>
+          <a:xfrm>
+            <a:off x="6949440" y="3849624"/>
+            <a:ext cx="4389120" cy="530352"/>
+          </a:xfrm>
+          <a:prstGeom prst="rect">
+            <a:avLst/>
+          </a:prstGeom>
+          <a:solidFill>
+            <a:srgbClr val="F5F8F7"/>
+          </a:solidFill>
+          <a:ln>
+            <a:noFill/>
+          </a:ln>
+          <a:effectLst/>
+        </p:spPr>
+        <p:style>
+          <a:lnRef idx="1">
+            <a:schemeClr val="accent1"/>
+          </a:lnRef>
+          <a:fillRef idx="3">
+            <a:schemeClr val="accent1"/>
+          </a:fillRef>
+          <a:effectRef idx="2">
+            <a:schemeClr val="accent1"/>
+          </a:effectRef>
+          <a:fontRef idx="minor">
+            <a:schemeClr val="lt1"/>
+          </a:fontRef>
+        </p:style>
+        <p:txBody>
+          <a:bodyPr rtlCol="0" anchor="ctr"/>
+          <a:lstStyle/>
+          <a:p>
+            <a:pPr algn="ctr"/>
+          </a:p>
+        </p:txBody>
+      </p:sp>
+      <p:sp>
+        <p:nvSpPr>
+          <p:cNvPr id="27" name="TextBox 26"/>
+          <p:cNvSpPr txBox="1"/>
+          <p:nvPr/>
+        </p:nvSpPr>
+        <p:spPr>
+          <a:xfrm>
+            <a:off x="7086600" y="3849624"/>
+            <a:ext cx="4114800" cy="530352"/>
+          </a:xfrm>
+          <a:prstGeom prst="rect">
+            <a:avLst/>
+          </a:prstGeom>
+          <a:noFill/>
+        </p:spPr>
+        <p:txBody>
+          <a:bodyPr wrap="square" anchor="ctr" lIns="0" rIns="0" tIns="0" bIns="0">
+            <a:spAutoFit/>
+          </a:bodyPr>
+          <a:lstStyle/>
+          <a:p>
+            <a:pPr algn="l"/>
+            <a:r>
+              <a:rPr sz="1200" b="0">
+                <a:solidFill>
+                  <a:srgbClr val="222B36"/>
+                </a:solidFill>
+                <a:latin typeface="Calibri"/>
+              </a:rPr>
+              <a:t>Arrêté tarifaire S21 (réglementé)</a:t>
+            </a:r>
+          </a:p>
+        </p:txBody>
+      </p:sp>
+      <p:sp>
+        <p:nvSpPr>
+          <p:cNvPr id="28" name="Rectangle 27"/>
+          <p:cNvSpPr/>
+          <p:nvPr/>
+        </p:nvSpPr>
+        <p:spPr>
+          <a:xfrm>
+            <a:off x="914400" y="4379975"/>
+            <a:ext cx="3657600" cy="530352"/>
+          </a:xfrm>
+          <a:prstGeom prst="rect">
+            <a:avLst/>
+          </a:prstGeom>
+          <a:solidFill>
+            <a:srgbClr val="FFFFFF"/>
+          </a:solidFill>
+          <a:ln>
+            <a:noFill/>
+          </a:ln>
+          <a:effectLst/>
+        </p:spPr>
+        <p:style>
+          <a:lnRef idx="1">
+            <a:schemeClr val="accent1"/>
+          </a:lnRef>
+          <a:fillRef idx="3">
+            <a:schemeClr val="accent1"/>
+          </a:fillRef>
+          <a:effectRef idx="2">
+            <a:schemeClr val="accent1"/>
+          </a:effectRef>
+          <a:fontRef idx="minor">
+            <a:schemeClr val="lt1"/>
+          </a:fontRef>
+        </p:style>
+        <p:txBody>
+          <a:bodyPr rtlCol="0" anchor="ctr"/>
+          <a:lstStyle/>
+          <a:p>
+            <a:pPr algn="ctr"/>
+          </a:p>
+        </p:txBody>
+      </p:sp>
+      <p:sp>
+        <p:nvSpPr>
+          <p:cNvPr id="29" name="TextBox 28"/>
+          <p:cNvSpPr txBox="1"/>
+          <p:nvPr/>
+        </p:nvSpPr>
+        <p:spPr>
+          <a:xfrm>
+            <a:off x="1051560" y="4379975"/>
+            <a:ext cx="3383280" cy="530352"/>
+          </a:xfrm>
+          <a:prstGeom prst="rect">
+            <a:avLst/>
+          </a:prstGeom>
+          <a:noFill/>
+        </p:spPr>
+        <p:txBody>
+          <a:bodyPr wrap="square" anchor="ctr" lIns="0" rIns="0" tIns="0" bIns="0">
+            <a:spAutoFit/>
+          </a:bodyPr>
+          <a:lstStyle/>
+          <a:p>
+            <a:pPr algn="l"/>
+            <a:r>
+              <a:rPr sz="1200" b="0">
+                <a:solidFill>
+                  <a:srgbClr val="222B36"/>
+                </a:solidFill>
+                <a:latin typeface="Calibri"/>
+              </a:rPr>
+              <a:t>Coût d'installation (CAPEX)</a:t>
+            </a:r>
+          </a:p>
+        </p:txBody>
+      </p:sp>
+      <p:sp>
+        <p:nvSpPr>
+          <p:cNvPr id="30" name="Rectangle 29"/>
+          <p:cNvSpPr/>
+          <p:nvPr/>
+        </p:nvSpPr>
+        <p:spPr>
+          <a:xfrm>
+            <a:off x="4572000" y="4379975"/>
+            <a:ext cx="2377440" cy="530352"/>
+          </a:xfrm>
+          <a:prstGeom prst="rect">
+            <a:avLst/>
+          </a:prstGeom>
+          <a:solidFill>
+            <a:srgbClr val="FFFFFF"/>
+          </a:solidFill>
+          <a:ln>
+            <a:noFill/>
+          </a:ln>
+          <a:effectLst/>
+        </p:spPr>
+        <p:style>
+          <a:lnRef idx="1">
+            <a:schemeClr val="accent1"/>
+          </a:lnRef>
+          <a:fillRef idx="3">
+            <a:schemeClr val="accent1"/>
+          </a:fillRef>
+          <a:effectRef idx="2">
+            <a:schemeClr val="accent1"/>
+          </a:effectRef>
+          <a:fontRef idx="minor">
+            <a:schemeClr val="lt1"/>
+          </a:fontRef>
+        </p:style>
+        <p:txBody>
+          <a:bodyPr rtlCol="0" anchor="ctr"/>
+          <a:lstStyle/>
+          <a:p>
+            <a:pPr algn="ctr"/>
+          </a:p>
+        </p:txBody>
+      </p:sp>
+      <p:sp>
+        <p:nvSpPr>
+          <p:cNvPr id="31" name="TextBox 30"/>
+          <p:cNvSpPr txBox="1"/>
+          <p:nvPr/>
+        </p:nvSpPr>
+        <p:spPr>
+          <a:xfrm>
+            <a:off x="4709160" y="4379975"/>
+            <a:ext cx="2103120" cy="530352"/>
+          </a:xfrm>
+          <a:prstGeom prst="rect">
+            <a:avLst/>
+          </a:prstGeom>
+          <a:noFill/>
+        </p:spPr>
+        <p:txBody>
+          <a:bodyPr wrap="square" anchor="ctr" lIns="0" rIns="0" tIns="0" bIns="0">
+            <a:spAutoFit/>
+          </a:bodyPr>
+          <a:lstStyle/>
+          <a:p>
+            <a:pPr algn="l"/>
+            <a:r>
+              <a:rPr sz="1200" b="1">
+                <a:solidFill>
+                  <a:srgbClr val="0E7C7B"/>
+                </a:solidFill>
+                <a:latin typeface="Calibri"/>
+              </a:rPr>
+              <a:t>1100–1850 €/kWc</a:t>
+            </a:r>
+          </a:p>
+        </p:txBody>
+      </p:sp>
+      <p:sp>
+        <p:nvSpPr>
+          <p:cNvPr id="32" name="Rectangle 31"/>
+          <p:cNvSpPr/>
+          <p:nvPr/>
+        </p:nvSpPr>
+        <p:spPr>
+          <a:xfrm>
+            <a:off x="6949440" y="4379975"/>
+            <a:ext cx="4389120" cy="530352"/>
+          </a:xfrm>
+          <a:prstGeom prst="rect">
+            <a:avLst/>
+          </a:prstGeom>
+          <a:solidFill>
+            <a:srgbClr val="FFFFFF"/>
+          </a:solidFill>
+          <a:ln>
+            <a:noFill/>
+          </a:ln>
+          <a:effectLst/>
+        </p:spPr>
+        <p:style>
+          <a:lnRef idx="1">
+            <a:schemeClr val="accent1"/>
+          </a:lnRef>
+          <a:fillRef idx="3">
+            <a:schemeClr val="accent1"/>
+          </a:fillRef>
+          <a:effectRef idx="2">
+            <a:schemeClr val="accent1"/>
+          </a:effectRef>
+          <a:fontRef idx="minor">
+            <a:schemeClr val="lt1"/>
+          </a:fontRef>
+        </p:style>
+        <p:txBody>
+          <a:bodyPr rtlCol="0" anchor="ctr"/>
+          <a:lstStyle/>
+          <a:p>
+            <a:pPr algn="ctr"/>
+          </a:p>
+        </p:txBody>
+      </p:sp>
+      <p:sp>
+        <p:nvSpPr>
+          <p:cNvPr id="33" name="TextBox 32"/>
+          <p:cNvSpPr txBox="1"/>
+          <p:nvPr/>
+        </p:nvSpPr>
+        <p:spPr>
+          <a:xfrm>
+            <a:off x="7086600" y="4379975"/>
+            <a:ext cx="4114800" cy="530352"/>
+          </a:xfrm>
+          <a:prstGeom prst="rect">
+            <a:avLst/>
+          </a:prstGeom>
+          <a:noFill/>
+        </p:spPr>
+        <p:txBody>
+          <a:bodyPr wrap="square" anchor="ctr" lIns="0" rIns="0" tIns="0" bIns="0">
+            <a:spAutoFit/>
+          </a:bodyPr>
+          <a:lstStyle/>
+          <a:p>
+            <a:pPr algn="l"/>
+            <a:r>
+              <a:rPr sz="1200" b="0">
+                <a:solidFill>
+                  <a:srgbClr val="222B36"/>
+                </a:solidFill>
+                <a:latin typeface="Calibri"/>
+              </a:rPr>
+              <a:t>Fourchettes de marché selon la taille</a:t>
+            </a:r>
+          </a:p>
+        </p:txBody>
+      </p:sp>
+      <p:sp>
+        <p:nvSpPr>
+          <p:cNvPr id="34" name="Rectangle 33"/>
+          <p:cNvSpPr/>
+          <p:nvPr/>
+        </p:nvSpPr>
+        <p:spPr>
+          <a:xfrm>
+            <a:off x="914400" y="4910327"/>
+            <a:ext cx="3657600" cy="530352"/>
+          </a:xfrm>
+          <a:prstGeom prst="rect">
+            <a:avLst/>
+          </a:prstGeom>
+          <a:solidFill>
+            <a:srgbClr val="F5F8F7"/>
+          </a:solidFill>
+          <a:ln>
+            <a:noFill/>
+          </a:ln>
+          <a:effectLst/>
+        </p:spPr>
+        <p:style>
+          <a:lnRef idx="1">
+            <a:schemeClr val="accent1"/>
+          </a:lnRef>
+          <a:fillRef idx="3">
+            <a:schemeClr val="accent1"/>
+          </a:fillRef>
+          <a:effectRef idx="2">
+            <a:schemeClr val="accent1"/>
+          </a:effectRef>
+          <a:fontRef idx="minor">
+            <a:schemeClr val="lt1"/>
+          </a:fontRef>
+        </p:style>
+        <p:txBody>
+          <a:bodyPr rtlCol="0" anchor="ctr"/>
+          <a:lstStyle/>
+          <a:p>
+            <a:pPr algn="ctr"/>
+          </a:p>
+        </p:txBody>
+      </p:sp>
+      <p:sp>
+        <p:nvSpPr>
+          <p:cNvPr id="35" name="TextBox 34"/>
+          <p:cNvSpPr txBox="1"/>
+          <p:nvPr/>
+        </p:nvSpPr>
+        <p:spPr>
+          <a:xfrm>
+            <a:off x="1051560" y="4910327"/>
+            <a:ext cx="3383280" cy="530352"/>
+          </a:xfrm>
+          <a:prstGeom prst="rect">
+            <a:avLst/>
+          </a:prstGeom>
+          <a:noFill/>
+        </p:spPr>
+        <p:txBody>
+          <a:bodyPr wrap="square" anchor="ctr" lIns="0" rIns="0" tIns="0" bIns="0">
+            <a:spAutoFit/>
+          </a:bodyPr>
+          <a:lstStyle/>
+          <a:p>
+            <a:pPr algn="l"/>
+            <a:r>
+              <a:rPr sz="1200" b="0">
+                <a:solidFill>
+                  <a:srgbClr val="222B36"/>
+                </a:solidFill>
+                <a:latin typeface="Calibri"/>
+              </a:rPr>
+              <a:t>Entretien (OPEX)</a:t>
+            </a:r>
+          </a:p>
+        </p:txBody>
+      </p:sp>
+      <p:sp>
+        <p:nvSpPr>
+          <p:cNvPr id="36" name="Rectangle 35"/>
+          <p:cNvSpPr/>
+          <p:nvPr/>
+        </p:nvSpPr>
+        <p:spPr>
+          <a:xfrm>
+            <a:off x="4572000" y="4910327"/>
+            <a:ext cx="2377440" cy="530352"/>
+          </a:xfrm>
+          <a:prstGeom prst="rect">
+            <a:avLst/>
+          </a:prstGeom>
+          <a:solidFill>
+            <a:srgbClr val="F5F8F7"/>
+          </a:solidFill>
+          <a:ln>
+            <a:noFill/>
+          </a:ln>
+          <a:effectLst/>
+        </p:spPr>
+        <p:style>
+          <a:lnRef idx="1">
+            <a:schemeClr val="accent1"/>
+          </a:lnRef>
+          <a:fillRef idx="3">
+            <a:schemeClr val="accent1"/>
+          </a:fillRef>
+          <a:effectRef idx="2">
+            <a:schemeClr val="accent1"/>
+          </a:effectRef>
+          <a:fontRef idx="minor">
+            <a:schemeClr val="lt1"/>
+          </a:fontRef>
+        </p:style>
+        <p:txBody>
+          <a:bodyPr rtlCol="0" anchor="ctr"/>
+          <a:lstStyle/>
+          <a:p>
+            <a:pPr algn="ctr"/>
+          </a:p>
+        </p:txBody>
+      </p:sp>
+      <p:sp>
+        <p:nvSpPr>
+          <p:cNvPr id="37" name="TextBox 36"/>
+          <p:cNvSpPr txBox="1"/>
+          <p:nvPr/>
+        </p:nvSpPr>
+        <p:spPr>
+          <a:xfrm>
+            <a:off x="4709160" y="4910327"/>
+            <a:ext cx="2103120" cy="530352"/>
+          </a:xfrm>
+          <a:prstGeom prst="rect">
+            <a:avLst/>
+          </a:prstGeom>
+          <a:noFill/>
+        </p:spPr>
+        <p:txBody>
+          <a:bodyPr wrap="square" anchor="ctr" lIns="0" rIns="0" tIns="0" bIns="0">
+            <a:spAutoFit/>
+          </a:bodyPr>
+          <a:lstStyle/>
+          <a:p>
+            <a:pPr algn="l"/>
+            <a:r>
+              <a:rPr sz="1200" b="1">
+                <a:solidFill>
+                  <a:srgbClr val="0E7C7B"/>
+                </a:solidFill>
+                <a:latin typeface="Calibri"/>
+              </a:rPr>
+              <a:t>1,5 %/an</a:t>
+            </a:r>
+          </a:p>
+        </p:txBody>
+      </p:sp>
+      <p:sp>
+        <p:nvSpPr>
+          <p:cNvPr id="38" name="Rectangle 37"/>
+          <p:cNvSpPr/>
+          <p:nvPr/>
+        </p:nvSpPr>
+        <p:spPr>
+          <a:xfrm>
+            <a:off x="6949440" y="4910327"/>
+            <a:ext cx="4389120" cy="530352"/>
+          </a:xfrm>
+          <a:prstGeom prst="rect">
+            <a:avLst/>
+          </a:prstGeom>
+          <a:solidFill>
+            <a:srgbClr val="F5F8F7"/>
+          </a:solidFill>
+          <a:ln>
+            <a:noFill/>
+          </a:ln>
+          <a:effectLst/>
+        </p:spPr>
+        <p:style>
+          <a:lnRef idx="1">
+            <a:schemeClr val="accent1"/>
+          </a:lnRef>
+          <a:fillRef idx="3">
+            <a:schemeClr val="accent1"/>
+          </a:fillRef>
+          <a:effectRef idx="2">
+            <a:schemeClr val="accent1"/>
+          </a:effectRef>
+          <a:fontRef idx="minor">
+            <a:schemeClr val="lt1"/>
+          </a:fontRef>
+        </p:style>
+        <p:txBody>
+          <a:bodyPr rtlCol="0" anchor="ctr"/>
+          <a:lstStyle/>
+          <a:p>
+            <a:pPr algn="ctr"/>
+          </a:p>
+        </p:txBody>
+      </p:sp>
+      <p:sp>
+        <p:nvSpPr>
+          <p:cNvPr id="39" name="TextBox 38"/>
+          <p:cNvSpPr txBox="1"/>
+          <p:nvPr/>
+        </p:nvSpPr>
+        <p:spPr>
+          <a:xfrm>
+            <a:off x="7086600" y="4910327"/>
+            <a:ext cx="4114800" cy="530352"/>
+          </a:xfrm>
+          <a:prstGeom prst="rect">
+            <a:avLst/>
+          </a:prstGeom>
+          <a:noFill/>
+        </p:spPr>
+        <p:txBody>
+          <a:bodyPr wrap="square" anchor="ctr" lIns="0" rIns="0" tIns="0" bIns="0">
+            <a:spAutoFit/>
+          </a:bodyPr>
+          <a:lstStyle/>
+          <a:p>
+            <a:pPr algn="l"/>
+            <a:r>
+              <a:rPr sz="1200" b="0">
+                <a:solidFill>
+                  <a:srgbClr val="222B36"/>
+                </a:solidFill>
+                <a:latin typeface="Calibri"/>
+              </a:rPr>
+              <a:t>Maintenance courante d'une installation PV</a:t>
+            </a:r>
+          </a:p>
+        </p:txBody>
+      </p:sp>
+      <p:sp>
+        <p:nvSpPr>
+          <p:cNvPr id="40" name="Rectangle 39"/>
+          <p:cNvSpPr/>
+          <p:nvPr/>
+        </p:nvSpPr>
+        <p:spPr>
+          <a:xfrm>
+            <a:off x="914400" y="5440679"/>
+            <a:ext cx="3657600" cy="530352"/>
+          </a:xfrm>
+          <a:prstGeom prst="rect">
+            <a:avLst/>
+          </a:prstGeom>
+          <a:solidFill>
+            <a:srgbClr val="FFFFFF"/>
+          </a:solidFill>
+          <a:ln>
+            <a:noFill/>
+          </a:ln>
+          <a:effectLst/>
+        </p:spPr>
+        <p:style>
+          <a:lnRef idx="1">
+            <a:schemeClr val="accent1"/>
+          </a:lnRef>
+          <a:fillRef idx="3">
+            <a:schemeClr val="accent1"/>
+          </a:fillRef>
+          <a:effectRef idx="2">
+            <a:schemeClr val="accent1"/>
+          </a:effectRef>
+          <a:fontRef idx="minor">
+            <a:schemeClr val="lt1"/>
+          </a:fontRef>
+        </p:style>
+        <p:txBody>
+          <a:bodyPr rtlCol="0" anchor="ctr"/>
+          <a:lstStyle/>
+          <a:p>
+            <a:pPr algn="ctr"/>
+          </a:p>
+        </p:txBody>
+      </p:sp>
+      <p:sp>
+        <p:nvSpPr>
+          <p:cNvPr id="41" name="TextBox 40"/>
+          <p:cNvSpPr txBox="1"/>
+          <p:nvPr/>
+        </p:nvSpPr>
+        <p:spPr>
+          <a:xfrm>
+            <a:off x="1051560" y="5440679"/>
+            <a:ext cx="3383280" cy="530352"/>
+          </a:xfrm>
+          <a:prstGeom prst="rect">
+            <a:avLst/>
+          </a:prstGeom>
+          <a:noFill/>
+        </p:spPr>
+        <p:txBody>
+          <a:bodyPr wrap="square" anchor="ctr" lIns="0" rIns="0" tIns="0" bIns="0">
+            <a:spAutoFit/>
+          </a:bodyPr>
+          <a:lstStyle/>
+          <a:p>
+            <a:pPr algn="l"/>
+            <a:r>
+              <a:rPr sz="1200" b="0">
+                <a:solidFill>
+                  <a:srgbClr val="222B36"/>
+                </a:solidFill>
+                <a:latin typeface="Calibri"/>
+              </a:rPr>
+              <a:t>Taux d'autoconsommation</a:t>
+            </a:r>
+          </a:p>
+        </p:txBody>
+      </p:sp>
+      <p:sp>
+        <p:nvSpPr>
+          <p:cNvPr id="42" name="Rectangle 41"/>
+          <p:cNvSpPr/>
+          <p:nvPr/>
+        </p:nvSpPr>
+        <p:spPr>
+          <a:xfrm>
+            <a:off x="4572000" y="5440679"/>
+            <a:ext cx="2377440" cy="530352"/>
+          </a:xfrm>
+          <a:prstGeom prst="rect">
+            <a:avLst/>
+          </a:prstGeom>
+          <a:solidFill>
+            <a:srgbClr val="FFFFFF"/>
+          </a:solidFill>
+          <a:ln>
+            <a:noFill/>
+          </a:ln>
+          <a:effectLst/>
+        </p:spPr>
+        <p:style>
+          <a:lnRef idx="1">
+            <a:schemeClr val="accent1"/>
+          </a:lnRef>
+          <a:fillRef idx="3">
+            <a:schemeClr val="accent1"/>
+          </a:fillRef>
+          <a:effectRef idx="2">
+            <a:schemeClr val="accent1"/>
+          </a:effectRef>
+          <a:fontRef idx="minor">
+            <a:schemeClr val="lt1"/>
+          </a:fontRef>
+        </p:style>
+        <p:txBody>
+          <a:bodyPr rtlCol="0" anchor="ctr"/>
+          <a:lstStyle/>
+          <a:p>
+            <a:pPr algn="ctr"/>
+          </a:p>
+        </p:txBody>
+      </p:sp>
+      <p:sp>
+        <p:nvSpPr>
+          <p:cNvPr id="43" name="TextBox 42"/>
+          <p:cNvSpPr txBox="1"/>
+          <p:nvPr/>
+        </p:nvSpPr>
+        <p:spPr>
+          <a:xfrm>
+            <a:off x="4709160" y="5440679"/>
+            <a:ext cx="2103120" cy="530352"/>
+          </a:xfrm>
+          <a:prstGeom prst="rect">
+            <a:avLst/>
+          </a:prstGeom>
+          <a:noFill/>
+        </p:spPr>
+        <p:txBody>
+          <a:bodyPr wrap="square" anchor="ctr" lIns="0" rIns="0" tIns="0" bIns="0">
+            <a:spAutoFit/>
+          </a:bodyPr>
+          <a:lstStyle/>
+          <a:p>
+            <a:pPr algn="l"/>
+            <a:r>
+              <a:rPr sz="1200" b="1">
+                <a:solidFill>
+                  <a:srgbClr val="0E7C7B"/>
+                </a:solidFill>
+                <a:latin typeface="Calibri"/>
+              </a:rPr>
+              <a:t>65 %</a:t>
+            </a:r>
+          </a:p>
+        </p:txBody>
+      </p:sp>
+      <p:sp>
+        <p:nvSpPr>
+          <p:cNvPr id="44" name="Rectangle 43"/>
+          <p:cNvSpPr/>
+          <p:nvPr/>
+        </p:nvSpPr>
+        <p:spPr>
+          <a:xfrm>
+            <a:off x="6949440" y="5440679"/>
+            <a:ext cx="4389120" cy="530352"/>
+          </a:xfrm>
+          <a:prstGeom prst="rect">
+            <a:avLst/>
+          </a:prstGeom>
+          <a:solidFill>
+            <a:srgbClr val="FFFFFF"/>
+          </a:solidFill>
+          <a:ln>
+            <a:noFill/>
+          </a:ln>
+          <a:effectLst/>
+        </p:spPr>
+        <p:style>
+          <a:lnRef idx="1">
+            <a:schemeClr val="accent1"/>
+          </a:lnRef>
+          <a:fillRef idx="3">
+            <a:schemeClr val="accent1"/>
+          </a:fillRef>
+          <a:effectRef idx="2">
+            <a:schemeClr val="accent1"/>
+          </a:effectRef>
+          <a:fontRef idx="minor">
+            <a:schemeClr val="lt1"/>
+          </a:fontRef>
+        </p:style>
+        <p:txBody>
+          <a:bodyPr rtlCol="0" anchor="ctr"/>
+          <a:lstStyle/>
+          <a:p>
+            <a:pPr algn="ctr"/>
+          </a:p>
+        </p:txBody>
+      </p:sp>
+      <p:sp>
+        <p:nvSpPr>
+          <p:cNvPr id="45" name="TextBox 44"/>
+          <p:cNvSpPr txBox="1"/>
+          <p:nvPr/>
+        </p:nvSpPr>
+        <p:spPr>
+          <a:xfrm>
+            <a:off x="7086600" y="5440679"/>
+            <a:ext cx="4114800" cy="530352"/>
+          </a:xfrm>
+          <a:prstGeom prst="rect">
+            <a:avLst/>
+          </a:prstGeom>
+          <a:noFill/>
+        </p:spPr>
+        <p:txBody>
+          <a:bodyPr wrap="square" anchor="ctr" lIns="0" rIns="0" tIns="0" bIns="0">
+            <a:spAutoFit/>
+          </a:bodyPr>
+          <a:lstStyle/>
+          <a:p>
+            <a:pPr algn="l"/>
+            <a:r>
+              <a:rPr sz="1200" b="0">
+                <a:solidFill>
+                  <a:srgbClr val="222B36"/>
+                </a:solidFill>
+                <a:latin typeface="Calibri"/>
+              </a:rPr>
+              <a:t>Usage réaliste pour du tertiaire</a:t>
+            </a:r>
+          </a:p>
+        </p:txBody>
+      </p:sp>
+      <p:sp>
+        <p:nvSpPr>
+          <p:cNvPr id="46" name="TextBox 45"/>
+          <p:cNvSpPr txBox="1"/>
+          <p:nvPr/>
+        </p:nvSpPr>
+        <p:spPr>
+          <a:xfrm>
+            <a:off x="914400" y="6153912"/>
             <a:ext cx="10424160" cy="548640"/>
           </a:xfrm>
           <a:prstGeom prst="rect">
@@ -7635,11 +9049,7 @@
           </a:bodyPr>
           <a:lstStyle/>
           <a:p>
-            <a:pPr algn="l">
-              <a:spcAft>
-                <a:spcPts val="0"/>
-              </a:spcAft>
-            </a:pPr>
+            <a:pPr algn="l"/>
             <a:r>
               <a:rPr sz="1200" b="0">
                 <a:solidFill>
@@ -11401,7 +12811,7 @@
 </file>
 
 <file path=ppt/slides/slide7.xml><?xml version="1.0" encoding="utf-8"?>
-<p:sld xmlns:a="http://schemas.openxmlformats.org/drawingml/2006/main" xmlns:r="http://schemas.openxmlformats.org/officeDocument/2006/relationships" xmlns:p="http://schemas.openxmlformats.org/presentationml/2006/main">
+<p:sld xmlns:a="http://schemas.openxmlformats.org/drawingml/2006/main" xmlns:p="http://schemas.openxmlformats.org/presentationml/2006/main" xmlns:r="http://schemas.openxmlformats.org/officeDocument/2006/relationships">
   <p:cSld>
     <p:bg>
       <p:bgPr>
@@ -11417,14 +12827,7 @@
         <p:cNvGrpSpPr/>
         <p:nvPr/>
       </p:nvGrpSpPr>
-      <p:grpSpPr>
-        <a:xfrm>
-          <a:off x="0" y="0"/>
-          <a:ext cx="0" cy="0"/>
-          <a:chOff x="0" y="0"/>
-          <a:chExt cx="0" cy="0"/>
-        </a:xfrm>
-      </p:grpSpPr>
+      <p:grpSpPr/>
       <p:sp>
         <p:nvSpPr>
           <p:cNvPr id="2" name="TextBox 1"/>
@@ -11442,15 +12845,12 @@
           <a:noFill/>
         </p:spPr>
         <p:txBody>
-          <a:bodyPr wrap="square" lIns="0" tIns="0" rIns="0" bIns="0" anchor="t">
+          <a:bodyPr wrap="square" anchor="t" lIns="0" rIns="0" tIns="0" bIns="0">
             <a:spAutoFit/>
           </a:bodyPr>
           <a:lstStyle/>
           <a:p>
             <a:pPr algn="l">
-              <a:spcBef>
-                <a:spcPts val="0"/>
-              </a:spcBef>
               <a:spcAft>
                 <a:spcPts val="0"/>
               </a:spcAft>
@@ -11462,23 +12862,311 @@
                 </a:solidFill>
                 <a:latin typeface="Cambria"/>
               </a:rPr>
-              <a:t>Les indicateurs de rentabilité</a:t>
-            </a:r>
-          </a:p>
-        </p:txBody>
-      </p:sp>
-      <p:sp>
-        <p:nvSpPr>
-          <p:cNvPr id="3" name="Rounded Rectangle 2"/>
+              <a:t>Les hypothèses clés — et d'où elles viennent</a:t>
+            </a:r>
+          </a:p>
+        </p:txBody>
+      </p:sp>
+      <p:sp>
+        <p:nvSpPr>
+          <p:cNvPr id="3" name="TextBox 2"/>
+          <p:cNvSpPr txBox="1"/>
+          <p:nvPr/>
+        </p:nvSpPr>
+        <p:spPr>
+          <a:xfrm>
+            <a:off x="914400" y="1508760"/>
+            <a:ext cx="10424160" cy="457200"/>
+          </a:xfrm>
+          <a:prstGeom prst="rect">
+            <a:avLst/>
+          </a:prstGeom>
+          <a:noFill/>
+        </p:spPr>
+        <p:txBody>
+          <a:bodyPr wrap="square" anchor="t" lIns="0" rIns="0" tIns="0" bIns="0">
+            <a:spAutoFit/>
+          </a:bodyPr>
+          <a:lstStyle/>
+          <a:p>
+            <a:pPr algn="l">
+              <a:spcAft>
+                <a:spcPts val="0"/>
+              </a:spcAft>
+            </a:pPr>
+            <a:r>
+              <a:rPr sz="1400" b="0">
+                <a:solidFill>
+                  <a:srgbClr val="647486"/>
+                </a:solidFill>
+                <a:latin typeface="Calibri"/>
+              </a:rPr>
+              <a:t>Tous les chiffres du modèle sont explicites et assumés comme des hypothèses.</a:t>
+            </a:r>
+          </a:p>
+        </p:txBody>
+      </p:sp>
+      <p:sp>
+        <p:nvSpPr>
+          <p:cNvPr id="4" name="Rectangle 3"/>
           <p:cNvSpPr/>
           <p:nvPr/>
         </p:nvSpPr>
         <p:spPr>
           <a:xfrm>
-            <a:off x="482602" y="2194559"/>
-            <a:ext cx="2606040" cy="2926080"/>
-          </a:xfrm>
-          <a:prstGeom prst="roundRect">
+            <a:off x="914400" y="2148840"/>
+            <a:ext cx="3657600" cy="457200"/>
+          </a:xfrm>
+          <a:prstGeom prst="rect">
+            <a:avLst/>
+          </a:prstGeom>
+          <a:solidFill>
+            <a:srgbClr val="12293D"/>
+          </a:solidFill>
+          <a:ln>
+            <a:noFill/>
+          </a:ln>
+          <a:effectLst/>
+        </p:spPr>
+        <p:style>
+          <a:lnRef idx="1">
+            <a:schemeClr val="accent1"/>
+          </a:lnRef>
+          <a:fillRef idx="3">
+            <a:schemeClr val="accent1"/>
+          </a:fillRef>
+          <a:effectRef idx="2">
+            <a:schemeClr val="accent1"/>
+          </a:effectRef>
+          <a:fontRef idx="minor">
+            <a:schemeClr val="lt1"/>
+          </a:fontRef>
+        </p:style>
+        <p:txBody>
+          <a:bodyPr rtlCol="0" anchor="ctr"/>
+          <a:lstStyle/>
+          <a:p>
+            <a:pPr algn="ctr"/>
+          </a:p>
+        </p:txBody>
+      </p:sp>
+      <p:sp>
+        <p:nvSpPr>
+          <p:cNvPr id="5" name="TextBox 4"/>
+          <p:cNvSpPr txBox="1"/>
+          <p:nvPr/>
+        </p:nvSpPr>
+        <p:spPr>
+          <a:xfrm>
+            <a:off x="1051560" y="2148840"/>
+            <a:ext cx="3383280" cy="457200"/>
+          </a:xfrm>
+          <a:prstGeom prst="rect">
+            <a:avLst/>
+          </a:prstGeom>
+          <a:noFill/>
+        </p:spPr>
+        <p:txBody>
+          <a:bodyPr wrap="square" anchor="ctr" lIns="0" rIns="0" tIns="0" bIns="0">
+            <a:spAutoFit/>
+          </a:bodyPr>
+          <a:lstStyle/>
+          <a:p>
+            <a:pPr algn="l">
+              <a:spcAft>
+                <a:spcPts val="0"/>
+              </a:spcAft>
+            </a:pPr>
+            <a:r>
+              <a:rPr sz="1250" b="1">
+                <a:solidFill>
+                  <a:srgbClr val="FFFFFF"/>
+                </a:solidFill>
+                <a:latin typeface="Calibri"/>
+              </a:rPr>
+              <a:t>Hypothèse</a:t>
+            </a:r>
+          </a:p>
+        </p:txBody>
+      </p:sp>
+      <p:sp>
+        <p:nvSpPr>
+          <p:cNvPr id="6" name="Rectangle 5"/>
+          <p:cNvSpPr/>
+          <p:nvPr/>
+        </p:nvSpPr>
+        <p:spPr>
+          <a:xfrm>
+            <a:off x="4572000" y="2148840"/>
+            <a:ext cx="2377440" cy="457200"/>
+          </a:xfrm>
+          <a:prstGeom prst="rect">
+            <a:avLst/>
+          </a:prstGeom>
+          <a:solidFill>
+            <a:srgbClr val="12293D"/>
+          </a:solidFill>
+          <a:ln>
+            <a:noFill/>
+          </a:ln>
+          <a:effectLst/>
+        </p:spPr>
+        <p:style>
+          <a:lnRef idx="1">
+            <a:schemeClr val="accent1"/>
+          </a:lnRef>
+          <a:fillRef idx="3">
+            <a:schemeClr val="accent1"/>
+          </a:fillRef>
+          <a:effectRef idx="2">
+            <a:schemeClr val="accent1"/>
+          </a:effectRef>
+          <a:fontRef idx="minor">
+            <a:schemeClr val="lt1"/>
+          </a:fontRef>
+        </p:style>
+        <p:txBody>
+          <a:bodyPr rtlCol="0" anchor="ctr"/>
+          <a:lstStyle/>
+          <a:p>
+            <a:pPr algn="ctr"/>
+          </a:p>
+        </p:txBody>
+      </p:sp>
+      <p:sp>
+        <p:nvSpPr>
+          <p:cNvPr id="7" name="TextBox 6"/>
+          <p:cNvSpPr txBox="1"/>
+          <p:nvPr/>
+        </p:nvSpPr>
+        <p:spPr>
+          <a:xfrm>
+            <a:off x="4709160" y="2148840"/>
+            <a:ext cx="2103120" cy="457200"/>
+          </a:xfrm>
+          <a:prstGeom prst="rect">
+            <a:avLst/>
+          </a:prstGeom>
+          <a:noFill/>
+        </p:spPr>
+        <p:txBody>
+          <a:bodyPr wrap="square" anchor="ctr" lIns="0" rIns="0" tIns="0" bIns="0">
+            <a:spAutoFit/>
+          </a:bodyPr>
+          <a:lstStyle/>
+          <a:p>
+            <a:pPr algn="l">
+              <a:spcAft>
+                <a:spcPts val="0"/>
+              </a:spcAft>
+            </a:pPr>
+            <a:r>
+              <a:rPr sz="1250" b="1">
+                <a:solidFill>
+                  <a:srgbClr val="FFFFFF"/>
+                </a:solidFill>
+                <a:latin typeface="Calibri"/>
+              </a:rPr>
+              <a:t>Valeur</a:t>
+            </a:r>
+          </a:p>
+        </p:txBody>
+      </p:sp>
+      <p:sp>
+        <p:nvSpPr>
+          <p:cNvPr id="8" name="Rectangle 7"/>
+          <p:cNvSpPr/>
+          <p:nvPr/>
+        </p:nvSpPr>
+        <p:spPr>
+          <a:xfrm>
+            <a:off x="6949440" y="2148840"/>
+            <a:ext cx="4389120" cy="457200"/>
+          </a:xfrm>
+          <a:prstGeom prst="rect">
+            <a:avLst/>
+          </a:prstGeom>
+          <a:solidFill>
+            <a:srgbClr val="12293D"/>
+          </a:solidFill>
+          <a:ln>
+            <a:noFill/>
+          </a:ln>
+          <a:effectLst/>
+        </p:spPr>
+        <p:style>
+          <a:lnRef idx="1">
+            <a:schemeClr val="accent1"/>
+          </a:lnRef>
+          <a:fillRef idx="3">
+            <a:schemeClr val="accent1"/>
+          </a:fillRef>
+          <a:effectRef idx="2">
+            <a:schemeClr val="accent1"/>
+          </a:effectRef>
+          <a:fontRef idx="minor">
+            <a:schemeClr val="lt1"/>
+          </a:fontRef>
+        </p:style>
+        <p:txBody>
+          <a:bodyPr rtlCol="0" anchor="ctr"/>
+          <a:lstStyle/>
+          <a:p>
+            <a:pPr algn="ctr"/>
+          </a:p>
+        </p:txBody>
+      </p:sp>
+      <p:sp>
+        <p:nvSpPr>
+          <p:cNvPr id="9" name="TextBox 8"/>
+          <p:cNvSpPr txBox="1"/>
+          <p:nvPr/>
+        </p:nvSpPr>
+        <p:spPr>
+          <a:xfrm>
+            <a:off x="7086600" y="2148840"/>
+            <a:ext cx="4114800" cy="457200"/>
+          </a:xfrm>
+          <a:prstGeom prst="rect">
+            <a:avLst/>
+          </a:prstGeom>
+          <a:noFill/>
+        </p:spPr>
+        <p:txBody>
+          <a:bodyPr wrap="square" anchor="ctr" lIns="0" rIns="0" tIns="0" bIns="0">
+            <a:spAutoFit/>
+          </a:bodyPr>
+          <a:lstStyle/>
+          <a:p>
+            <a:pPr algn="l">
+              <a:spcAft>
+                <a:spcPts val="0"/>
+              </a:spcAft>
+            </a:pPr>
+            <a:r>
+              <a:rPr sz="1250" b="1">
+                <a:solidFill>
+                  <a:srgbClr val="FFFFFF"/>
+                </a:solidFill>
+                <a:latin typeface="Calibri"/>
+              </a:rPr>
+              <a:t>D'où ça vient</a:t>
+            </a:r>
+          </a:p>
+        </p:txBody>
+      </p:sp>
+      <p:sp>
+        <p:nvSpPr>
+          <p:cNvPr id="10" name="Rectangle 9"/>
+          <p:cNvSpPr/>
+          <p:nvPr/>
+        </p:nvSpPr>
+        <p:spPr>
+          <a:xfrm>
+            <a:off x="914400" y="2606040"/>
+            <a:ext cx="3657600" cy="475488"/>
+          </a:xfrm>
+          <a:prstGeom prst="rect">
             <a:avLst/>
           </a:prstGeom>
           <a:solidFill>
@@ -11487,13 +13175,7 @@
           <a:ln>
             <a:noFill/>
           </a:ln>
-          <a:effectLst>
-            <a:outerShdw blurRad="60000" dist="20000" dir="5400000" rotWithShape="0">
-              <a:srgbClr val="12293D">
-                <a:alpha val="14000"/>
-              </a:srgbClr>
-            </a:outerShdw>
-          </a:effectLst>
+          <a:effectLst/>
         </p:spPr>
         <p:style>
           <a:lnRef idx="1">
@@ -11514,20 +13196,19 @@
           <a:lstStyle/>
           <a:p>
             <a:pPr algn="ctr"/>
-            <a:endParaRPr/>
-          </a:p>
-        </p:txBody>
-      </p:sp>
-      <p:sp>
-        <p:nvSpPr>
-          <p:cNvPr id="4" name="TextBox 3"/>
+          </a:p>
+        </p:txBody>
+      </p:sp>
+      <p:sp>
+        <p:nvSpPr>
+          <p:cNvPr id="11" name="TextBox 10"/>
           <p:cNvSpPr txBox="1"/>
           <p:nvPr/>
         </p:nvSpPr>
         <p:spPr>
           <a:xfrm>
-            <a:off x="482602" y="2514600"/>
-            <a:ext cx="2606040" cy="640080"/>
+            <a:off x="1051560" y="2606040"/>
+            <a:ext cx="3383280" cy="475488"/>
           </a:xfrm>
           <a:prstGeom prst="rect">
             <a:avLst/>
@@ -11535,130 +13216,40 @@
           <a:noFill/>
         </p:spPr>
         <p:txBody>
-          <a:bodyPr wrap="square" lIns="0" tIns="0" rIns="0" bIns="0" anchor="t">
+          <a:bodyPr wrap="square" anchor="ctr" lIns="0" rIns="0" tIns="0" bIns="0">
             <a:spAutoFit/>
           </a:bodyPr>
           <a:lstStyle/>
           <a:p>
-            <a:pPr algn="ctr">
-              <a:spcBef>
-                <a:spcPts val="0"/>
-              </a:spcBef>
+            <a:pPr algn="l">
               <a:spcAft>
                 <a:spcPts val="0"/>
               </a:spcAft>
             </a:pPr>
             <a:r>
-              <a:rPr sz="2200" b="1">
-                <a:solidFill>
-                  <a:srgbClr val="0E7C7B"/>
-                </a:solidFill>
-                <a:latin typeface="Cambria"/>
-              </a:rPr>
-              <a:t>LCOE</a:t>
-            </a:r>
-          </a:p>
-        </p:txBody>
-      </p:sp>
-      <p:sp>
-        <p:nvSpPr>
-          <p:cNvPr id="5" name="TextBox 4"/>
-          <p:cNvSpPr txBox="1"/>
-          <p:nvPr/>
-        </p:nvSpPr>
-        <p:spPr>
-          <a:xfrm>
-            <a:off x="482602" y="3246119"/>
-            <a:ext cx="2606040" cy="457200"/>
-          </a:xfrm>
-          <a:prstGeom prst="rect">
-            <a:avLst/>
-          </a:prstGeom>
-          <a:noFill/>
-        </p:spPr>
-        <p:txBody>
-          <a:bodyPr wrap="square" lIns="0" tIns="0" rIns="0" bIns="0" anchor="t">
-            <a:spAutoFit/>
-          </a:bodyPr>
-          <a:lstStyle/>
-          <a:p>
-            <a:pPr algn="ctr">
-              <a:spcBef>
-                <a:spcPts val="0"/>
-              </a:spcBef>
-              <a:spcAft>
-                <a:spcPts val="0"/>
-              </a:spcAft>
-            </a:pPr>
-            <a:r>
-              <a:rPr sz="1400" b="1">
-                <a:solidFill>
-                  <a:srgbClr val="12293D"/>
-                </a:solidFill>
-                <a:latin typeface="Cambria"/>
-              </a:rPr>
-              <a:t>Prix de revient</a:t>
-            </a:r>
-          </a:p>
-        </p:txBody>
-      </p:sp>
-      <p:sp>
-        <p:nvSpPr>
-          <p:cNvPr id="6" name="TextBox 5"/>
-          <p:cNvSpPr txBox="1"/>
-          <p:nvPr/>
-        </p:nvSpPr>
-        <p:spPr>
-          <a:xfrm>
-            <a:off x="711202" y="3794760"/>
-            <a:ext cx="2148840" cy="1188720"/>
-          </a:xfrm>
-          <a:prstGeom prst="rect">
-            <a:avLst/>
-          </a:prstGeom>
-          <a:noFill/>
-        </p:spPr>
-        <p:txBody>
-          <a:bodyPr wrap="square" lIns="0" tIns="0" rIns="0" bIns="0" anchor="t">
-            <a:spAutoFit/>
-          </a:bodyPr>
-          <a:lstStyle/>
-          <a:p>
-            <a:pPr algn="ctr">
-              <a:lnSpc>
-                <a:spcPct val="106000"/>
-              </a:lnSpc>
-              <a:spcBef>
-                <a:spcPts val="0"/>
-              </a:spcBef>
-              <a:spcAft>
-                <a:spcPts val="0"/>
-              </a:spcAft>
-            </a:pPr>
-            <a:r>
-              <a:rPr sz="1200" b="0">
+              <a:rPr sz="1150" b="0">
                 <a:solidFill>
                   <a:srgbClr val="222B36"/>
                 </a:solidFill>
                 <a:latin typeface="Calibri"/>
               </a:rPr>
-              <a:t>Ce que coûte 1 kWh que je produis. À comparer aux ~20 c du réseau.</a:t>
-            </a:r>
-          </a:p>
-        </p:txBody>
-      </p:sp>
-      <p:sp>
-        <p:nvSpPr>
-          <p:cNvPr id="7" name="Rounded Rectangle 6"/>
+              <a:t>Durée de vie analysée</a:t>
+            </a:r>
+          </a:p>
+        </p:txBody>
+      </p:sp>
+      <p:sp>
+        <p:nvSpPr>
+          <p:cNvPr id="12" name="Rectangle 11"/>
           <p:cNvSpPr/>
           <p:nvPr/>
         </p:nvSpPr>
         <p:spPr>
           <a:xfrm>
-            <a:off x="3362962" y="2194559"/>
-            <a:ext cx="2606040" cy="2926080"/>
-          </a:xfrm>
-          <a:prstGeom prst="roundRect">
+            <a:off x="4572000" y="2606040"/>
+            <a:ext cx="2377440" cy="475488"/>
+          </a:xfrm>
+          <a:prstGeom prst="rect">
             <a:avLst/>
           </a:prstGeom>
           <a:solidFill>
@@ -11667,13 +13258,7 @@
           <a:ln>
             <a:noFill/>
           </a:ln>
-          <a:effectLst>
-            <a:outerShdw blurRad="60000" dist="20000" dir="5400000" rotWithShape="0">
-              <a:srgbClr val="12293D">
-                <a:alpha val="14000"/>
-              </a:srgbClr>
-            </a:outerShdw>
-          </a:effectLst>
+          <a:effectLst/>
         </p:spPr>
         <p:style>
           <a:lnRef idx="1">
@@ -11694,20 +13279,19 @@
           <a:lstStyle/>
           <a:p>
             <a:pPr algn="ctr"/>
-            <a:endParaRPr/>
-          </a:p>
-        </p:txBody>
-      </p:sp>
-      <p:sp>
-        <p:nvSpPr>
-          <p:cNvPr id="8" name="TextBox 7"/>
+          </a:p>
+        </p:txBody>
+      </p:sp>
+      <p:sp>
+        <p:nvSpPr>
+          <p:cNvPr id="13" name="TextBox 12"/>
           <p:cNvSpPr txBox="1"/>
           <p:nvPr/>
         </p:nvSpPr>
         <p:spPr>
           <a:xfrm>
-            <a:off x="3362962" y="2514600"/>
-            <a:ext cx="2606040" cy="640080"/>
+            <a:off x="4709160" y="2606040"/>
+            <a:ext cx="2103120" cy="475488"/>
           </a:xfrm>
           <a:prstGeom prst="rect">
             <a:avLst/>
@@ -11715,130 +13299,40 @@
           <a:noFill/>
         </p:spPr>
         <p:txBody>
-          <a:bodyPr wrap="square" lIns="0" tIns="0" rIns="0" bIns="0" anchor="t">
+          <a:bodyPr wrap="square" anchor="ctr" lIns="0" rIns="0" tIns="0" bIns="0">
             <a:spAutoFit/>
           </a:bodyPr>
           <a:lstStyle/>
           <a:p>
-            <a:pPr algn="ctr">
-              <a:spcBef>
-                <a:spcPts val="0"/>
-              </a:spcBef>
+            <a:pPr algn="l">
               <a:spcAft>
                 <a:spcPts val="0"/>
               </a:spcAft>
             </a:pPr>
             <a:r>
-              <a:rPr sz="2200" b="1">
+              <a:rPr sz="1150" b="1">
                 <a:solidFill>
                   <a:srgbClr val="0E7C7B"/>
                 </a:solidFill>
-                <a:latin typeface="Cambria"/>
-              </a:rPr>
-              <a:t>Payback</a:t>
-            </a:r>
-          </a:p>
-        </p:txBody>
-      </p:sp>
-      <p:sp>
-        <p:nvSpPr>
-          <p:cNvPr id="9" name="TextBox 8"/>
-          <p:cNvSpPr txBox="1"/>
-          <p:nvPr/>
-        </p:nvSpPr>
-        <p:spPr>
-          <a:xfrm>
-            <a:off x="3362962" y="3246119"/>
-            <a:ext cx="2606040" cy="457200"/>
-          </a:xfrm>
-          <a:prstGeom prst="rect">
-            <a:avLst/>
-          </a:prstGeom>
-          <a:noFill/>
-        </p:spPr>
-        <p:txBody>
-          <a:bodyPr wrap="square" lIns="0" tIns="0" rIns="0" bIns="0" anchor="t">
-            <a:spAutoFit/>
-          </a:bodyPr>
-          <a:lstStyle/>
-          <a:p>
-            <a:pPr algn="ctr">
-              <a:spcBef>
-                <a:spcPts val="0"/>
-              </a:spcBef>
-              <a:spcAft>
-                <a:spcPts val="0"/>
-              </a:spcAft>
-            </a:pPr>
-            <a:r>
-              <a:rPr sz="1400" b="1">
-                <a:solidFill>
-                  <a:srgbClr val="12293D"/>
-                </a:solidFill>
-                <a:latin typeface="Cambria"/>
-              </a:rPr>
-              <a:t>Temps de retour</a:t>
-            </a:r>
-          </a:p>
-        </p:txBody>
-      </p:sp>
-      <p:sp>
-        <p:nvSpPr>
-          <p:cNvPr id="10" name="TextBox 9"/>
-          <p:cNvSpPr txBox="1"/>
-          <p:nvPr/>
-        </p:nvSpPr>
-        <p:spPr>
-          <a:xfrm>
-            <a:off x="3591562" y="3794760"/>
-            <a:ext cx="2148840" cy="1188720"/>
-          </a:xfrm>
-          <a:prstGeom prst="rect">
-            <a:avLst/>
-          </a:prstGeom>
-          <a:noFill/>
-        </p:spPr>
-        <p:txBody>
-          <a:bodyPr wrap="square" lIns="0" tIns="0" rIns="0" bIns="0" anchor="t">
-            <a:spAutoFit/>
-          </a:bodyPr>
-          <a:lstStyle/>
-          <a:p>
-            <a:pPr algn="ctr">
-              <a:lnSpc>
-                <a:spcPct val="106000"/>
-              </a:lnSpc>
-              <a:spcBef>
-                <a:spcPts val="0"/>
-              </a:spcBef>
-              <a:spcAft>
-                <a:spcPts val="0"/>
-              </a:spcAft>
-            </a:pPr>
-            <a:r>
-              <a:rPr sz="1200" b="0">
-                <a:solidFill>
-                  <a:srgbClr val="222B36"/>
-                </a:solidFill>
-                <a:latin typeface="Calibri"/>
-              </a:rPr>
-              <a:t>Le nombre d'années pour rembourser l'installation.</a:t>
-            </a:r>
-          </a:p>
-        </p:txBody>
-      </p:sp>
-      <p:sp>
-        <p:nvSpPr>
-          <p:cNvPr id="11" name="Rounded Rectangle 10"/>
+                <a:latin typeface="Calibri"/>
+              </a:rPr>
+              <a:t>25 ans</a:t>
+            </a:r>
+          </a:p>
+        </p:txBody>
+      </p:sp>
+      <p:sp>
+        <p:nvSpPr>
+          <p:cNvPr id="14" name="Rectangle 13"/>
           <p:cNvSpPr/>
           <p:nvPr/>
         </p:nvSpPr>
         <p:spPr>
           <a:xfrm>
-            <a:off x="6243322" y="2194559"/>
-            <a:ext cx="2606040" cy="2926080"/>
-          </a:xfrm>
-          <a:prstGeom prst="roundRect">
+            <a:off x="6949440" y="2606040"/>
+            <a:ext cx="4389120" cy="475488"/>
+          </a:xfrm>
+          <a:prstGeom prst="rect">
             <a:avLst/>
           </a:prstGeom>
           <a:solidFill>
@@ -11847,13 +13341,7 @@
           <a:ln>
             <a:noFill/>
           </a:ln>
-          <a:effectLst>
-            <a:outerShdw blurRad="60000" dist="20000" dir="5400000" rotWithShape="0">
-              <a:srgbClr val="12293D">
-                <a:alpha val="14000"/>
-              </a:srgbClr>
-            </a:outerShdw>
-          </a:effectLst>
+          <a:effectLst/>
         </p:spPr>
         <p:style>
           <a:lnRef idx="1">
@@ -11874,20 +13362,19 @@
           <a:lstStyle/>
           <a:p>
             <a:pPr algn="ctr"/>
-            <a:endParaRPr/>
-          </a:p>
-        </p:txBody>
-      </p:sp>
-      <p:sp>
-        <p:nvSpPr>
-          <p:cNvPr id="12" name="TextBox 11"/>
+          </a:p>
+        </p:txBody>
+      </p:sp>
+      <p:sp>
+        <p:nvSpPr>
+          <p:cNvPr id="15" name="TextBox 14"/>
           <p:cNvSpPr txBox="1"/>
           <p:nvPr/>
         </p:nvSpPr>
         <p:spPr>
           <a:xfrm>
-            <a:off x="6243322" y="2514600"/>
-            <a:ext cx="2606040" cy="640080"/>
+            <a:off x="7086600" y="2606040"/>
+            <a:ext cx="4114800" cy="475488"/>
           </a:xfrm>
           <a:prstGeom prst="rect">
             <a:avLst/>
@@ -11895,41 +13382,82 @@
           <a:noFill/>
         </p:spPr>
         <p:txBody>
-          <a:bodyPr wrap="square" lIns="0" tIns="0" rIns="0" bIns="0" anchor="t">
+          <a:bodyPr wrap="square" anchor="ctr" lIns="0" rIns="0" tIns="0" bIns="0">
             <a:spAutoFit/>
           </a:bodyPr>
           <a:lstStyle/>
           <a:p>
-            <a:pPr algn="ctr">
-              <a:spcBef>
-                <a:spcPts val="0"/>
-              </a:spcBef>
+            <a:pPr algn="l">
               <a:spcAft>
                 <a:spcPts val="0"/>
               </a:spcAft>
             </a:pPr>
             <a:r>
-              <a:rPr sz="2200" b="1">
-                <a:solidFill>
-                  <a:srgbClr val="0E7C7B"/>
-                </a:solidFill>
-                <a:latin typeface="Cambria"/>
-              </a:rPr>
-              <a:t>TRI</a:t>
-            </a:r>
-          </a:p>
-        </p:txBody>
-      </p:sp>
-      <p:sp>
-        <p:nvSpPr>
-          <p:cNvPr id="13" name="TextBox 12"/>
+              <a:rPr sz="1150" b="0">
+                <a:solidFill>
+                  <a:srgbClr val="222B36"/>
+                </a:solidFill>
+                <a:latin typeface="Calibri"/>
+              </a:rPr>
+              <a:t>Durée de vie standard des panneaux</a:t>
+            </a:r>
+          </a:p>
+        </p:txBody>
+      </p:sp>
+      <p:sp>
+        <p:nvSpPr>
+          <p:cNvPr id="16" name="Rectangle 15"/>
+          <p:cNvSpPr/>
+          <p:nvPr/>
+        </p:nvSpPr>
+        <p:spPr>
+          <a:xfrm>
+            <a:off x="914400" y="3081528"/>
+            <a:ext cx="3657600" cy="475488"/>
+          </a:xfrm>
+          <a:prstGeom prst="rect">
+            <a:avLst/>
+          </a:prstGeom>
+          <a:solidFill>
+            <a:srgbClr val="FFFFFF"/>
+          </a:solidFill>
+          <a:ln>
+            <a:noFill/>
+          </a:ln>
+          <a:effectLst/>
+        </p:spPr>
+        <p:style>
+          <a:lnRef idx="1">
+            <a:schemeClr val="accent1"/>
+          </a:lnRef>
+          <a:fillRef idx="3">
+            <a:schemeClr val="accent1"/>
+          </a:fillRef>
+          <a:effectRef idx="2">
+            <a:schemeClr val="accent1"/>
+          </a:effectRef>
+          <a:fontRef idx="minor">
+            <a:schemeClr val="lt1"/>
+          </a:fontRef>
+        </p:style>
+        <p:txBody>
+          <a:bodyPr rtlCol="0" anchor="ctr"/>
+          <a:lstStyle/>
+          <a:p>
+            <a:pPr algn="ctr"/>
+          </a:p>
+        </p:txBody>
+      </p:sp>
+      <p:sp>
+        <p:nvSpPr>
+          <p:cNvPr id="17" name="TextBox 16"/>
           <p:cNvSpPr txBox="1"/>
           <p:nvPr/>
         </p:nvSpPr>
         <p:spPr>
           <a:xfrm>
-            <a:off x="6243322" y="3246119"/>
-            <a:ext cx="2606040" cy="457200"/>
+            <a:off x="1051560" y="3081528"/>
+            <a:ext cx="3383280" cy="475488"/>
           </a:xfrm>
           <a:prstGeom prst="rect">
             <a:avLst/>
@@ -11937,41 +13465,82 @@
           <a:noFill/>
         </p:spPr>
         <p:txBody>
-          <a:bodyPr wrap="square" lIns="0" tIns="0" rIns="0" bIns="0" anchor="t">
+          <a:bodyPr wrap="square" anchor="ctr" lIns="0" rIns="0" tIns="0" bIns="0">
             <a:spAutoFit/>
           </a:bodyPr>
           <a:lstStyle/>
           <a:p>
-            <a:pPr algn="ctr">
-              <a:spcBef>
-                <a:spcPts val="0"/>
-              </a:spcBef>
+            <a:pPr algn="l">
               <a:spcAft>
                 <a:spcPts val="0"/>
               </a:spcAft>
             </a:pPr>
             <a:r>
-              <a:rPr sz="1400" b="1">
-                <a:solidFill>
-                  <a:srgbClr val="12293D"/>
-                </a:solidFill>
-                <a:latin typeface="Cambria"/>
-              </a:rPr>
-              <a:t>Rendement</a:t>
-            </a:r>
-          </a:p>
-        </p:txBody>
-      </p:sp>
-      <p:sp>
-        <p:nvSpPr>
-          <p:cNvPr id="14" name="TextBox 13"/>
+              <a:rPr sz="1150" b="0">
+                <a:solidFill>
+                  <a:srgbClr val="222B36"/>
+                </a:solidFill>
+                <a:latin typeface="Calibri"/>
+              </a:rPr>
+              <a:t>Prix de l'électricité réseau</a:t>
+            </a:r>
+          </a:p>
+        </p:txBody>
+      </p:sp>
+      <p:sp>
+        <p:nvSpPr>
+          <p:cNvPr id="18" name="Rectangle 17"/>
+          <p:cNvSpPr/>
+          <p:nvPr/>
+        </p:nvSpPr>
+        <p:spPr>
+          <a:xfrm>
+            <a:off x="4572000" y="3081528"/>
+            <a:ext cx="2377440" cy="475488"/>
+          </a:xfrm>
+          <a:prstGeom prst="rect">
+            <a:avLst/>
+          </a:prstGeom>
+          <a:solidFill>
+            <a:srgbClr val="FFFFFF"/>
+          </a:solidFill>
+          <a:ln>
+            <a:noFill/>
+          </a:ln>
+          <a:effectLst/>
+        </p:spPr>
+        <p:style>
+          <a:lnRef idx="1">
+            <a:schemeClr val="accent1"/>
+          </a:lnRef>
+          <a:fillRef idx="3">
+            <a:schemeClr val="accent1"/>
+          </a:fillRef>
+          <a:effectRef idx="2">
+            <a:schemeClr val="accent1"/>
+          </a:effectRef>
+          <a:fontRef idx="minor">
+            <a:schemeClr val="lt1"/>
+          </a:fontRef>
+        </p:style>
+        <p:txBody>
+          <a:bodyPr rtlCol="0" anchor="ctr"/>
+          <a:lstStyle/>
+          <a:p>
+            <a:pPr algn="ctr"/>
+          </a:p>
+        </p:txBody>
+      </p:sp>
+      <p:sp>
+        <p:nvSpPr>
+          <p:cNvPr id="19" name="TextBox 18"/>
           <p:cNvSpPr txBox="1"/>
           <p:nvPr/>
         </p:nvSpPr>
         <p:spPr>
           <a:xfrm>
-            <a:off x="6471922" y="3794760"/>
-            <a:ext cx="2148840" cy="1188720"/>
+            <a:off x="4709160" y="3081528"/>
+            <a:ext cx="2103120" cy="475488"/>
           </a:xfrm>
           <a:prstGeom prst="rect">
             <a:avLst/>
@@ -11979,46 +13548,123 @@
           <a:noFill/>
         </p:spPr>
         <p:txBody>
-          <a:bodyPr wrap="square" lIns="0" tIns="0" rIns="0" bIns="0" anchor="t">
+          <a:bodyPr wrap="square" anchor="ctr" lIns="0" rIns="0" tIns="0" bIns="0">
             <a:spAutoFit/>
           </a:bodyPr>
           <a:lstStyle/>
           <a:p>
-            <a:pPr algn="ctr">
-              <a:lnSpc>
-                <a:spcPct val="106000"/>
-              </a:lnSpc>
-              <a:spcBef>
-                <a:spcPts val="0"/>
-              </a:spcBef>
+            <a:pPr algn="l">
               <a:spcAft>
                 <a:spcPts val="0"/>
               </a:spcAft>
             </a:pPr>
             <a:r>
-              <a:rPr sz="1200" b="0">
+              <a:rPr sz="1150" b="1">
+                <a:solidFill>
+                  <a:srgbClr val="0E7C7B"/>
+                </a:solidFill>
+                <a:latin typeface="Calibri"/>
+              </a:rPr>
+              <a:t>~20 c/kWh</a:t>
+            </a:r>
+          </a:p>
+        </p:txBody>
+      </p:sp>
+      <p:sp>
+        <p:nvSpPr>
+          <p:cNvPr id="20" name="Rectangle 19"/>
+          <p:cNvSpPr/>
+          <p:nvPr/>
+        </p:nvSpPr>
+        <p:spPr>
+          <a:xfrm>
+            <a:off x="6949440" y="3081528"/>
+            <a:ext cx="4389120" cy="475488"/>
+          </a:xfrm>
+          <a:prstGeom prst="rect">
+            <a:avLst/>
+          </a:prstGeom>
+          <a:solidFill>
+            <a:srgbClr val="FFFFFF"/>
+          </a:solidFill>
+          <a:ln>
+            <a:noFill/>
+          </a:ln>
+          <a:effectLst/>
+        </p:spPr>
+        <p:style>
+          <a:lnRef idx="1">
+            <a:schemeClr val="accent1"/>
+          </a:lnRef>
+          <a:fillRef idx="3">
+            <a:schemeClr val="accent1"/>
+          </a:fillRef>
+          <a:effectRef idx="2">
+            <a:schemeClr val="accent1"/>
+          </a:effectRef>
+          <a:fontRef idx="minor">
+            <a:schemeClr val="lt1"/>
+          </a:fontRef>
+        </p:style>
+        <p:txBody>
+          <a:bodyPr rtlCol="0" anchor="ctr"/>
+          <a:lstStyle/>
+          <a:p>
+            <a:pPr algn="ctr"/>
+          </a:p>
+        </p:txBody>
+      </p:sp>
+      <p:sp>
+        <p:nvSpPr>
+          <p:cNvPr id="21" name="TextBox 20"/>
+          <p:cNvSpPr txBox="1"/>
+          <p:nvPr/>
+        </p:nvSpPr>
+        <p:spPr>
+          <a:xfrm>
+            <a:off x="7086600" y="3081528"/>
+            <a:ext cx="4114800" cy="475488"/>
+          </a:xfrm>
+          <a:prstGeom prst="rect">
+            <a:avLst/>
+          </a:prstGeom>
+          <a:noFill/>
+        </p:spPr>
+        <p:txBody>
+          <a:bodyPr wrap="square" anchor="ctr" lIns="0" rIns="0" tIns="0" bIns="0">
+            <a:spAutoFit/>
+          </a:bodyPr>
+          <a:lstStyle/>
+          <a:p>
+            <a:pPr algn="l">
+              <a:spcAft>
+                <a:spcPts val="0"/>
+              </a:spcAft>
+            </a:pPr>
+            <a:r>
+              <a:rPr sz="1150" b="0">
                 <a:solidFill>
                   <a:srgbClr val="222B36"/>
                 </a:solidFill>
                 <a:latin typeface="Calibri"/>
               </a:rPr>
-              <a:t>Ce que ça rapporte par an, en %, comme un placement.</a:t>
-            </a:r>
-          </a:p>
-        </p:txBody>
-      </p:sp>
-      <p:sp>
-        <p:nvSpPr>
-          <p:cNvPr id="15" name="Rounded Rectangle 14"/>
+              <a:t>Prix moyen évité en tertiaire</a:t>
+            </a:r>
+          </a:p>
+        </p:txBody>
+      </p:sp>
+      <p:sp>
+        <p:nvSpPr>
+          <p:cNvPr id="22" name="Rectangle 21"/>
           <p:cNvSpPr/>
           <p:nvPr/>
         </p:nvSpPr>
         <p:spPr>
           <a:xfrm>
-            <a:off x="9123682" y="2194559"/>
-            <a:ext cx="2606040" cy="2926080"/>
-          </a:xfrm>
-          <a:prstGeom prst="roundRect">
+            <a:off x="914400" y="3557016"/>
+            <a:ext cx="3657600" cy="475488"/>
+          </a:xfrm>
+          <a:prstGeom prst="rect">
             <a:avLst/>
           </a:prstGeom>
           <a:solidFill>
@@ -12027,13 +13673,7 @@
           <a:ln>
             <a:noFill/>
           </a:ln>
-          <a:effectLst>
-            <a:outerShdw blurRad="60000" dist="20000" dir="5400000" rotWithShape="0">
-              <a:srgbClr val="12293D">
-                <a:alpha val="14000"/>
-              </a:srgbClr>
-            </a:outerShdw>
-          </a:effectLst>
+          <a:effectLst/>
         </p:spPr>
         <p:style>
           <a:lnRef idx="1">
@@ -12054,20 +13694,19 @@
           <a:lstStyle/>
           <a:p>
             <a:pPr algn="ctr"/>
-            <a:endParaRPr/>
-          </a:p>
-        </p:txBody>
-      </p:sp>
-      <p:sp>
-        <p:nvSpPr>
-          <p:cNvPr id="16" name="TextBox 15"/>
+          </a:p>
+        </p:txBody>
+      </p:sp>
+      <p:sp>
+        <p:nvSpPr>
+          <p:cNvPr id="23" name="TextBox 22"/>
           <p:cNvSpPr txBox="1"/>
           <p:nvPr/>
         </p:nvSpPr>
         <p:spPr>
           <a:xfrm>
-            <a:off x="9123682" y="2514600"/>
-            <a:ext cx="2606040" cy="640080"/>
+            <a:off x="1051560" y="3557016"/>
+            <a:ext cx="3383280" cy="475488"/>
           </a:xfrm>
           <a:prstGeom prst="rect">
             <a:avLst/>
@@ -12075,41 +13714,82 @@
           <a:noFill/>
         </p:spPr>
         <p:txBody>
-          <a:bodyPr wrap="square" lIns="0" tIns="0" rIns="0" bIns="0" anchor="t">
+          <a:bodyPr wrap="square" anchor="ctr" lIns="0" rIns="0" tIns="0" bIns="0">
             <a:spAutoFit/>
           </a:bodyPr>
           <a:lstStyle/>
           <a:p>
-            <a:pPr algn="ctr">
-              <a:spcBef>
-                <a:spcPts val="0"/>
-              </a:spcBef>
+            <a:pPr algn="l">
               <a:spcAft>
                 <a:spcPts val="0"/>
               </a:spcAft>
             </a:pPr>
             <a:r>
-              <a:rPr sz="2200" b="1">
-                <a:solidFill>
-                  <a:srgbClr val="0E7C7B"/>
-                </a:solidFill>
-                <a:latin typeface="Cambria"/>
-              </a:rPr>
-              <a:t>VAN</a:t>
-            </a:r>
-          </a:p>
-        </p:txBody>
-      </p:sp>
-      <p:sp>
-        <p:nvSpPr>
-          <p:cNvPr id="17" name="TextBox 16"/>
+              <a:rPr sz="1150" b="0">
+                <a:solidFill>
+                  <a:srgbClr val="222B36"/>
+                </a:solidFill>
+                <a:latin typeface="Calibri"/>
+              </a:rPr>
+              <a:t>Tarif de revente</a:t>
+            </a:r>
+          </a:p>
+        </p:txBody>
+      </p:sp>
+      <p:sp>
+        <p:nvSpPr>
+          <p:cNvPr id="24" name="Rectangle 23"/>
+          <p:cNvSpPr/>
+          <p:nvPr/>
+        </p:nvSpPr>
+        <p:spPr>
+          <a:xfrm>
+            <a:off x="4572000" y="3557016"/>
+            <a:ext cx="2377440" cy="475488"/>
+          </a:xfrm>
+          <a:prstGeom prst="rect">
+            <a:avLst/>
+          </a:prstGeom>
+          <a:solidFill>
+            <a:srgbClr val="F5F8F7"/>
+          </a:solidFill>
+          <a:ln>
+            <a:noFill/>
+          </a:ln>
+          <a:effectLst/>
+        </p:spPr>
+        <p:style>
+          <a:lnRef idx="1">
+            <a:schemeClr val="accent1"/>
+          </a:lnRef>
+          <a:fillRef idx="3">
+            <a:schemeClr val="accent1"/>
+          </a:fillRef>
+          <a:effectRef idx="2">
+            <a:schemeClr val="accent1"/>
+          </a:effectRef>
+          <a:fontRef idx="minor">
+            <a:schemeClr val="lt1"/>
+          </a:fontRef>
+        </p:style>
+        <p:txBody>
+          <a:bodyPr rtlCol="0" anchor="ctr"/>
+          <a:lstStyle/>
+          <a:p>
+            <a:pPr algn="ctr"/>
+          </a:p>
+        </p:txBody>
+      </p:sp>
+      <p:sp>
+        <p:nvSpPr>
+          <p:cNvPr id="25" name="TextBox 24"/>
           <p:cNvSpPr txBox="1"/>
           <p:nvPr/>
         </p:nvSpPr>
         <p:spPr>
           <a:xfrm>
-            <a:off x="9123682" y="3246119"/>
-            <a:ext cx="2606040" cy="457200"/>
+            <a:off x="4709160" y="3557016"/>
+            <a:ext cx="2103120" cy="475488"/>
           </a:xfrm>
           <a:prstGeom prst="rect">
             <a:avLst/>
@@ -12117,41 +13797,82 @@
           <a:noFill/>
         </p:spPr>
         <p:txBody>
-          <a:bodyPr wrap="square" lIns="0" tIns="0" rIns="0" bIns="0" anchor="t">
+          <a:bodyPr wrap="square" anchor="ctr" lIns="0" rIns="0" tIns="0" bIns="0">
             <a:spAutoFit/>
           </a:bodyPr>
           <a:lstStyle/>
           <a:p>
-            <a:pPr algn="ctr">
-              <a:spcBef>
-                <a:spcPts val="0"/>
-              </a:spcBef>
+            <a:pPr algn="l">
               <a:spcAft>
                 <a:spcPts val="0"/>
               </a:spcAft>
             </a:pPr>
             <a:r>
-              <a:rPr sz="1400" b="1">
-                <a:solidFill>
-                  <a:srgbClr val="12293D"/>
-                </a:solidFill>
-                <a:latin typeface="Cambria"/>
-              </a:rPr>
-              <a:t>Gain total</a:t>
-            </a:r>
-          </a:p>
-        </p:txBody>
-      </p:sp>
-      <p:sp>
-        <p:nvSpPr>
-          <p:cNvPr id="18" name="TextBox 17"/>
+              <a:rPr sz="1150" b="1">
+                <a:solidFill>
+                  <a:srgbClr val="0E7C7B"/>
+                </a:solidFill>
+                <a:latin typeface="Calibri"/>
+              </a:rPr>
+              <a:t>8–13 c/kWh</a:t>
+            </a:r>
+          </a:p>
+        </p:txBody>
+      </p:sp>
+      <p:sp>
+        <p:nvSpPr>
+          <p:cNvPr id="26" name="Rectangle 25"/>
+          <p:cNvSpPr/>
+          <p:nvPr/>
+        </p:nvSpPr>
+        <p:spPr>
+          <a:xfrm>
+            <a:off x="6949440" y="3557016"/>
+            <a:ext cx="4389120" cy="475488"/>
+          </a:xfrm>
+          <a:prstGeom prst="rect">
+            <a:avLst/>
+          </a:prstGeom>
+          <a:solidFill>
+            <a:srgbClr val="F5F8F7"/>
+          </a:solidFill>
+          <a:ln>
+            <a:noFill/>
+          </a:ln>
+          <a:effectLst/>
+        </p:spPr>
+        <p:style>
+          <a:lnRef idx="1">
+            <a:schemeClr val="accent1"/>
+          </a:lnRef>
+          <a:fillRef idx="3">
+            <a:schemeClr val="accent1"/>
+          </a:fillRef>
+          <a:effectRef idx="2">
+            <a:schemeClr val="accent1"/>
+          </a:effectRef>
+          <a:fontRef idx="minor">
+            <a:schemeClr val="lt1"/>
+          </a:fontRef>
+        </p:style>
+        <p:txBody>
+          <a:bodyPr rtlCol="0" anchor="ctr"/>
+          <a:lstStyle/>
+          <a:p>
+            <a:pPr algn="ctr"/>
+          </a:p>
+        </p:txBody>
+      </p:sp>
+      <p:sp>
+        <p:nvSpPr>
+          <p:cNvPr id="27" name="TextBox 26"/>
           <p:cNvSpPr txBox="1"/>
           <p:nvPr/>
         </p:nvSpPr>
         <p:spPr>
           <a:xfrm>
-            <a:off x="9352282" y="3794760"/>
-            <a:ext cx="2148840" cy="1188720"/>
+            <a:off x="7086600" y="3557016"/>
+            <a:ext cx="4114800" cy="475488"/>
           </a:xfrm>
           <a:prstGeom prst="rect">
             <a:avLst/>
@@ -12159,102 +13880,1059 @@
           <a:noFill/>
         </p:spPr>
         <p:txBody>
-          <a:bodyPr wrap="square" lIns="0" tIns="0" rIns="0" bIns="0" anchor="t">
+          <a:bodyPr wrap="square" anchor="ctr" lIns="0" rIns="0" tIns="0" bIns="0">
             <a:spAutoFit/>
           </a:bodyPr>
           <a:lstStyle/>
           <a:p>
-            <a:pPr algn="ctr">
-              <a:lnSpc>
-                <a:spcPct val="106000"/>
-              </a:lnSpc>
-              <a:spcBef>
-                <a:spcPts val="0"/>
-              </a:spcBef>
+            <a:pPr algn="l">
               <a:spcAft>
                 <a:spcPts val="0"/>
               </a:spcAft>
             </a:pPr>
             <a:r>
-              <a:rPr sz="1200" b="0" dirty="0">
+              <a:rPr sz="1150" b="0">
                 <a:solidFill>
                   <a:srgbClr val="222B36"/>
                 </a:solidFill>
                 <a:latin typeface="Calibri"/>
               </a:rPr>
-              <a:t>Ce </a:t>
-            </a:r>
-            <a:r>
-              <a:rPr sz="1200" b="0" dirty="0" err="1">
+              <a:t>Arrêté tarifaire S21 (réglementé)</a:t>
+            </a:r>
+          </a:p>
+        </p:txBody>
+      </p:sp>
+      <p:sp>
+        <p:nvSpPr>
+          <p:cNvPr id="28" name="Rectangle 27"/>
+          <p:cNvSpPr/>
+          <p:nvPr/>
+        </p:nvSpPr>
+        <p:spPr>
+          <a:xfrm>
+            <a:off x="914400" y="4032504"/>
+            <a:ext cx="3657600" cy="475488"/>
+          </a:xfrm>
+          <a:prstGeom prst="rect">
+            <a:avLst/>
+          </a:prstGeom>
+          <a:solidFill>
+            <a:srgbClr val="FFFFFF"/>
+          </a:solidFill>
+          <a:ln>
+            <a:noFill/>
+          </a:ln>
+          <a:effectLst/>
+        </p:spPr>
+        <p:style>
+          <a:lnRef idx="1">
+            <a:schemeClr val="accent1"/>
+          </a:lnRef>
+          <a:fillRef idx="3">
+            <a:schemeClr val="accent1"/>
+          </a:fillRef>
+          <a:effectRef idx="2">
+            <a:schemeClr val="accent1"/>
+          </a:effectRef>
+          <a:fontRef idx="minor">
+            <a:schemeClr val="lt1"/>
+          </a:fontRef>
+        </p:style>
+        <p:txBody>
+          <a:bodyPr rtlCol="0" anchor="ctr"/>
+          <a:lstStyle/>
+          <a:p>
+            <a:pPr algn="ctr"/>
+          </a:p>
+        </p:txBody>
+      </p:sp>
+      <p:sp>
+        <p:nvSpPr>
+          <p:cNvPr id="29" name="TextBox 28"/>
+          <p:cNvSpPr txBox="1"/>
+          <p:nvPr/>
+        </p:nvSpPr>
+        <p:spPr>
+          <a:xfrm>
+            <a:off x="1051560" y="4032504"/>
+            <a:ext cx="3383280" cy="475488"/>
+          </a:xfrm>
+          <a:prstGeom prst="rect">
+            <a:avLst/>
+          </a:prstGeom>
+          <a:noFill/>
+        </p:spPr>
+        <p:txBody>
+          <a:bodyPr wrap="square" anchor="ctr" lIns="0" rIns="0" tIns="0" bIns="0">
+            <a:spAutoFit/>
+          </a:bodyPr>
+          <a:lstStyle/>
+          <a:p>
+            <a:pPr algn="l">
+              <a:spcAft>
+                <a:spcPts val="0"/>
+              </a:spcAft>
+            </a:pPr>
+            <a:r>
+              <a:rPr sz="1150" b="0">
                 <a:solidFill>
                   <a:srgbClr val="222B36"/>
                 </a:solidFill>
                 <a:latin typeface="Calibri"/>
               </a:rPr>
-              <a:t>que</a:t>
-            </a:r>
-            <a:r>
-              <a:rPr sz="1200" b="0" dirty="0">
+              <a:t>Coût d'installation (CAPEX)</a:t>
+            </a:r>
+          </a:p>
+        </p:txBody>
+      </p:sp>
+      <p:sp>
+        <p:nvSpPr>
+          <p:cNvPr id="30" name="Rectangle 29"/>
+          <p:cNvSpPr/>
+          <p:nvPr/>
+        </p:nvSpPr>
+        <p:spPr>
+          <a:xfrm>
+            <a:off x="4572000" y="4032504"/>
+            <a:ext cx="2377440" cy="475488"/>
+          </a:xfrm>
+          <a:prstGeom prst="rect">
+            <a:avLst/>
+          </a:prstGeom>
+          <a:solidFill>
+            <a:srgbClr val="FFFFFF"/>
+          </a:solidFill>
+          <a:ln>
+            <a:noFill/>
+          </a:ln>
+          <a:effectLst/>
+        </p:spPr>
+        <p:style>
+          <a:lnRef idx="1">
+            <a:schemeClr val="accent1"/>
+          </a:lnRef>
+          <a:fillRef idx="3">
+            <a:schemeClr val="accent1"/>
+          </a:fillRef>
+          <a:effectRef idx="2">
+            <a:schemeClr val="accent1"/>
+          </a:effectRef>
+          <a:fontRef idx="minor">
+            <a:schemeClr val="lt1"/>
+          </a:fontRef>
+        </p:style>
+        <p:txBody>
+          <a:bodyPr rtlCol="0" anchor="ctr"/>
+          <a:lstStyle/>
+          <a:p>
+            <a:pPr algn="ctr"/>
+          </a:p>
+        </p:txBody>
+      </p:sp>
+      <p:sp>
+        <p:nvSpPr>
+          <p:cNvPr id="31" name="TextBox 30"/>
+          <p:cNvSpPr txBox="1"/>
+          <p:nvPr/>
+        </p:nvSpPr>
+        <p:spPr>
+          <a:xfrm>
+            <a:off x="4709160" y="4032504"/>
+            <a:ext cx="2103120" cy="475488"/>
+          </a:xfrm>
+          <a:prstGeom prst="rect">
+            <a:avLst/>
+          </a:prstGeom>
+          <a:noFill/>
+        </p:spPr>
+        <p:txBody>
+          <a:bodyPr wrap="square" anchor="ctr" lIns="0" rIns="0" tIns="0" bIns="0">
+            <a:spAutoFit/>
+          </a:bodyPr>
+          <a:lstStyle/>
+          <a:p>
+            <a:pPr algn="l">
+              <a:spcAft>
+                <a:spcPts val="0"/>
+              </a:spcAft>
+            </a:pPr>
+            <a:r>
+              <a:rPr sz="1150" b="1">
+                <a:solidFill>
+                  <a:srgbClr val="0E7C7B"/>
+                </a:solidFill>
+                <a:latin typeface="Calibri"/>
+              </a:rPr>
+              <a:t>1100–1850 €/kWc</a:t>
+            </a:r>
+          </a:p>
+        </p:txBody>
+      </p:sp>
+      <p:sp>
+        <p:nvSpPr>
+          <p:cNvPr id="32" name="Rectangle 31"/>
+          <p:cNvSpPr/>
+          <p:nvPr/>
+        </p:nvSpPr>
+        <p:spPr>
+          <a:xfrm>
+            <a:off x="6949440" y="4032504"/>
+            <a:ext cx="4389120" cy="475488"/>
+          </a:xfrm>
+          <a:prstGeom prst="rect">
+            <a:avLst/>
+          </a:prstGeom>
+          <a:solidFill>
+            <a:srgbClr val="FFFFFF"/>
+          </a:solidFill>
+          <a:ln>
+            <a:noFill/>
+          </a:ln>
+          <a:effectLst/>
+        </p:spPr>
+        <p:style>
+          <a:lnRef idx="1">
+            <a:schemeClr val="accent1"/>
+          </a:lnRef>
+          <a:fillRef idx="3">
+            <a:schemeClr val="accent1"/>
+          </a:fillRef>
+          <a:effectRef idx="2">
+            <a:schemeClr val="accent1"/>
+          </a:effectRef>
+          <a:fontRef idx="minor">
+            <a:schemeClr val="lt1"/>
+          </a:fontRef>
+        </p:style>
+        <p:txBody>
+          <a:bodyPr rtlCol="0" anchor="ctr"/>
+          <a:lstStyle/>
+          <a:p>
+            <a:pPr algn="ctr"/>
+          </a:p>
+        </p:txBody>
+      </p:sp>
+      <p:sp>
+        <p:nvSpPr>
+          <p:cNvPr id="33" name="TextBox 32"/>
+          <p:cNvSpPr txBox="1"/>
+          <p:nvPr/>
+        </p:nvSpPr>
+        <p:spPr>
+          <a:xfrm>
+            <a:off x="7086600" y="4032504"/>
+            <a:ext cx="4114800" cy="475488"/>
+          </a:xfrm>
+          <a:prstGeom prst="rect">
+            <a:avLst/>
+          </a:prstGeom>
+          <a:noFill/>
+        </p:spPr>
+        <p:txBody>
+          <a:bodyPr wrap="square" anchor="ctr" lIns="0" rIns="0" tIns="0" bIns="0">
+            <a:spAutoFit/>
+          </a:bodyPr>
+          <a:lstStyle/>
+          <a:p>
+            <a:pPr algn="l">
+              <a:spcAft>
+                <a:spcPts val="0"/>
+              </a:spcAft>
+            </a:pPr>
+            <a:r>
+              <a:rPr sz="1150" b="0">
                 <a:solidFill>
                   <a:srgbClr val="222B36"/>
                 </a:solidFill>
                 <a:latin typeface="Calibri"/>
               </a:rPr>
-              <a:t> je </a:t>
-            </a:r>
-            <a:r>
-              <a:rPr sz="1200" b="0" dirty="0" err="1">
+              <a:t>Fourchettes de marché selon la taille</a:t>
+            </a:r>
+          </a:p>
+        </p:txBody>
+      </p:sp>
+      <p:sp>
+        <p:nvSpPr>
+          <p:cNvPr id="34" name="Rectangle 33"/>
+          <p:cNvSpPr/>
+          <p:nvPr/>
+        </p:nvSpPr>
+        <p:spPr>
+          <a:xfrm>
+            <a:off x="914400" y="4507992"/>
+            <a:ext cx="3657600" cy="475488"/>
+          </a:xfrm>
+          <a:prstGeom prst="rect">
+            <a:avLst/>
+          </a:prstGeom>
+          <a:solidFill>
+            <a:srgbClr val="F5F8F7"/>
+          </a:solidFill>
+          <a:ln>
+            <a:noFill/>
+          </a:ln>
+          <a:effectLst/>
+        </p:spPr>
+        <p:style>
+          <a:lnRef idx="1">
+            <a:schemeClr val="accent1"/>
+          </a:lnRef>
+          <a:fillRef idx="3">
+            <a:schemeClr val="accent1"/>
+          </a:fillRef>
+          <a:effectRef idx="2">
+            <a:schemeClr val="accent1"/>
+          </a:effectRef>
+          <a:fontRef idx="minor">
+            <a:schemeClr val="lt1"/>
+          </a:fontRef>
+        </p:style>
+        <p:txBody>
+          <a:bodyPr rtlCol="0" anchor="ctr"/>
+          <a:lstStyle/>
+          <a:p>
+            <a:pPr algn="ctr"/>
+          </a:p>
+        </p:txBody>
+      </p:sp>
+      <p:sp>
+        <p:nvSpPr>
+          <p:cNvPr id="35" name="TextBox 34"/>
+          <p:cNvSpPr txBox="1"/>
+          <p:nvPr/>
+        </p:nvSpPr>
+        <p:spPr>
+          <a:xfrm>
+            <a:off x="1051560" y="4507992"/>
+            <a:ext cx="3383280" cy="475488"/>
+          </a:xfrm>
+          <a:prstGeom prst="rect">
+            <a:avLst/>
+          </a:prstGeom>
+          <a:noFill/>
+        </p:spPr>
+        <p:txBody>
+          <a:bodyPr wrap="square" anchor="ctr" lIns="0" rIns="0" tIns="0" bIns="0">
+            <a:spAutoFit/>
+          </a:bodyPr>
+          <a:lstStyle/>
+          <a:p>
+            <a:pPr algn="l">
+              <a:spcAft>
+                <a:spcPts val="0"/>
+              </a:spcAft>
+            </a:pPr>
+            <a:r>
+              <a:rPr sz="1150" b="0">
                 <a:solidFill>
                   <a:srgbClr val="222B36"/>
                 </a:solidFill>
                 <a:latin typeface="Calibri"/>
               </a:rPr>
-              <a:t>gagne</a:t>
-            </a:r>
-            <a:r>
-              <a:rPr sz="1200" b="0" dirty="0">
+              <a:t>Entretien (OPEX)</a:t>
+            </a:r>
+          </a:p>
+        </p:txBody>
+      </p:sp>
+      <p:sp>
+        <p:nvSpPr>
+          <p:cNvPr id="36" name="Rectangle 35"/>
+          <p:cNvSpPr/>
+          <p:nvPr/>
+        </p:nvSpPr>
+        <p:spPr>
+          <a:xfrm>
+            <a:off x="4572000" y="4507992"/>
+            <a:ext cx="2377440" cy="475488"/>
+          </a:xfrm>
+          <a:prstGeom prst="rect">
+            <a:avLst/>
+          </a:prstGeom>
+          <a:solidFill>
+            <a:srgbClr val="F5F8F7"/>
+          </a:solidFill>
+          <a:ln>
+            <a:noFill/>
+          </a:ln>
+          <a:effectLst/>
+        </p:spPr>
+        <p:style>
+          <a:lnRef idx="1">
+            <a:schemeClr val="accent1"/>
+          </a:lnRef>
+          <a:fillRef idx="3">
+            <a:schemeClr val="accent1"/>
+          </a:fillRef>
+          <a:effectRef idx="2">
+            <a:schemeClr val="accent1"/>
+          </a:effectRef>
+          <a:fontRef idx="minor">
+            <a:schemeClr val="lt1"/>
+          </a:fontRef>
+        </p:style>
+        <p:txBody>
+          <a:bodyPr rtlCol="0" anchor="ctr"/>
+          <a:lstStyle/>
+          <a:p>
+            <a:pPr algn="ctr"/>
+          </a:p>
+        </p:txBody>
+      </p:sp>
+      <p:sp>
+        <p:nvSpPr>
+          <p:cNvPr id="37" name="TextBox 36"/>
+          <p:cNvSpPr txBox="1"/>
+          <p:nvPr/>
+        </p:nvSpPr>
+        <p:spPr>
+          <a:xfrm>
+            <a:off x="4709160" y="4507992"/>
+            <a:ext cx="2103120" cy="475488"/>
+          </a:xfrm>
+          <a:prstGeom prst="rect">
+            <a:avLst/>
+          </a:prstGeom>
+          <a:noFill/>
+        </p:spPr>
+        <p:txBody>
+          <a:bodyPr wrap="square" anchor="ctr" lIns="0" rIns="0" tIns="0" bIns="0">
+            <a:spAutoFit/>
+          </a:bodyPr>
+          <a:lstStyle/>
+          <a:p>
+            <a:pPr algn="l">
+              <a:spcAft>
+                <a:spcPts val="0"/>
+              </a:spcAft>
+            </a:pPr>
+            <a:r>
+              <a:rPr sz="1150" b="1">
+                <a:solidFill>
+                  <a:srgbClr val="0E7C7B"/>
+                </a:solidFill>
+                <a:latin typeface="Calibri"/>
+              </a:rPr>
+              <a:t>1,5 %/an</a:t>
+            </a:r>
+          </a:p>
+        </p:txBody>
+      </p:sp>
+      <p:sp>
+        <p:nvSpPr>
+          <p:cNvPr id="38" name="Rectangle 37"/>
+          <p:cNvSpPr/>
+          <p:nvPr/>
+        </p:nvSpPr>
+        <p:spPr>
+          <a:xfrm>
+            <a:off x="6949440" y="4507992"/>
+            <a:ext cx="4389120" cy="475488"/>
+          </a:xfrm>
+          <a:prstGeom prst="rect">
+            <a:avLst/>
+          </a:prstGeom>
+          <a:solidFill>
+            <a:srgbClr val="F5F8F7"/>
+          </a:solidFill>
+          <a:ln>
+            <a:noFill/>
+          </a:ln>
+          <a:effectLst/>
+        </p:spPr>
+        <p:style>
+          <a:lnRef idx="1">
+            <a:schemeClr val="accent1"/>
+          </a:lnRef>
+          <a:fillRef idx="3">
+            <a:schemeClr val="accent1"/>
+          </a:fillRef>
+          <a:effectRef idx="2">
+            <a:schemeClr val="accent1"/>
+          </a:effectRef>
+          <a:fontRef idx="minor">
+            <a:schemeClr val="lt1"/>
+          </a:fontRef>
+        </p:style>
+        <p:txBody>
+          <a:bodyPr rtlCol="0" anchor="ctr"/>
+          <a:lstStyle/>
+          <a:p>
+            <a:pPr algn="ctr"/>
+          </a:p>
+        </p:txBody>
+      </p:sp>
+      <p:sp>
+        <p:nvSpPr>
+          <p:cNvPr id="39" name="TextBox 38"/>
+          <p:cNvSpPr txBox="1"/>
+          <p:nvPr/>
+        </p:nvSpPr>
+        <p:spPr>
+          <a:xfrm>
+            <a:off x="7086600" y="4507992"/>
+            <a:ext cx="4114800" cy="475488"/>
+          </a:xfrm>
+          <a:prstGeom prst="rect">
+            <a:avLst/>
+          </a:prstGeom>
+          <a:noFill/>
+        </p:spPr>
+        <p:txBody>
+          <a:bodyPr wrap="square" anchor="ctr" lIns="0" rIns="0" tIns="0" bIns="0">
+            <a:spAutoFit/>
+          </a:bodyPr>
+          <a:lstStyle/>
+          <a:p>
+            <a:pPr algn="l">
+              <a:spcAft>
+                <a:spcPts val="0"/>
+              </a:spcAft>
+            </a:pPr>
+            <a:r>
+              <a:rPr sz="1150" b="0">
                 <a:solidFill>
                   <a:srgbClr val="222B36"/>
                 </a:solidFill>
                 <a:latin typeface="Calibri"/>
               </a:rPr>
-              <a:t> au final, </a:t>
-            </a:r>
-            <a:r>
-              <a:rPr sz="1200" b="0" dirty="0" err="1">
+              <a:t>Maintenance courante d'une installation PV</a:t>
+            </a:r>
+          </a:p>
+        </p:txBody>
+      </p:sp>
+      <p:sp>
+        <p:nvSpPr>
+          <p:cNvPr id="40" name="Rectangle 39"/>
+          <p:cNvSpPr/>
+          <p:nvPr/>
+        </p:nvSpPr>
+        <p:spPr>
+          <a:xfrm>
+            <a:off x="914400" y="4983480"/>
+            <a:ext cx="3657600" cy="475488"/>
+          </a:xfrm>
+          <a:prstGeom prst="rect">
+            <a:avLst/>
+          </a:prstGeom>
+          <a:solidFill>
+            <a:srgbClr val="FFFFFF"/>
+          </a:solidFill>
+          <a:ln>
+            <a:noFill/>
+          </a:ln>
+          <a:effectLst/>
+        </p:spPr>
+        <p:style>
+          <a:lnRef idx="1">
+            <a:schemeClr val="accent1"/>
+          </a:lnRef>
+          <a:fillRef idx="3">
+            <a:schemeClr val="accent1"/>
+          </a:fillRef>
+          <a:effectRef idx="2">
+            <a:schemeClr val="accent1"/>
+          </a:effectRef>
+          <a:fontRef idx="minor">
+            <a:schemeClr val="lt1"/>
+          </a:fontRef>
+        </p:style>
+        <p:txBody>
+          <a:bodyPr rtlCol="0" anchor="ctr"/>
+          <a:lstStyle/>
+          <a:p>
+            <a:pPr algn="ctr"/>
+          </a:p>
+        </p:txBody>
+      </p:sp>
+      <p:sp>
+        <p:nvSpPr>
+          <p:cNvPr id="41" name="TextBox 40"/>
+          <p:cNvSpPr txBox="1"/>
+          <p:nvPr/>
+        </p:nvSpPr>
+        <p:spPr>
+          <a:xfrm>
+            <a:off x="1051560" y="4983480"/>
+            <a:ext cx="3383280" cy="475488"/>
+          </a:xfrm>
+          <a:prstGeom prst="rect">
+            <a:avLst/>
+          </a:prstGeom>
+          <a:noFill/>
+        </p:spPr>
+        <p:txBody>
+          <a:bodyPr wrap="square" anchor="ctr" lIns="0" rIns="0" tIns="0" bIns="0">
+            <a:spAutoFit/>
+          </a:bodyPr>
+          <a:lstStyle/>
+          <a:p>
+            <a:pPr algn="l">
+              <a:spcAft>
+                <a:spcPts val="0"/>
+              </a:spcAft>
+            </a:pPr>
+            <a:r>
+              <a:rPr sz="1150" b="0">
                 <a:solidFill>
                   <a:srgbClr val="222B36"/>
                 </a:solidFill>
                 <a:latin typeface="Calibri"/>
               </a:rPr>
-              <a:t>en</a:t>
-            </a:r>
-            <a:r>
-              <a:rPr sz="1200" b="0" dirty="0">
+              <a:t>Taux d'autoconsommation</a:t>
+            </a:r>
+          </a:p>
+        </p:txBody>
+      </p:sp>
+      <p:sp>
+        <p:nvSpPr>
+          <p:cNvPr id="42" name="Rectangle 41"/>
+          <p:cNvSpPr/>
+          <p:nvPr/>
+        </p:nvSpPr>
+        <p:spPr>
+          <a:xfrm>
+            <a:off x="4572000" y="4983480"/>
+            <a:ext cx="2377440" cy="475488"/>
+          </a:xfrm>
+          <a:prstGeom prst="rect">
+            <a:avLst/>
+          </a:prstGeom>
+          <a:solidFill>
+            <a:srgbClr val="FFFFFF"/>
+          </a:solidFill>
+          <a:ln>
+            <a:noFill/>
+          </a:ln>
+          <a:effectLst/>
+        </p:spPr>
+        <p:style>
+          <a:lnRef idx="1">
+            <a:schemeClr val="accent1"/>
+          </a:lnRef>
+          <a:fillRef idx="3">
+            <a:schemeClr val="accent1"/>
+          </a:fillRef>
+          <a:effectRef idx="2">
+            <a:schemeClr val="accent1"/>
+          </a:effectRef>
+          <a:fontRef idx="minor">
+            <a:schemeClr val="lt1"/>
+          </a:fontRef>
+        </p:style>
+        <p:txBody>
+          <a:bodyPr rtlCol="0" anchor="ctr"/>
+          <a:lstStyle/>
+          <a:p>
+            <a:pPr algn="ctr"/>
+          </a:p>
+        </p:txBody>
+      </p:sp>
+      <p:sp>
+        <p:nvSpPr>
+          <p:cNvPr id="43" name="TextBox 42"/>
+          <p:cNvSpPr txBox="1"/>
+          <p:nvPr/>
+        </p:nvSpPr>
+        <p:spPr>
+          <a:xfrm>
+            <a:off x="4709160" y="4983480"/>
+            <a:ext cx="2103120" cy="475488"/>
+          </a:xfrm>
+          <a:prstGeom prst="rect">
+            <a:avLst/>
+          </a:prstGeom>
+          <a:noFill/>
+        </p:spPr>
+        <p:txBody>
+          <a:bodyPr wrap="square" anchor="ctr" lIns="0" rIns="0" tIns="0" bIns="0">
+            <a:spAutoFit/>
+          </a:bodyPr>
+          <a:lstStyle/>
+          <a:p>
+            <a:pPr algn="l">
+              <a:spcAft>
+                <a:spcPts val="0"/>
+              </a:spcAft>
+            </a:pPr>
+            <a:r>
+              <a:rPr sz="1150" b="1">
+                <a:solidFill>
+                  <a:srgbClr val="0E7C7B"/>
+                </a:solidFill>
+                <a:latin typeface="Calibri"/>
+              </a:rPr>
+              <a:t>65 %</a:t>
+            </a:r>
+          </a:p>
+        </p:txBody>
+      </p:sp>
+      <p:sp>
+        <p:nvSpPr>
+          <p:cNvPr id="44" name="Rectangle 43"/>
+          <p:cNvSpPr/>
+          <p:nvPr/>
+        </p:nvSpPr>
+        <p:spPr>
+          <a:xfrm>
+            <a:off x="6949440" y="4983480"/>
+            <a:ext cx="4389120" cy="475488"/>
+          </a:xfrm>
+          <a:prstGeom prst="rect">
+            <a:avLst/>
+          </a:prstGeom>
+          <a:solidFill>
+            <a:srgbClr val="FFFFFF"/>
+          </a:solidFill>
+          <a:ln>
+            <a:noFill/>
+          </a:ln>
+          <a:effectLst/>
+        </p:spPr>
+        <p:style>
+          <a:lnRef idx="1">
+            <a:schemeClr val="accent1"/>
+          </a:lnRef>
+          <a:fillRef idx="3">
+            <a:schemeClr val="accent1"/>
+          </a:fillRef>
+          <a:effectRef idx="2">
+            <a:schemeClr val="accent1"/>
+          </a:effectRef>
+          <a:fontRef idx="minor">
+            <a:schemeClr val="lt1"/>
+          </a:fontRef>
+        </p:style>
+        <p:txBody>
+          <a:bodyPr rtlCol="0" anchor="ctr"/>
+          <a:lstStyle/>
+          <a:p>
+            <a:pPr algn="ctr"/>
+          </a:p>
+        </p:txBody>
+      </p:sp>
+      <p:sp>
+        <p:nvSpPr>
+          <p:cNvPr id="45" name="TextBox 44"/>
+          <p:cNvSpPr txBox="1"/>
+          <p:nvPr/>
+        </p:nvSpPr>
+        <p:spPr>
+          <a:xfrm>
+            <a:off x="7086600" y="4983480"/>
+            <a:ext cx="4114800" cy="475488"/>
+          </a:xfrm>
+          <a:prstGeom prst="rect">
+            <a:avLst/>
+          </a:prstGeom>
+          <a:noFill/>
+        </p:spPr>
+        <p:txBody>
+          <a:bodyPr wrap="square" anchor="ctr" lIns="0" rIns="0" tIns="0" bIns="0">
+            <a:spAutoFit/>
+          </a:bodyPr>
+          <a:lstStyle/>
+          <a:p>
+            <a:pPr algn="l">
+              <a:spcAft>
+                <a:spcPts val="0"/>
+              </a:spcAft>
+            </a:pPr>
+            <a:r>
+              <a:rPr sz="1150" b="0">
                 <a:solidFill>
                   <a:srgbClr val="222B36"/>
                 </a:solidFill>
                 <a:latin typeface="Calibri"/>
               </a:rPr>
-              <a:t> euros </a:t>
-            </a:r>
-            <a:r>
-              <a:rPr sz="1200" b="0" dirty="0" err="1">
+              <a:t>Usage réaliste pour du tertiaire</a:t>
+            </a:r>
+          </a:p>
+        </p:txBody>
+      </p:sp>
+      <p:sp>
+        <p:nvSpPr>
+          <p:cNvPr id="46" name="Rectangle 45"/>
+          <p:cNvSpPr/>
+          <p:nvPr/>
+        </p:nvSpPr>
+        <p:spPr>
+          <a:xfrm>
+            <a:off x="914400" y="5458968"/>
+            <a:ext cx="3657600" cy="475488"/>
+          </a:xfrm>
+          <a:prstGeom prst="rect">
+            <a:avLst/>
+          </a:prstGeom>
+          <a:solidFill>
+            <a:srgbClr val="F5F8F7"/>
+          </a:solidFill>
+          <a:ln>
+            <a:noFill/>
+          </a:ln>
+          <a:effectLst/>
+        </p:spPr>
+        <p:style>
+          <a:lnRef idx="1">
+            <a:schemeClr val="accent1"/>
+          </a:lnRef>
+          <a:fillRef idx="3">
+            <a:schemeClr val="accent1"/>
+          </a:fillRef>
+          <a:effectRef idx="2">
+            <a:schemeClr val="accent1"/>
+          </a:effectRef>
+          <a:fontRef idx="minor">
+            <a:schemeClr val="lt1"/>
+          </a:fontRef>
+        </p:style>
+        <p:txBody>
+          <a:bodyPr rtlCol="0" anchor="ctr"/>
+          <a:lstStyle/>
+          <a:p>
+            <a:pPr algn="ctr"/>
+          </a:p>
+        </p:txBody>
+      </p:sp>
+      <p:sp>
+        <p:nvSpPr>
+          <p:cNvPr id="47" name="TextBox 46"/>
+          <p:cNvSpPr txBox="1"/>
+          <p:nvPr/>
+        </p:nvSpPr>
+        <p:spPr>
+          <a:xfrm>
+            <a:off x="1051560" y="5458968"/>
+            <a:ext cx="3383280" cy="475488"/>
+          </a:xfrm>
+          <a:prstGeom prst="rect">
+            <a:avLst/>
+          </a:prstGeom>
+          <a:noFill/>
+        </p:spPr>
+        <p:txBody>
+          <a:bodyPr wrap="square" anchor="ctr" lIns="0" rIns="0" tIns="0" bIns="0">
+            <a:spAutoFit/>
+          </a:bodyPr>
+          <a:lstStyle/>
+          <a:p>
+            <a:pPr algn="l">
+              <a:spcAft>
+                <a:spcPts val="0"/>
+              </a:spcAft>
+            </a:pPr>
+            <a:r>
+              <a:rPr sz="1150" b="0">
                 <a:solidFill>
                   <a:srgbClr val="222B36"/>
                 </a:solidFill>
                 <a:latin typeface="Calibri"/>
               </a:rPr>
-              <a:t>d'aujourd'hui</a:t>
-            </a:r>
-            <a:r>
-              <a:rPr sz="1200" b="0" dirty="0">
+              <a:t>Taux d'actualisation</a:t>
+            </a:r>
+          </a:p>
+        </p:txBody>
+      </p:sp>
+      <p:sp>
+        <p:nvSpPr>
+          <p:cNvPr id="48" name="Rectangle 47"/>
+          <p:cNvSpPr/>
+          <p:nvPr/>
+        </p:nvSpPr>
+        <p:spPr>
+          <a:xfrm>
+            <a:off x="4572000" y="5458968"/>
+            <a:ext cx="2377440" cy="475488"/>
+          </a:xfrm>
+          <a:prstGeom prst="rect">
+            <a:avLst/>
+          </a:prstGeom>
+          <a:solidFill>
+            <a:srgbClr val="F5F8F7"/>
+          </a:solidFill>
+          <a:ln>
+            <a:noFill/>
+          </a:ln>
+          <a:effectLst/>
+        </p:spPr>
+        <p:style>
+          <a:lnRef idx="1">
+            <a:schemeClr val="accent1"/>
+          </a:lnRef>
+          <a:fillRef idx="3">
+            <a:schemeClr val="accent1"/>
+          </a:fillRef>
+          <a:effectRef idx="2">
+            <a:schemeClr val="accent1"/>
+          </a:effectRef>
+          <a:fontRef idx="minor">
+            <a:schemeClr val="lt1"/>
+          </a:fontRef>
+        </p:style>
+        <p:txBody>
+          <a:bodyPr rtlCol="0" anchor="ctr"/>
+          <a:lstStyle/>
+          <a:p>
+            <a:pPr algn="ctr"/>
+          </a:p>
+        </p:txBody>
+      </p:sp>
+      <p:sp>
+        <p:nvSpPr>
+          <p:cNvPr id="49" name="TextBox 48"/>
+          <p:cNvSpPr txBox="1"/>
+          <p:nvPr/>
+        </p:nvSpPr>
+        <p:spPr>
+          <a:xfrm>
+            <a:off x="4709160" y="5458968"/>
+            <a:ext cx="2103120" cy="475488"/>
+          </a:xfrm>
+          <a:prstGeom prst="rect">
+            <a:avLst/>
+          </a:prstGeom>
+          <a:noFill/>
+        </p:spPr>
+        <p:txBody>
+          <a:bodyPr wrap="square" anchor="ctr" lIns="0" rIns="0" tIns="0" bIns="0">
+            <a:spAutoFit/>
+          </a:bodyPr>
+          <a:lstStyle/>
+          <a:p>
+            <a:pPr algn="l">
+              <a:spcAft>
+                <a:spcPts val="0"/>
+              </a:spcAft>
+            </a:pPr>
+            <a:r>
+              <a:rPr sz="1150" b="1">
+                <a:solidFill>
+                  <a:srgbClr val="0E7C7B"/>
+                </a:solidFill>
+                <a:latin typeface="Calibri"/>
+              </a:rPr>
+              <a:t>4 %</a:t>
+            </a:r>
+          </a:p>
+        </p:txBody>
+      </p:sp>
+      <p:sp>
+        <p:nvSpPr>
+          <p:cNvPr id="50" name="Rectangle 49"/>
+          <p:cNvSpPr/>
+          <p:nvPr/>
+        </p:nvSpPr>
+        <p:spPr>
+          <a:xfrm>
+            <a:off x="6949440" y="5458968"/>
+            <a:ext cx="4389120" cy="475488"/>
+          </a:xfrm>
+          <a:prstGeom prst="rect">
+            <a:avLst/>
+          </a:prstGeom>
+          <a:solidFill>
+            <a:srgbClr val="F5F8F7"/>
+          </a:solidFill>
+          <a:ln>
+            <a:noFill/>
+          </a:ln>
+          <a:effectLst/>
+        </p:spPr>
+        <p:style>
+          <a:lnRef idx="1">
+            <a:schemeClr val="accent1"/>
+          </a:lnRef>
+          <a:fillRef idx="3">
+            <a:schemeClr val="accent1"/>
+          </a:fillRef>
+          <a:effectRef idx="2">
+            <a:schemeClr val="accent1"/>
+          </a:effectRef>
+          <a:fontRef idx="minor">
+            <a:schemeClr val="lt1"/>
+          </a:fontRef>
+        </p:style>
+        <p:txBody>
+          <a:bodyPr rtlCol="0" anchor="ctr"/>
+          <a:lstStyle/>
+          <a:p>
+            <a:pPr algn="ctr"/>
+          </a:p>
+        </p:txBody>
+      </p:sp>
+      <p:sp>
+        <p:nvSpPr>
+          <p:cNvPr id="51" name="TextBox 50"/>
+          <p:cNvSpPr txBox="1"/>
+          <p:nvPr/>
+        </p:nvSpPr>
+        <p:spPr>
+          <a:xfrm>
+            <a:off x="7086600" y="5458968"/>
+            <a:ext cx="4114800" cy="475488"/>
+          </a:xfrm>
+          <a:prstGeom prst="rect">
+            <a:avLst/>
+          </a:prstGeom>
+          <a:noFill/>
+        </p:spPr>
+        <p:txBody>
+          <a:bodyPr wrap="square" anchor="ctr" lIns="0" rIns="0" tIns="0" bIns="0">
+            <a:spAutoFit/>
+          </a:bodyPr>
+          <a:lstStyle/>
+          <a:p>
+            <a:pPr algn="l">
+              <a:spcAft>
+                <a:spcPts val="0"/>
+              </a:spcAft>
+            </a:pPr>
+            <a:r>
+              <a:rPr sz="1150" b="0">
                 <a:solidFill>
                   <a:srgbClr val="222B36"/>
                 </a:solidFill>
                 <a:latin typeface="Calibri"/>
               </a:rPr>
-              <a:t>.</a:t>
+              <a:t>Standard d'analyse d'investissement</a:t>
+            </a:r>
+          </a:p>
+        </p:txBody>
+      </p:sp>
+      <p:sp>
+        <p:nvSpPr>
+          <p:cNvPr id="52" name="TextBox 51"/>
+          <p:cNvSpPr txBox="1"/>
+          <p:nvPr/>
+        </p:nvSpPr>
+        <p:spPr>
+          <a:xfrm>
+            <a:off x="914400" y="6071616"/>
+            <a:ext cx="10424160" cy="548640"/>
+          </a:xfrm>
+          <a:prstGeom prst="rect">
+            <a:avLst/>
+          </a:prstGeom>
+          <a:noFill/>
+        </p:spPr>
+        <p:txBody>
+          <a:bodyPr wrap="square" anchor="t" lIns="0" rIns="0" tIns="0" bIns="0">
+            <a:spAutoFit/>
+          </a:bodyPr>
+          <a:lstStyle/>
+          <a:p>
+            <a:pPr algn="l">
+              <a:spcAft>
+                <a:spcPts val="0"/>
+              </a:spcAft>
+            </a:pPr>
+            <a:r>
+              <a:rPr sz="1200" b="0">
+                <a:solidFill>
+                  <a:srgbClr val="647486"/>
+                </a:solidFill>
+                <a:latin typeface="Calibri"/>
+              </a:rPr>
+              <a:t>Source principale : note de cadrage (Annexe A) — ordres de grandeur de marché. La production, elle, vient de PVGIS (réel).</a:t>
             </a:r>
           </a:p>
         </p:txBody>
@@ -12300,7 +14978,7 @@
         </p:nvSpPr>
         <p:spPr>
           <a:xfrm>
-            <a:off x="914400" y="502920"/>
+            <a:off x="914400" y="640080"/>
             <a:ext cx="10972800" cy="822960"/>
           </a:xfrm>
           <a:prstGeom prst="rect">
@@ -12323,68 +15001,68 @@
               </a:spcAft>
             </a:pPr>
             <a:r>
-              <a:rPr sz="3000" b="1" dirty="0" err="1">
+              <a:rPr sz="3000" b="1">
                 <a:solidFill>
                   <a:srgbClr val="12293D"/>
                 </a:solidFill>
                 <a:latin typeface="Cambria"/>
               </a:rPr>
-              <a:t>L'analyse</a:t>
-            </a:r>
-            <a:r>
-              <a:rPr sz="3000" b="1" dirty="0">
-                <a:solidFill>
-                  <a:srgbClr val="12293D"/>
-                </a:solidFill>
-                <a:latin typeface="Cambria"/>
-              </a:rPr>
-              <a:t> : quatre </a:t>
-            </a:r>
-            <a:r>
-              <a:rPr sz="3000" b="1" dirty="0" err="1">
-                <a:solidFill>
-                  <a:srgbClr val="12293D"/>
-                </a:solidFill>
-                <a:latin typeface="Cambria"/>
-              </a:rPr>
-              <a:t>cartes</a:t>
-            </a:r>
-            <a:r>
-              <a:rPr sz="3000" b="1" dirty="0">
-                <a:solidFill>
-                  <a:srgbClr val="12293D"/>
-                </a:solidFill>
-                <a:latin typeface="Cambria"/>
-              </a:rPr>
-              <a:t> de France</a:t>
-            </a:r>
-          </a:p>
-        </p:txBody>
-      </p:sp>
-      <p:pic>
-        <p:nvPicPr>
-          <p:cNvPr id="3" name="Picture 2" descr="carte_facteur.jpg"/>
-          <p:cNvPicPr>
-            <a:picLocks noChangeAspect="1"/>
-          </p:cNvPicPr>
-          <p:nvPr/>
-        </p:nvPicPr>
-        <p:blipFill>
-          <a:blip r:embed="rId3"/>
-          <a:stretch>
-            <a:fillRect/>
-          </a:stretch>
-        </p:blipFill>
-        <p:spPr>
-          <a:xfrm>
-            <a:off x="2011680" y="1371600"/>
-            <a:ext cx="2568136" cy="2057400"/>
-          </a:xfrm>
-          <a:prstGeom prst="rect">
-            <a:avLst/>
-          </a:prstGeom>
-        </p:spPr>
-      </p:pic>
+              <a:t>Les indicateurs de rentabilité</a:t>
+            </a:r>
+          </a:p>
+        </p:txBody>
+      </p:sp>
+      <p:sp>
+        <p:nvSpPr>
+          <p:cNvPr id="3" name="Rounded Rectangle 2"/>
+          <p:cNvSpPr/>
+          <p:nvPr/>
+        </p:nvSpPr>
+        <p:spPr>
+          <a:xfrm>
+            <a:off x="482602" y="2194559"/>
+            <a:ext cx="2606040" cy="2926080"/>
+          </a:xfrm>
+          <a:prstGeom prst="roundRect">
+            <a:avLst/>
+          </a:prstGeom>
+          <a:solidFill>
+            <a:srgbClr val="F5F8F7"/>
+          </a:solidFill>
+          <a:ln>
+            <a:noFill/>
+          </a:ln>
+          <a:effectLst>
+            <a:outerShdw blurRad="60000" dist="20000" dir="5400000" rotWithShape="0">
+              <a:srgbClr val="12293D">
+                <a:alpha val="14000"/>
+              </a:srgbClr>
+            </a:outerShdw>
+          </a:effectLst>
+        </p:spPr>
+        <p:style>
+          <a:lnRef idx="1">
+            <a:schemeClr val="accent1"/>
+          </a:lnRef>
+          <a:fillRef idx="3">
+            <a:schemeClr val="accent1"/>
+          </a:fillRef>
+          <a:effectRef idx="2">
+            <a:schemeClr val="accent1"/>
+          </a:effectRef>
+          <a:fontRef idx="minor">
+            <a:schemeClr val="lt1"/>
+          </a:fontRef>
+        </p:style>
+        <p:txBody>
+          <a:bodyPr rtlCol="0" anchor="ctr"/>
+          <a:lstStyle/>
+          <a:p>
+            <a:pPr algn="ctr"/>
+            <a:endParaRPr/>
+          </a:p>
+        </p:txBody>
+      </p:sp>
       <p:sp>
         <p:nvSpPr>
           <p:cNvPr id="4" name="TextBox 3"/>
@@ -12393,8 +15071,8 @@
         </p:nvSpPr>
         <p:spPr>
           <a:xfrm>
-            <a:off x="1737360" y="3474720"/>
-            <a:ext cx="3116776" cy="320040"/>
+            <a:off x="482602" y="2514600"/>
+            <a:ext cx="2606040" cy="640080"/>
           </a:xfrm>
           <a:prstGeom prst="rect">
             <a:avLst/>
@@ -12416,51 +15094,27 @@
               </a:spcAft>
             </a:pPr>
             <a:r>
-              <a:rPr sz="1200" b="1">
-                <a:solidFill>
-                  <a:srgbClr val="12293D"/>
-                </a:solidFill>
-                <a:latin typeface="Calibri"/>
-              </a:rPr>
-              <a:t>Production (kWh/kWc/an)</a:t>
-            </a:r>
-          </a:p>
-        </p:txBody>
-      </p:sp>
-      <p:pic>
-        <p:nvPicPr>
-          <p:cNvPr id="5" name="Picture 4" descr="carte_lcoe.jpg"/>
-          <p:cNvPicPr>
-            <a:picLocks noChangeAspect="1"/>
-          </p:cNvPicPr>
-          <p:nvPr/>
-        </p:nvPicPr>
-        <p:blipFill>
-          <a:blip r:embed="rId4"/>
-          <a:stretch>
-            <a:fillRect/>
-          </a:stretch>
-        </p:blipFill>
-        <p:spPr>
-          <a:xfrm>
-            <a:off x="7680960" y="1371600"/>
-            <a:ext cx="2524772" cy="2057400"/>
-          </a:xfrm>
-          <a:prstGeom prst="rect">
-            <a:avLst/>
-          </a:prstGeom>
-        </p:spPr>
-      </p:pic>
-      <p:sp>
-        <p:nvSpPr>
-          <p:cNvPr id="6" name="TextBox 5"/>
+              <a:rPr sz="2200" b="1">
+                <a:solidFill>
+                  <a:srgbClr val="0E7C7B"/>
+                </a:solidFill>
+                <a:latin typeface="Cambria"/>
+              </a:rPr>
+              <a:t>LCOE</a:t>
+            </a:r>
+          </a:p>
+        </p:txBody>
+      </p:sp>
+      <p:sp>
+        <p:nvSpPr>
+          <p:cNvPr id="5" name="TextBox 4"/>
           <p:cNvSpPr txBox="1"/>
           <p:nvPr/>
         </p:nvSpPr>
         <p:spPr>
           <a:xfrm>
-            <a:off x="7406640" y="3474720"/>
-            <a:ext cx="3073412" cy="320040"/>
+            <a:off x="482602" y="3246119"/>
+            <a:ext cx="2606040" cy="457200"/>
           </a:xfrm>
           <a:prstGeom prst="rect">
             <a:avLst/>
@@ -12482,51 +15136,27 @@
               </a:spcAft>
             </a:pPr>
             <a:r>
-              <a:rPr sz="1200" b="1">
+              <a:rPr sz="1400" b="1">
                 <a:solidFill>
                   <a:srgbClr val="12293D"/>
                 </a:solidFill>
-                <a:latin typeface="Calibri"/>
-              </a:rPr>
-              <a:t>Prix de revient — LCOE (c/kWh)</a:t>
-            </a:r>
-          </a:p>
-        </p:txBody>
-      </p:sp>
-      <p:pic>
-        <p:nvPicPr>
-          <p:cNvPr id="7" name="Picture 6" descr="carte_payback.jpg"/>
-          <p:cNvPicPr>
-            <a:picLocks noChangeAspect="1"/>
-          </p:cNvPicPr>
-          <p:nvPr/>
-        </p:nvPicPr>
-        <p:blipFill>
-          <a:blip r:embed="rId5"/>
-          <a:stretch>
-            <a:fillRect/>
-          </a:stretch>
-        </p:blipFill>
-        <p:spPr>
-          <a:xfrm>
-            <a:off x="2011680" y="3931920"/>
-            <a:ext cx="2553681" cy="2057400"/>
-          </a:xfrm>
-          <a:prstGeom prst="rect">
-            <a:avLst/>
-          </a:prstGeom>
-        </p:spPr>
-      </p:pic>
-      <p:sp>
-        <p:nvSpPr>
-          <p:cNvPr id="8" name="TextBox 7"/>
+                <a:latin typeface="Cambria"/>
+              </a:rPr>
+              <a:t>Prix de revient</a:t>
+            </a:r>
+          </a:p>
+        </p:txBody>
+      </p:sp>
+      <p:sp>
+        <p:nvSpPr>
+          <p:cNvPr id="6" name="TextBox 5"/>
           <p:cNvSpPr txBox="1"/>
           <p:nvPr/>
         </p:nvSpPr>
         <p:spPr>
           <a:xfrm>
-            <a:off x="1737360" y="6035040"/>
-            <a:ext cx="3102321" cy="320040"/>
+            <a:off x="711202" y="3794760"/>
+            <a:ext cx="2148840" cy="1188720"/>
           </a:xfrm>
           <a:prstGeom prst="rect">
             <a:avLst/>
@@ -12540,6 +15170,9 @@
           <a:lstStyle/>
           <a:p>
             <a:pPr algn="ctr">
+              <a:lnSpc>
+                <a:spcPct val="106000"/>
+              </a:lnSpc>
               <a:spcBef>
                 <a:spcPts val="0"/>
               </a:spcBef>
@@ -12548,51 +15181,78 @@
               </a:spcAft>
             </a:pPr>
             <a:r>
-              <a:rPr sz="1200" b="1">
-                <a:solidFill>
-                  <a:srgbClr val="12293D"/>
-                </a:solidFill>
-                <a:latin typeface="Calibri"/>
-              </a:rPr>
-              <a:t>Temps de retour (ans)</a:t>
-            </a:r>
-          </a:p>
-        </p:txBody>
-      </p:sp>
-      <p:pic>
-        <p:nvPicPr>
-          <p:cNvPr id="9" name="Picture 8" descr="carte_tri.jpg"/>
-          <p:cNvPicPr>
-            <a:picLocks noChangeAspect="1"/>
-          </p:cNvPicPr>
-          <p:nvPr/>
-        </p:nvPicPr>
-        <p:blipFill>
-          <a:blip r:embed="rId6"/>
-          <a:stretch>
-            <a:fillRect/>
-          </a:stretch>
-        </p:blipFill>
-        <p:spPr>
-          <a:xfrm>
-            <a:off x="7680960" y="3931920"/>
-            <a:ext cx="2507908" cy="2057400"/>
-          </a:xfrm>
-          <a:prstGeom prst="rect">
-            <a:avLst/>
-          </a:prstGeom>
-        </p:spPr>
-      </p:pic>
-      <p:sp>
-        <p:nvSpPr>
-          <p:cNvPr id="10" name="TextBox 9"/>
+              <a:rPr sz="1200" b="0">
+                <a:solidFill>
+                  <a:srgbClr val="222B36"/>
+                </a:solidFill>
+                <a:latin typeface="Calibri"/>
+              </a:rPr>
+              <a:t>Ce que coûte 1 kWh que je produis. À comparer aux ~20 c du réseau.</a:t>
+            </a:r>
+          </a:p>
+        </p:txBody>
+      </p:sp>
+      <p:sp>
+        <p:nvSpPr>
+          <p:cNvPr id="7" name="Rounded Rectangle 6"/>
+          <p:cNvSpPr/>
+          <p:nvPr/>
+        </p:nvSpPr>
+        <p:spPr>
+          <a:xfrm>
+            <a:off x="3362962" y="2194559"/>
+            <a:ext cx="2606040" cy="2926080"/>
+          </a:xfrm>
+          <a:prstGeom prst="roundRect">
+            <a:avLst/>
+          </a:prstGeom>
+          <a:solidFill>
+            <a:srgbClr val="F5F8F7"/>
+          </a:solidFill>
+          <a:ln>
+            <a:noFill/>
+          </a:ln>
+          <a:effectLst>
+            <a:outerShdw blurRad="60000" dist="20000" dir="5400000" rotWithShape="0">
+              <a:srgbClr val="12293D">
+                <a:alpha val="14000"/>
+              </a:srgbClr>
+            </a:outerShdw>
+          </a:effectLst>
+        </p:spPr>
+        <p:style>
+          <a:lnRef idx="1">
+            <a:schemeClr val="accent1"/>
+          </a:lnRef>
+          <a:fillRef idx="3">
+            <a:schemeClr val="accent1"/>
+          </a:fillRef>
+          <a:effectRef idx="2">
+            <a:schemeClr val="accent1"/>
+          </a:effectRef>
+          <a:fontRef idx="minor">
+            <a:schemeClr val="lt1"/>
+          </a:fontRef>
+        </p:style>
+        <p:txBody>
+          <a:bodyPr rtlCol="0" anchor="ctr"/>
+          <a:lstStyle/>
+          <a:p>
+            <a:pPr algn="ctr"/>
+            <a:endParaRPr/>
+          </a:p>
+        </p:txBody>
+      </p:sp>
+      <p:sp>
+        <p:nvSpPr>
+          <p:cNvPr id="8" name="TextBox 7"/>
           <p:cNvSpPr txBox="1"/>
           <p:nvPr/>
         </p:nvSpPr>
         <p:spPr>
           <a:xfrm>
-            <a:off x="7406640" y="6035040"/>
-            <a:ext cx="3056548" cy="320040"/>
+            <a:off x="3362962" y="2514600"/>
+            <a:ext cx="2606040" cy="640080"/>
           </a:xfrm>
           <a:prstGeom prst="rect">
             <a:avLst/>
@@ -12614,27 +15274,27 @@
               </a:spcAft>
             </a:pPr>
             <a:r>
-              <a:rPr sz="1200" b="1">
-                <a:solidFill>
-                  <a:srgbClr val="12293D"/>
-                </a:solidFill>
-                <a:latin typeface="Calibri"/>
-              </a:rPr>
-              <a:t>Rendement — TRI (%)</a:t>
-            </a:r>
-          </a:p>
-        </p:txBody>
-      </p:sp>
-      <p:sp>
-        <p:nvSpPr>
-          <p:cNvPr id="11" name="TextBox 10"/>
+              <a:rPr sz="2200" b="1">
+                <a:solidFill>
+                  <a:srgbClr val="0E7C7B"/>
+                </a:solidFill>
+                <a:latin typeface="Cambria"/>
+              </a:rPr>
+              <a:t>Payback</a:t>
+            </a:r>
+          </a:p>
+        </p:txBody>
+      </p:sp>
+      <p:sp>
+        <p:nvSpPr>
+          <p:cNvPr id="9" name="TextBox 8"/>
           <p:cNvSpPr txBox="1"/>
           <p:nvPr/>
         </p:nvSpPr>
         <p:spPr>
           <a:xfrm>
-            <a:off x="548640" y="6446520"/>
-            <a:ext cx="11064240" cy="184666"/>
+            <a:off x="3362962" y="3246119"/>
+            <a:ext cx="2606040" cy="457200"/>
           </a:xfrm>
           <a:prstGeom prst="rect">
             <a:avLst/>
@@ -12656,94 +15316,490 @@
               </a:spcAft>
             </a:pPr>
             <a:r>
+              <a:rPr sz="1400" b="1">
+                <a:solidFill>
+                  <a:srgbClr val="12293D"/>
+                </a:solidFill>
+                <a:latin typeface="Cambria"/>
+              </a:rPr>
+              <a:t>Temps de retour</a:t>
+            </a:r>
+          </a:p>
+        </p:txBody>
+      </p:sp>
+      <p:sp>
+        <p:nvSpPr>
+          <p:cNvPr id="10" name="TextBox 9"/>
+          <p:cNvSpPr txBox="1"/>
+          <p:nvPr/>
+        </p:nvSpPr>
+        <p:spPr>
+          <a:xfrm>
+            <a:off x="3591562" y="3794760"/>
+            <a:ext cx="2148840" cy="1188720"/>
+          </a:xfrm>
+          <a:prstGeom prst="rect">
+            <a:avLst/>
+          </a:prstGeom>
+          <a:noFill/>
+        </p:spPr>
+        <p:txBody>
+          <a:bodyPr wrap="square" lIns="0" tIns="0" rIns="0" bIns="0" anchor="t">
+            <a:spAutoFit/>
+          </a:bodyPr>
+          <a:lstStyle/>
+          <a:p>
+            <a:pPr algn="ctr">
+              <a:lnSpc>
+                <a:spcPct val="106000"/>
+              </a:lnSpc>
+              <a:spcBef>
+                <a:spcPts val="0"/>
+              </a:spcBef>
+              <a:spcAft>
+                <a:spcPts val="0"/>
+              </a:spcAft>
+            </a:pPr>
+            <a:r>
+              <a:rPr sz="1200" b="0">
+                <a:solidFill>
+                  <a:srgbClr val="222B36"/>
+                </a:solidFill>
+                <a:latin typeface="Calibri"/>
+              </a:rPr>
+              <a:t>Le nombre d'années pour rembourser l'installation.</a:t>
+            </a:r>
+          </a:p>
+        </p:txBody>
+      </p:sp>
+      <p:sp>
+        <p:nvSpPr>
+          <p:cNvPr id="11" name="Rounded Rectangle 10"/>
+          <p:cNvSpPr/>
+          <p:nvPr/>
+        </p:nvSpPr>
+        <p:spPr>
+          <a:xfrm>
+            <a:off x="6243322" y="2194559"/>
+            <a:ext cx="2606040" cy="2926080"/>
+          </a:xfrm>
+          <a:prstGeom prst="roundRect">
+            <a:avLst/>
+          </a:prstGeom>
+          <a:solidFill>
+            <a:srgbClr val="F5F8F7"/>
+          </a:solidFill>
+          <a:ln>
+            <a:noFill/>
+          </a:ln>
+          <a:effectLst>
+            <a:outerShdw blurRad="60000" dist="20000" dir="5400000" rotWithShape="0">
+              <a:srgbClr val="12293D">
+                <a:alpha val="14000"/>
+              </a:srgbClr>
+            </a:outerShdw>
+          </a:effectLst>
+        </p:spPr>
+        <p:style>
+          <a:lnRef idx="1">
+            <a:schemeClr val="accent1"/>
+          </a:lnRef>
+          <a:fillRef idx="3">
+            <a:schemeClr val="accent1"/>
+          </a:fillRef>
+          <a:effectRef idx="2">
+            <a:schemeClr val="accent1"/>
+          </a:effectRef>
+          <a:fontRef idx="minor">
+            <a:schemeClr val="lt1"/>
+          </a:fontRef>
+        </p:style>
+        <p:txBody>
+          <a:bodyPr rtlCol="0" anchor="ctr"/>
+          <a:lstStyle/>
+          <a:p>
+            <a:pPr algn="ctr"/>
+            <a:endParaRPr/>
+          </a:p>
+        </p:txBody>
+      </p:sp>
+      <p:sp>
+        <p:nvSpPr>
+          <p:cNvPr id="12" name="TextBox 11"/>
+          <p:cNvSpPr txBox="1"/>
+          <p:nvPr/>
+        </p:nvSpPr>
+        <p:spPr>
+          <a:xfrm>
+            <a:off x="6243322" y="2514600"/>
+            <a:ext cx="2606040" cy="640080"/>
+          </a:xfrm>
+          <a:prstGeom prst="rect">
+            <a:avLst/>
+          </a:prstGeom>
+          <a:noFill/>
+        </p:spPr>
+        <p:txBody>
+          <a:bodyPr wrap="square" lIns="0" tIns="0" rIns="0" bIns="0" anchor="t">
+            <a:spAutoFit/>
+          </a:bodyPr>
+          <a:lstStyle/>
+          <a:p>
+            <a:pPr algn="ctr">
+              <a:spcBef>
+                <a:spcPts val="0"/>
+              </a:spcBef>
+              <a:spcAft>
+                <a:spcPts val="0"/>
+              </a:spcAft>
+            </a:pPr>
+            <a:r>
+              <a:rPr sz="2200" b="1">
+                <a:solidFill>
+                  <a:srgbClr val="0E7C7B"/>
+                </a:solidFill>
+                <a:latin typeface="Cambria"/>
+              </a:rPr>
+              <a:t>TRI</a:t>
+            </a:r>
+          </a:p>
+        </p:txBody>
+      </p:sp>
+      <p:sp>
+        <p:nvSpPr>
+          <p:cNvPr id="13" name="TextBox 12"/>
+          <p:cNvSpPr txBox="1"/>
+          <p:nvPr/>
+        </p:nvSpPr>
+        <p:spPr>
+          <a:xfrm>
+            <a:off x="6243322" y="3246119"/>
+            <a:ext cx="2606040" cy="457200"/>
+          </a:xfrm>
+          <a:prstGeom prst="rect">
+            <a:avLst/>
+          </a:prstGeom>
+          <a:noFill/>
+        </p:spPr>
+        <p:txBody>
+          <a:bodyPr wrap="square" lIns="0" tIns="0" rIns="0" bIns="0" anchor="t">
+            <a:spAutoFit/>
+          </a:bodyPr>
+          <a:lstStyle/>
+          <a:p>
+            <a:pPr algn="ctr">
+              <a:spcBef>
+                <a:spcPts val="0"/>
+              </a:spcBef>
+              <a:spcAft>
+                <a:spcPts val="0"/>
+              </a:spcAft>
+            </a:pPr>
+            <a:r>
+              <a:rPr sz="1400" b="1">
+                <a:solidFill>
+                  <a:srgbClr val="12293D"/>
+                </a:solidFill>
+                <a:latin typeface="Cambria"/>
+              </a:rPr>
+              <a:t>Rendement</a:t>
+            </a:r>
+          </a:p>
+        </p:txBody>
+      </p:sp>
+      <p:sp>
+        <p:nvSpPr>
+          <p:cNvPr id="14" name="TextBox 13"/>
+          <p:cNvSpPr txBox="1"/>
+          <p:nvPr/>
+        </p:nvSpPr>
+        <p:spPr>
+          <a:xfrm>
+            <a:off x="6471922" y="3794760"/>
+            <a:ext cx="2148840" cy="1188720"/>
+          </a:xfrm>
+          <a:prstGeom prst="rect">
+            <a:avLst/>
+          </a:prstGeom>
+          <a:noFill/>
+        </p:spPr>
+        <p:txBody>
+          <a:bodyPr wrap="square" lIns="0" tIns="0" rIns="0" bIns="0" anchor="t">
+            <a:spAutoFit/>
+          </a:bodyPr>
+          <a:lstStyle/>
+          <a:p>
+            <a:pPr algn="ctr">
+              <a:lnSpc>
+                <a:spcPct val="106000"/>
+              </a:lnSpc>
+              <a:spcBef>
+                <a:spcPts val="0"/>
+              </a:spcBef>
+              <a:spcAft>
+                <a:spcPts val="0"/>
+              </a:spcAft>
+            </a:pPr>
+            <a:r>
+              <a:rPr sz="1200" b="0">
+                <a:solidFill>
+                  <a:srgbClr val="222B36"/>
+                </a:solidFill>
+                <a:latin typeface="Calibri"/>
+              </a:rPr>
+              <a:t>Ce que ça rapporte par an, en %, comme un placement.</a:t>
+            </a:r>
+          </a:p>
+        </p:txBody>
+      </p:sp>
+      <p:sp>
+        <p:nvSpPr>
+          <p:cNvPr id="15" name="Rounded Rectangle 14"/>
+          <p:cNvSpPr/>
+          <p:nvPr/>
+        </p:nvSpPr>
+        <p:spPr>
+          <a:xfrm>
+            <a:off x="9123682" y="2194559"/>
+            <a:ext cx="2606040" cy="2926080"/>
+          </a:xfrm>
+          <a:prstGeom prst="roundRect">
+            <a:avLst/>
+          </a:prstGeom>
+          <a:solidFill>
+            <a:srgbClr val="F5F8F7"/>
+          </a:solidFill>
+          <a:ln>
+            <a:noFill/>
+          </a:ln>
+          <a:effectLst>
+            <a:outerShdw blurRad="60000" dist="20000" dir="5400000" rotWithShape="0">
+              <a:srgbClr val="12293D">
+                <a:alpha val="14000"/>
+              </a:srgbClr>
+            </a:outerShdw>
+          </a:effectLst>
+        </p:spPr>
+        <p:style>
+          <a:lnRef idx="1">
+            <a:schemeClr val="accent1"/>
+          </a:lnRef>
+          <a:fillRef idx="3">
+            <a:schemeClr val="accent1"/>
+          </a:fillRef>
+          <a:effectRef idx="2">
+            <a:schemeClr val="accent1"/>
+          </a:effectRef>
+          <a:fontRef idx="minor">
+            <a:schemeClr val="lt1"/>
+          </a:fontRef>
+        </p:style>
+        <p:txBody>
+          <a:bodyPr rtlCol="0" anchor="ctr"/>
+          <a:lstStyle/>
+          <a:p>
+            <a:pPr algn="ctr"/>
+            <a:endParaRPr/>
+          </a:p>
+        </p:txBody>
+      </p:sp>
+      <p:sp>
+        <p:nvSpPr>
+          <p:cNvPr id="16" name="TextBox 15"/>
+          <p:cNvSpPr txBox="1"/>
+          <p:nvPr/>
+        </p:nvSpPr>
+        <p:spPr>
+          <a:xfrm>
+            <a:off x="9123682" y="2514600"/>
+            <a:ext cx="2606040" cy="640080"/>
+          </a:xfrm>
+          <a:prstGeom prst="rect">
+            <a:avLst/>
+          </a:prstGeom>
+          <a:noFill/>
+        </p:spPr>
+        <p:txBody>
+          <a:bodyPr wrap="square" lIns="0" tIns="0" rIns="0" bIns="0" anchor="t">
+            <a:spAutoFit/>
+          </a:bodyPr>
+          <a:lstStyle/>
+          <a:p>
+            <a:pPr algn="ctr">
+              <a:spcBef>
+                <a:spcPts val="0"/>
+              </a:spcBef>
+              <a:spcAft>
+                <a:spcPts val="0"/>
+              </a:spcAft>
+            </a:pPr>
+            <a:r>
+              <a:rPr sz="2200" b="1">
+                <a:solidFill>
+                  <a:srgbClr val="0E7C7B"/>
+                </a:solidFill>
+                <a:latin typeface="Cambria"/>
+              </a:rPr>
+              <a:t>VAN</a:t>
+            </a:r>
+          </a:p>
+        </p:txBody>
+      </p:sp>
+      <p:sp>
+        <p:nvSpPr>
+          <p:cNvPr id="17" name="TextBox 16"/>
+          <p:cNvSpPr txBox="1"/>
+          <p:nvPr/>
+        </p:nvSpPr>
+        <p:spPr>
+          <a:xfrm>
+            <a:off x="9123682" y="3246119"/>
+            <a:ext cx="2606040" cy="457200"/>
+          </a:xfrm>
+          <a:prstGeom prst="rect">
+            <a:avLst/>
+          </a:prstGeom>
+          <a:noFill/>
+        </p:spPr>
+        <p:txBody>
+          <a:bodyPr wrap="square" lIns="0" tIns="0" rIns="0" bIns="0" anchor="t">
+            <a:spAutoFit/>
+          </a:bodyPr>
+          <a:lstStyle/>
+          <a:p>
+            <a:pPr algn="ctr">
+              <a:spcBef>
+                <a:spcPts val="0"/>
+              </a:spcBef>
+              <a:spcAft>
+                <a:spcPts val="0"/>
+              </a:spcAft>
+            </a:pPr>
+            <a:r>
+              <a:rPr sz="1400" b="1">
+                <a:solidFill>
+                  <a:srgbClr val="12293D"/>
+                </a:solidFill>
+                <a:latin typeface="Cambria"/>
+              </a:rPr>
+              <a:t>Gain total</a:t>
+            </a:r>
+          </a:p>
+        </p:txBody>
+      </p:sp>
+      <p:sp>
+        <p:nvSpPr>
+          <p:cNvPr id="18" name="TextBox 17"/>
+          <p:cNvSpPr txBox="1"/>
+          <p:nvPr/>
+        </p:nvSpPr>
+        <p:spPr>
+          <a:xfrm>
+            <a:off x="9352282" y="3794760"/>
+            <a:ext cx="2148840" cy="1188720"/>
+          </a:xfrm>
+          <a:prstGeom prst="rect">
+            <a:avLst/>
+          </a:prstGeom>
+          <a:noFill/>
+        </p:spPr>
+        <p:txBody>
+          <a:bodyPr wrap="square" lIns="0" tIns="0" rIns="0" bIns="0" anchor="t">
+            <a:spAutoFit/>
+          </a:bodyPr>
+          <a:lstStyle/>
+          <a:p>
+            <a:pPr algn="ctr">
+              <a:lnSpc>
+                <a:spcPct val="106000"/>
+              </a:lnSpc>
+              <a:spcBef>
+                <a:spcPts val="0"/>
+              </a:spcBef>
+              <a:spcAft>
+                <a:spcPts val="0"/>
+              </a:spcAft>
+            </a:pPr>
+            <a:r>
+              <a:rPr sz="1200" b="0" dirty="0">
+                <a:solidFill>
+                  <a:srgbClr val="222B36"/>
+                </a:solidFill>
+                <a:latin typeface="Calibri"/>
+              </a:rPr>
+              <a:t>Ce </a:t>
+            </a:r>
+            <a:r>
               <a:rPr sz="1200" b="0" dirty="0" err="1">
                 <a:solidFill>
-                  <a:srgbClr val="647486"/>
-                </a:solidFill>
-                <a:latin typeface="Calibri"/>
-              </a:rPr>
-              <a:t>Même</a:t>
+                  <a:srgbClr val="222B36"/>
+                </a:solidFill>
+                <a:latin typeface="Calibri"/>
+              </a:rPr>
+              <a:t>que</a:t>
             </a:r>
             <a:r>
               <a:rPr sz="1200" b="0" dirty="0">
                 <a:solidFill>
-                  <a:srgbClr val="647486"/>
-                </a:solidFill>
-                <a:latin typeface="Calibri"/>
-              </a:rPr>
-              <a:t> </a:t>
-            </a:r>
-            <a:r>
-              <a:rPr lang="fr-FR" sz="1200" b="0" dirty="0">
-                <a:solidFill>
-                  <a:srgbClr val="647486"/>
-                </a:solidFill>
-                <a:latin typeface="Calibri"/>
-              </a:rPr>
-              <a:t>scenario</a:t>
+                  <a:srgbClr val="222B36"/>
+                </a:solidFill>
+                <a:latin typeface="Calibri"/>
+              </a:rPr>
+              <a:t> je </a:t>
+            </a:r>
+            <a:r>
+              <a:rPr sz="1200" b="0" dirty="0" err="1">
+                <a:solidFill>
+                  <a:srgbClr val="222B36"/>
+                </a:solidFill>
+                <a:latin typeface="Calibri"/>
+              </a:rPr>
+              <a:t>gagne</a:t>
             </a:r>
             <a:r>
               <a:rPr sz="1200" b="0" dirty="0">
                 <a:solidFill>
-                  <a:srgbClr val="647486"/>
-                </a:solidFill>
-                <a:latin typeface="Calibri"/>
-              </a:rPr>
-              <a:t> </a:t>
+                  <a:srgbClr val="222B36"/>
+                </a:solidFill>
+                <a:latin typeface="Calibri"/>
+              </a:rPr>
+              <a:t> au final, </a:t>
             </a:r>
             <a:r>
               <a:rPr sz="1200" b="0" dirty="0" err="1">
                 <a:solidFill>
-                  <a:srgbClr val="647486"/>
-                </a:solidFill>
-                <a:latin typeface="Calibri"/>
-              </a:rPr>
-              <a:t>partout</a:t>
+                  <a:srgbClr val="222B36"/>
+                </a:solidFill>
+                <a:latin typeface="Calibri"/>
+              </a:rPr>
+              <a:t>en</a:t>
             </a:r>
             <a:r>
               <a:rPr sz="1200" b="0" dirty="0">
                 <a:solidFill>
-                  <a:srgbClr val="647486"/>
-                </a:solidFill>
-                <a:latin typeface="Calibri"/>
-              </a:rPr>
-              <a:t> : production et </a:t>
+                  <a:srgbClr val="222B36"/>
+                </a:solidFill>
+                <a:latin typeface="Calibri"/>
+              </a:rPr>
+              <a:t> euros </a:t>
             </a:r>
             <a:r>
               <a:rPr sz="1200" b="0" dirty="0" err="1">
                 <a:solidFill>
-                  <a:srgbClr val="647486"/>
-                </a:solidFill>
-                <a:latin typeface="Calibri"/>
-              </a:rPr>
-              <a:t>rentabilité</a:t>
+                  <a:srgbClr val="222B36"/>
+                </a:solidFill>
+                <a:latin typeface="Calibri"/>
+              </a:rPr>
+              <a:t>d'aujourd'hui</a:t>
             </a:r>
             <a:r>
               <a:rPr sz="1200" b="0" dirty="0">
                 <a:solidFill>
-                  <a:srgbClr val="647486"/>
-                </a:solidFill>
-                <a:latin typeface="Calibri"/>
-              </a:rPr>
-              <a:t> </a:t>
-            </a:r>
-            <a:r>
-              <a:rPr sz="1200" b="0" dirty="0" err="1">
-                <a:solidFill>
-                  <a:srgbClr val="647486"/>
-                </a:solidFill>
-                <a:latin typeface="Calibri"/>
-              </a:rPr>
-              <a:t>augmentent</a:t>
-            </a:r>
-            <a:r>
-              <a:rPr sz="1200" b="0" dirty="0">
-                <a:solidFill>
-                  <a:srgbClr val="647486"/>
-                </a:solidFill>
-                <a:latin typeface="Calibri"/>
-              </a:rPr>
-              <a:t> du Nord vers le Sud.</a:t>
+                  <a:srgbClr val="222B36"/>
+                </a:solidFill>
+                <a:latin typeface="Calibri"/>
+              </a:rPr>
+              <a:t>.</a:t>
             </a:r>
           </a:p>
         </p:txBody>
@@ -12789,7 +15845,7 @@
         </p:nvSpPr>
         <p:spPr>
           <a:xfrm>
-            <a:off x="914400" y="640080"/>
+            <a:off x="914400" y="502920"/>
             <a:ext cx="10972800" cy="822960"/>
           </a:xfrm>
           <a:prstGeom prst="rect">
@@ -12812,27 +15868,78 @@
               </a:spcAft>
             </a:pPr>
             <a:r>
-              <a:rPr sz="3000" b="1">
+              <a:rPr sz="3000" b="1" dirty="0" err="1">
                 <a:solidFill>
                   <a:srgbClr val="12293D"/>
                 </a:solidFill>
                 <a:latin typeface="Cambria"/>
               </a:rPr>
-              <a:t>Démonstration : l'outil interactif</a:t>
-            </a:r>
-          </a:p>
-        </p:txBody>
-      </p:sp>
-      <p:sp>
-        <p:nvSpPr>
-          <p:cNvPr id="3" name="TextBox 2"/>
+              <a:t>L'analyse</a:t>
+            </a:r>
+            <a:r>
+              <a:rPr sz="3000" b="1" dirty="0">
+                <a:solidFill>
+                  <a:srgbClr val="12293D"/>
+                </a:solidFill>
+                <a:latin typeface="Cambria"/>
+              </a:rPr>
+              <a:t> : quatre </a:t>
+            </a:r>
+            <a:r>
+              <a:rPr sz="3000" b="1" dirty="0" err="1">
+                <a:solidFill>
+                  <a:srgbClr val="12293D"/>
+                </a:solidFill>
+                <a:latin typeface="Cambria"/>
+              </a:rPr>
+              <a:t>cartes</a:t>
+            </a:r>
+            <a:r>
+              <a:rPr sz="3000" b="1" dirty="0">
+                <a:solidFill>
+                  <a:srgbClr val="12293D"/>
+                </a:solidFill>
+                <a:latin typeface="Cambria"/>
+              </a:rPr>
+              <a:t> de France</a:t>
+            </a:r>
+          </a:p>
+        </p:txBody>
+      </p:sp>
+      <p:pic>
+        <p:nvPicPr>
+          <p:cNvPr id="3" name="Picture 2" descr="carte_facteur.jpg"/>
+          <p:cNvPicPr>
+            <a:picLocks noChangeAspect="1"/>
+          </p:cNvPicPr>
+          <p:nvPr/>
+        </p:nvPicPr>
+        <p:blipFill>
+          <a:blip r:embed="rId3"/>
+          <a:stretch>
+            <a:fillRect/>
+          </a:stretch>
+        </p:blipFill>
+        <p:spPr>
+          <a:xfrm>
+            <a:off x="2011680" y="1371600"/>
+            <a:ext cx="2568136" cy="2057400"/>
+          </a:xfrm>
+          <a:prstGeom prst="rect">
+            <a:avLst/>
+          </a:prstGeom>
+        </p:spPr>
+      </p:pic>
+      <p:sp>
+        <p:nvSpPr>
+          <p:cNvPr id="4" name="TextBox 3"/>
           <p:cNvSpPr txBox="1"/>
           <p:nvPr/>
         </p:nvSpPr>
         <p:spPr>
           <a:xfrm>
-            <a:off x="914400" y="1691640"/>
-            <a:ext cx="6035040" cy="3200400"/>
+            <a:off x="1737360" y="3474720"/>
+            <a:ext cx="3116776" cy="320040"/>
           </a:xfrm>
           <a:prstGeom prst="rect">
             <a:avLst/>
@@ -12845,137 +15952,343 @@
           </a:bodyPr>
           <a:lstStyle/>
           <a:p>
-            <a:pPr algn="l">
-              <a:lnSpc>
-                <a:spcPct val="110000"/>
-              </a:lnSpc>
+            <a:pPr algn="ctr">
               <a:spcBef>
                 <a:spcPts val="0"/>
               </a:spcBef>
               <a:spcAft>
-                <a:spcPts val="1100"/>
+                <a:spcPts val="0"/>
               </a:spcAft>
             </a:pPr>
             <a:r>
-              <a:rPr sz="1500" b="0">
-                <a:solidFill>
-                  <a:srgbClr val="222B36"/>
-                </a:solidFill>
-                <a:latin typeface="Calibri"/>
-              </a:rPr>
-              <a:t>J'ai transformé l'analyse en une application web. On peut :</a:t>
-            </a:r>
-          </a:p>
-          <a:p>
-            <a:pPr algn="l">
-              <a:lnSpc>
-                <a:spcPct val="110000"/>
-              </a:lnSpc>
+              <a:rPr sz="1200" b="1">
+                <a:solidFill>
+                  <a:srgbClr val="12293D"/>
+                </a:solidFill>
+                <a:latin typeface="Calibri"/>
+              </a:rPr>
+              <a:t>Production (kWh/kWc/an)</a:t>
+            </a:r>
+          </a:p>
+        </p:txBody>
+      </p:sp>
+      <p:pic>
+        <p:nvPicPr>
+          <p:cNvPr id="5" name="Picture 4" descr="carte_lcoe.jpg"/>
+          <p:cNvPicPr>
+            <a:picLocks noChangeAspect="1"/>
+          </p:cNvPicPr>
+          <p:nvPr/>
+        </p:nvPicPr>
+        <p:blipFill>
+          <a:blip r:embed="rId4"/>
+          <a:stretch>
+            <a:fillRect/>
+          </a:stretch>
+        </p:blipFill>
+        <p:spPr>
+          <a:xfrm>
+            <a:off x="7680960" y="1371600"/>
+            <a:ext cx="2524772" cy="2057400"/>
+          </a:xfrm>
+          <a:prstGeom prst="rect">
+            <a:avLst/>
+          </a:prstGeom>
+        </p:spPr>
+      </p:pic>
+      <p:sp>
+        <p:nvSpPr>
+          <p:cNvPr id="6" name="TextBox 5"/>
+          <p:cNvSpPr txBox="1"/>
+          <p:nvPr/>
+        </p:nvSpPr>
+        <p:spPr>
+          <a:xfrm>
+            <a:off x="7406640" y="3474720"/>
+            <a:ext cx="3073412" cy="320040"/>
+          </a:xfrm>
+          <a:prstGeom prst="rect">
+            <a:avLst/>
+          </a:prstGeom>
+          <a:noFill/>
+        </p:spPr>
+        <p:txBody>
+          <a:bodyPr wrap="square" lIns="0" tIns="0" rIns="0" bIns="0" anchor="t">
+            <a:spAutoFit/>
+          </a:bodyPr>
+          <a:lstStyle/>
+          <a:p>
+            <a:pPr algn="ctr">
               <a:spcBef>
                 <a:spcPts val="0"/>
               </a:spcBef>
               <a:spcAft>
-                <a:spcPts val="1100"/>
+                <a:spcPts val="0"/>
               </a:spcAft>
             </a:pPr>
-            <a:endParaRPr sz="1500" b="0">
-              <a:solidFill>
-                <a:srgbClr val="222B36"/>
-              </a:solidFill>
-              <a:latin typeface="Calibri"/>
-            </a:endParaRPr>
-          </a:p>
-          <a:p>
-            <a:pPr algn="l">
-              <a:lnSpc>
-                <a:spcPct val="110000"/>
-              </a:lnSpc>
+            <a:r>
+              <a:rPr sz="1200" b="1">
+                <a:solidFill>
+                  <a:srgbClr val="12293D"/>
+                </a:solidFill>
+                <a:latin typeface="Calibri"/>
+              </a:rPr>
+              <a:t>Prix de revient — LCOE (c/kWh)</a:t>
+            </a:r>
+          </a:p>
+        </p:txBody>
+      </p:sp>
+      <p:pic>
+        <p:nvPicPr>
+          <p:cNvPr id="7" name="Picture 6" descr="carte_payback.jpg"/>
+          <p:cNvPicPr>
+            <a:picLocks noChangeAspect="1"/>
+          </p:cNvPicPr>
+          <p:nvPr/>
+        </p:nvPicPr>
+        <p:blipFill>
+          <a:blip r:embed="rId5"/>
+          <a:stretch>
+            <a:fillRect/>
+          </a:stretch>
+        </p:blipFill>
+        <p:spPr>
+          <a:xfrm>
+            <a:off x="2011680" y="3931920"/>
+            <a:ext cx="2553681" cy="2057400"/>
+          </a:xfrm>
+          <a:prstGeom prst="rect">
+            <a:avLst/>
+          </a:prstGeom>
+        </p:spPr>
+      </p:pic>
+      <p:sp>
+        <p:nvSpPr>
+          <p:cNvPr id="8" name="TextBox 7"/>
+          <p:cNvSpPr txBox="1"/>
+          <p:nvPr/>
+        </p:nvSpPr>
+        <p:spPr>
+          <a:xfrm>
+            <a:off x="1737360" y="6035040"/>
+            <a:ext cx="3102321" cy="320040"/>
+          </a:xfrm>
+          <a:prstGeom prst="rect">
+            <a:avLst/>
+          </a:prstGeom>
+          <a:noFill/>
+        </p:spPr>
+        <p:txBody>
+          <a:bodyPr wrap="square" lIns="0" tIns="0" rIns="0" bIns="0" anchor="t">
+            <a:spAutoFit/>
+          </a:bodyPr>
+          <a:lstStyle/>
+          <a:p>
+            <a:pPr algn="ctr">
               <a:spcBef>
                 <a:spcPts val="0"/>
               </a:spcBef>
               <a:spcAft>
-                <a:spcPts val="1100"/>
+                <a:spcPts val="0"/>
               </a:spcAft>
             </a:pPr>
             <a:r>
-              <a:rPr sz="1450" b="1">
-                <a:solidFill>
-                  <a:srgbClr val="F2A900"/>
-                </a:solidFill>
-                <a:latin typeface="Calibri"/>
-              </a:rPr>
-              <a:t>•  </a:t>
-            </a:r>
-            <a:r>
-              <a:rPr sz="1450" b="0">
-                <a:solidFill>
-                  <a:srgbClr val="222B36"/>
-                </a:solidFill>
-                <a:latin typeface="Calibri"/>
-              </a:rPr>
-              <a:t>explorer la carte de France, indicateur par indicateur ;</a:t>
-            </a:r>
-          </a:p>
-          <a:p>
-            <a:pPr algn="l">
-              <a:lnSpc>
-                <a:spcPct val="110000"/>
-              </a:lnSpc>
+              <a:rPr sz="1200" b="1">
+                <a:solidFill>
+                  <a:srgbClr val="12293D"/>
+                </a:solidFill>
+                <a:latin typeface="Calibri"/>
+              </a:rPr>
+              <a:t>Temps de retour (ans)</a:t>
+            </a:r>
+          </a:p>
+        </p:txBody>
+      </p:sp>
+      <p:pic>
+        <p:nvPicPr>
+          <p:cNvPr id="9" name="Picture 8" descr="carte_tri.jpg"/>
+          <p:cNvPicPr>
+            <a:picLocks noChangeAspect="1"/>
+          </p:cNvPicPr>
+          <p:nvPr/>
+        </p:nvPicPr>
+        <p:blipFill>
+          <a:blip r:embed="rId6"/>
+          <a:stretch>
+            <a:fillRect/>
+          </a:stretch>
+        </p:blipFill>
+        <p:spPr>
+          <a:xfrm>
+            <a:off x="7680960" y="3931920"/>
+            <a:ext cx="2507908" cy="2057400"/>
+          </a:xfrm>
+          <a:prstGeom prst="rect">
+            <a:avLst/>
+          </a:prstGeom>
+        </p:spPr>
+      </p:pic>
+      <p:sp>
+        <p:nvSpPr>
+          <p:cNvPr id="10" name="TextBox 9"/>
+          <p:cNvSpPr txBox="1"/>
+          <p:nvPr/>
+        </p:nvSpPr>
+        <p:spPr>
+          <a:xfrm>
+            <a:off x="7406640" y="6035040"/>
+            <a:ext cx="3056548" cy="320040"/>
+          </a:xfrm>
+          <a:prstGeom prst="rect">
+            <a:avLst/>
+          </a:prstGeom>
+          <a:noFill/>
+        </p:spPr>
+        <p:txBody>
+          <a:bodyPr wrap="square" lIns="0" tIns="0" rIns="0" bIns="0" anchor="t">
+            <a:spAutoFit/>
+          </a:bodyPr>
+          <a:lstStyle/>
+          <a:p>
+            <a:pPr algn="ctr">
               <a:spcBef>
                 <a:spcPts val="0"/>
               </a:spcBef>
               <a:spcAft>
-                <a:spcPts val="1100"/>
+                <a:spcPts val="0"/>
               </a:spcAft>
             </a:pPr>
             <a:r>
-              <a:rPr sz="1450" b="1">
-                <a:solidFill>
-                  <a:srgbClr val="F2A900"/>
-                </a:solidFill>
-                <a:latin typeface="Calibri"/>
-              </a:rPr>
-              <a:t>•  </a:t>
-            </a:r>
-            <a:r>
-              <a:rPr sz="1450" b="0">
-                <a:solidFill>
-                  <a:srgbClr val="222B36"/>
-                </a:solidFill>
-                <a:latin typeface="Calibri"/>
-              </a:rPr>
-              <a:t>choisir le scénario (régime, puissance) — hypothèses fixes ;</a:t>
-            </a:r>
-          </a:p>
-          <a:p>
-            <a:pPr algn="l">
-              <a:lnSpc>
-                <a:spcPct val="110000"/>
-              </a:lnSpc>
+              <a:rPr sz="1200" b="1">
+                <a:solidFill>
+                  <a:srgbClr val="12293D"/>
+                </a:solidFill>
+                <a:latin typeface="Calibri"/>
+              </a:rPr>
+              <a:t>Rendement — TRI (%)</a:t>
+            </a:r>
+          </a:p>
+        </p:txBody>
+      </p:sp>
+      <p:sp>
+        <p:nvSpPr>
+          <p:cNvPr id="11" name="TextBox 10"/>
+          <p:cNvSpPr txBox="1"/>
+          <p:nvPr/>
+        </p:nvSpPr>
+        <p:spPr>
+          <a:xfrm>
+            <a:off x="548640" y="6446520"/>
+            <a:ext cx="11064240" cy="184666"/>
+          </a:xfrm>
+          <a:prstGeom prst="rect">
+            <a:avLst/>
+          </a:prstGeom>
+          <a:noFill/>
+        </p:spPr>
+        <p:txBody>
+          <a:bodyPr wrap="square" lIns="0" tIns="0" rIns="0" bIns="0" anchor="t">
+            <a:spAutoFit/>
+          </a:bodyPr>
+          <a:lstStyle/>
+          <a:p>
+            <a:pPr algn="ctr">
               <a:spcBef>
                 <a:spcPts val="0"/>
               </a:spcBef>
               <a:spcAft>
-                <a:spcPts val="1100"/>
+                <a:spcPts val="0"/>
               </a:spcAft>
             </a:pPr>
             <a:r>
-              <a:rPr sz="1450" b="1">
-                <a:solidFill>
-                  <a:srgbClr val="F2A900"/>
-                </a:solidFill>
-                <a:latin typeface="Calibri"/>
-              </a:rPr>
-              <a:t>•  </a:t>
-            </a:r>
-            <a:r>
-              <a:rPr sz="1450" b="0">
-                <a:solidFill>
-                  <a:srgbClr val="222B36"/>
-                </a:solidFill>
-                <a:latin typeface="Calibri"/>
-              </a:rPr>
-              <a:t>consulter le détail d'un département et exporter les données.</a:t>
+              <a:rPr sz="1200" b="0" dirty="0" err="1">
+                <a:solidFill>
+                  <a:srgbClr val="647486"/>
+                </a:solidFill>
+                <a:latin typeface="Calibri"/>
+              </a:rPr>
+              <a:t>Même</a:t>
+            </a:r>
+            <a:r>
+              <a:rPr sz="1200" b="0" dirty="0">
+                <a:solidFill>
+                  <a:srgbClr val="647486"/>
+                </a:solidFill>
+                <a:latin typeface="Calibri"/>
+              </a:rPr>
+              <a:t> </a:t>
+            </a:r>
+            <a:r>
+              <a:rPr lang="fr-FR" sz="1200" b="0" dirty="0">
+                <a:solidFill>
+                  <a:srgbClr val="647486"/>
+                </a:solidFill>
+                <a:latin typeface="Calibri"/>
+              </a:rPr>
+              <a:t>scenario</a:t>
+            </a:r>
+            <a:r>
+              <a:rPr sz="1200" b="0" dirty="0">
+                <a:solidFill>
+                  <a:srgbClr val="647486"/>
+                </a:solidFill>
+                <a:latin typeface="Calibri"/>
+              </a:rPr>
+              <a:t> </a:t>
+            </a:r>
+            <a:r>
+              <a:rPr sz="1200" b="0" dirty="0" err="1">
+                <a:solidFill>
+                  <a:srgbClr val="647486"/>
+                </a:solidFill>
+                <a:latin typeface="Calibri"/>
+              </a:rPr>
+              <a:t>partout</a:t>
+            </a:r>
+            <a:r>
+              <a:rPr sz="1200" b="0" dirty="0">
+                <a:solidFill>
+                  <a:srgbClr val="647486"/>
+                </a:solidFill>
+                <a:latin typeface="Calibri"/>
+              </a:rPr>
+              <a:t> : production et </a:t>
+            </a:r>
+            <a:r>
+              <a:rPr sz="1200" b="0" dirty="0" err="1">
+                <a:solidFill>
+                  <a:srgbClr val="647486"/>
+                </a:solidFill>
+                <a:latin typeface="Calibri"/>
+              </a:rPr>
+              <a:t>rentabilité</a:t>
+            </a:r>
+            <a:r>
+              <a:rPr sz="1200" b="0" dirty="0">
+                <a:solidFill>
+                  <a:srgbClr val="647486"/>
+                </a:solidFill>
+                <a:latin typeface="Calibri"/>
+              </a:rPr>
+              <a:t> </a:t>
+            </a:r>
+            <a:r>
+              <a:rPr sz="1200" b="0" dirty="0" err="1">
+                <a:solidFill>
+                  <a:srgbClr val="647486"/>
+                </a:solidFill>
+                <a:latin typeface="Calibri"/>
+              </a:rPr>
+              <a:t>augmentent</a:t>
+            </a:r>
+            <a:r>
+              <a:rPr sz="1200" b="0" dirty="0">
+                <a:solidFill>
+                  <a:srgbClr val="647486"/>
+                </a:solidFill>
+                <a:latin typeface="Calibri"/>
+              </a:rPr>
+              <a:t> du Nord vers le Sud.</a:t>
             </a:r>
           </a:p>
         </p:txBody>

--- a/docs/exports/soutenance-workshop-pv.pptx
+++ b/docs/exports/soutenance-workshop-pv.pptx
@@ -5250,6 +5250,50 @@
                 <a:latin typeface="Calibri"/>
               </a:rPr>
               <a:t> d'un département et exporter les données.</a:t>
+            </a:r>
+          </a:p>
+        </p:txBody>
+      </p:sp>
+      <p:sp>
+        <p:nvSpPr>
+          <p:cNvPr id="11" name="TextBox 10"/>
+          <p:cNvSpPr txBox="1"/>
+          <p:nvPr/>
+        </p:nvSpPr>
+        <p:spPr>
+          <a:xfrm>
+            <a:off x="914400" y="5623560"/>
+            <a:ext cx="10332720" cy="640080"/>
+          </a:xfrm>
+          <a:prstGeom prst="rect">
+            <a:avLst/>
+          </a:prstGeom>
+          <a:noFill/>
+        </p:spPr>
+        <p:txBody>
+          <a:bodyPr wrap="square">
+            <a:spAutoFit/>
+          </a:bodyPr>
+          <a:lstStyle/>
+          <a:p>
+            <a:pPr algn="l"/>
+            <a:r>
+              <a:rPr sz="1400" b="1">
+                <a:solidFill>
+                  <a:srgbClr val="222B36"/>
+                </a:solidFill>
+                <a:latin typeface="Calibri"/>
+              </a:rPr>
+              <a:t>À tester en direct : </a:t>
+            </a:r>
+            <a:r>
+              <a:rPr sz="1400" b="1">
+                <a:solidFill>
+                  <a:srgbClr val="F2A900"/>
+                </a:solidFill>
+                <a:latin typeface="Calibri"/>
+              </a:rPr>
+              <a:t>https://imeneee01-workshop-client-3-streamlit-app-kzifeo.streamlit.app/</a:t>
             </a:r>
           </a:p>
         </p:txBody>

--- a/docs/exports/soutenance-workshop-pv.pptx
+++ b/docs/exports/soutenance-workshop-pv.pptx
@@ -13,6 +13,7 @@
     <p:sldId id="258" r:id="rId4"/>
     <p:sldId id="259" r:id="rId5"/>
     <p:sldId id="260" r:id="rId6"/>
+    <p:sldId id="269" r:id="rId20"/>
     <p:sldId id="261" r:id="rId7"/>
     <p:sldId id="262" r:id="rId8"/>
     <p:sldId id="263" r:id="rId9"/>
@@ -6239,6 +6240,503 @@
                 <a:latin typeface="Calibri"/>
               </a:rPr>
               <a:t>Imene BELHOCINE   ·   Workshop client — Oxand   ·   MBA M2 Big Data &amp; IA</a:t>
+            </a:r>
+          </a:p>
+        </p:txBody>
+      </p:sp>
+    </p:spTree>
+  </p:cSld>
+  <p:clrMapOvr>
+    <a:masterClrMapping/>
+  </p:clrMapOvr>
+</p:sld>
+</file>
+
+<file path=ppt/slides/slide13.xml><?xml version="1.0" encoding="utf-8"?>
+<p:sld xmlns:a="http://schemas.openxmlformats.org/drawingml/2006/main" xmlns:p="http://schemas.openxmlformats.org/presentationml/2006/main" xmlns:r="http://schemas.openxmlformats.org/officeDocument/2006/relationships">
+  <p:cSld>
+    <p:bg>
+      <p:bgPr>
+        <a:solidFill>
+          <a:srgbClr val="FFFFFF"/>
+        </a:solidFill>
+        <a:effectLst/>
+      </p:bgPr>
+    </p:bg>
+    <p:spTree>
+      <p:nvGrpSpPr>
+        <p:cNvPr id="1" name=""/>
+        <p:cNvGrpSpPr/>
+        <p:nvPr/>
+      </p:nvGrpSpPr>
+      <p:grpSpPr/>
+      <p:sp>
+        <p:nvSpPr>
+          <p:cNvPr id="2" name="TextBox 1"/>
+          <p:cNvSpPr txBox="1"/>
+          <p:nvPr/>
+        </p:nvSpPr>
+        <p:spPr>
+          <a:xfrm>
+            <a:off x="914400" y="640080"/>
+            <a:ext cx="10972800" cy="822960"/>
+          </a:xfrm>
+          <a:prstGeom prst="rect">
+            <a:avLst/>
+          </a:prstGeom>
+          <a:noFill/>
+        </p:spPr>
+        <p:txBody>
+          <a:bodyPr wrap="square" anchor="t" lIns="0" rIns="0" tIns="0" bIns="0">
+            <a:spAutoFit/>
+          </a:bodyPr>
+          <a:lstStyle/>
+          <a:p>
+            <a:pPr algn="l">
+              <a:spcAft>
+                <a:spcPts val="0"/>
+              </a:spcAft>
+            </a:pPr>
+            <a:r>
+              <a:rPr sz="3000" b="1">
+                <a:solidFill>
+                  <a:srgbClr val="12293D"/>
+                </a:solidFill>
+                <a:latin typeface="Cambria"/>
+              </a:rPr>
+              <a:t>Gestion du projet</a:t>
+            </a:r>
+          </a:p>
+        </p:txBody>
+      </p:sp>
+      <p:sp>
+        <p:nvSpPr>
+          <p:cNvPr id="3" name="TextBox 2"/>
+          <p:cNvSpPr txBox="1"/>
+          <p:nvPr/>
+        </p:nvSpPr>
+        <p:spPr>
+          <a:xfrm>
+            <a:off x="914400" y="1508760"/>
+            <a:ext cx="10424160" cy="457200"/>
+          </a:xfrm>
+          <a:prstGeom prst="rect">
+            <a:avLst/>
+          </a:prstGeom>
+          <a:noFill/>
+        </p:spPr>
+        <p:txBody>
+          <a:bodyPr wrap="square" anchor="t" lIns="0" rIns="0" tIns="0" bIns="0">
+            <a:spAutoFit/>
+          </a:bodyPr>
+          <a:lstStyle/>
+          <a:p>
+            <a:pPr algn="l">
+              <a:spcAft>
+                <a:spcPts val="0"/>
+              </a:spcAft>
+            </a:pPr>
+            <a:r>
+              <a:rPr sz="1400" b="0">
+                <a:solidFill>
+                  <a:srgbClr val="647486"/>
+                </a:solidFill>
+                <a:latin typeface="Calibri"/>
+              </a:rPr>
+              <a:t>Un projet mené en autonomie, piloté comme une mission d'agence.</a:t>
+            </a:r>
+          </a:p>
+        </p:txBody>
+      </p:sp>
+      <p:sp>
+        <p:nvSpPr>
+          <p:cNvPr id="4" name="Rounded Rectangle 3"/>
+          <p:cNvSpPr/>
+          <p:nvPr/>
+        </p:nvSpPr>
+        <p:spPr>
+          <a:xfrm>
+            <a:off x="914400" y="2194560"/>
+            <a:ext cx="3383280" cy="2834640"/>
+          </a:xfrm>
+          <a:prstGeom prst="roundRect">
+            <a:avLst/>
+          </a:prstGeom>
+          <a:solidFill>
+            <a:srgbClr val="F5F8F7"/>
+          </a:solidFill>
+          <a:ln>
+            <a:noFill/>
+          </a:ln>
+          <a:effectLst>
+            <a:outerShdw blurRad="60000" dist="20000" dir="5400000" rotWithShape="0">
+              <a:srgbClr val="12293D">
+                <a:alpha val="14000"/>
+              </a:srgbClr>
+            </a:outerShdw>
+          </a:effectLst>
+        </p:spPr>
+        <p:style>
+          <a:lnRef idx="1">
+            <a:schemeClr val="accent1"/>
+          </a:lnRef>
+          <a:fillRef idx="3">
+            <a:schemeClr val="accent1"/>
+          </a:fillRef>
+          <a:effectRef idx="2">
+            <a:schemeClr val="accent1"/>
+          </a:effectRef>
+          <a:fontRef idx="minor">
+            <a:schemeClr val="lt1"/>
+          </a:fontRef>
+        </p:style>
+        <p:txBody>
+          <a:bodyPr rtlCol="0" anchor="ctr"/>
+          <a:lstStyle/>
+          <a:p>
+            <a:pPr algn="ctr"/>
+          </a:p>
+        </p:txBody>
+      </p:sp>
+      <p:sp>
+        <p:nvSpPr>
+          <p:cNvPr id="5" name="TextBox 4"/>
+          <p:cNvSpPr txBox="1"/>
+          <p:nvPr/>
+        </p:nvSpPr>
+        <p:spPr>
+          <a:xfrm>
+            <a:off x="1188720" y="2514600"/>
+            <a:ext cx="2834640" cy="457200"/>
+          </a:xfrm>
+          <a:prstGeom prst="rect">
+            <a:avLst/>
+          </a:prstGeom>
+          <a:noFill/>
+        </p:spPr>
+        <p:txBody>
+          <a:bodyPr wrap="square" anchor="t" lIns="0" rIns="0" tIns="0" bIns="0">
+            <a:spAutoFit/>
+          </a:bodyPr>
+          <a:lstStyle/>
+          <a:p>
+            <a:pPr algn="l">
+              <a:spcAft>
+                <a:spcPts val="0"/>
+              </a:spcAft>
+            </a:pPr>
+            <a:r>
+              <a:rPr sz="1700" b="1">
+                <a:solidFill>
+                  <a:srgbClr val="0E7C7B"/>
+                </a:solidFill>
+                <a:latin typeface="Cambria"/>
+              </a:rPr>
+              <a:t>Planning</a:t>
+            </a:r>
+          </a:p>
+        </p:txBody>
+      </p:sp>
+      <p:sp>
+        <p:nvSpPr>
+          <p:cNvPr id="6" name="TextBox 5"/>
+          <p:cNvSpPr txBox="1"/>
+          <p:nvPr/>
+        </p:nvSpPr>
+        <p:spPr>
+          <a:xfrm>
+            <a:off x="1188720" y="3246120"/>
+            <a:ext cx="2834640" cy="1554480"/>
+          </a:xfrm>
+          <a:prstGeom prst="rect">
+            <a:avLst/>
+          </a:prstGeom>
+          <a:noFill/>
+        </p:spPr>
+        <p:txBody>
+          <a:bodyPr wrap="square" anchor="t" lIns="0" rIns="0" tIns="0" bIns="0">
+            <a:spAutoFit/>
+          </a:bodyPr>
+          <a:lstStyle/>
+          <a:p>
+            <a:pPr algn="l">
+              <a:lnSpc>
+                <a:spcPct val="112000"/>
+              </a:lnSpc>
+              <a:spcAft>
+                <a:spcPts val="0"/>
+              </a:spcAft>
+            </a:pPr>
+            <a:r>
+              <a:rPr sz="1350" b="0">
+                <a:solidFill>
+                  <a:srgbClr val="222B36"/>
+                </a:solidFill>
+                <a:latin typeface="Calibri"/>
+              </a:rPr>
+              <a:t>Une semaine découpée en jalons : cadrage → données → modèle → dashboard → recettage → dossier.</a:t>
+            </a:r>
+          </a:p>
+        </p:txBody>
+      </p:sp>
+      <p:sp>
+        <p:nvSpPr>
+          <p:cNvPr id="7" name="Rounded Rectangle 6"/>
+          <p:cNvSpPr/>
+          <p:nvPr/>
+        </p:nvSpPr>
+        <p:spPr>
+          <a:xfrm>
+            <a:off x="4663440" y="2194560"/>
+            <a:ext cx="3383280" cy="2834640"/>
+          </a:xfrm>
+          <a:prstGeom prst="roundRect">
+            <a:avLst/>
+          </a:prstGeom>
+          <a:solidFill>
+            <a:srgbClr val="F5F8F7"/>
+          </a:solidFill>
+          <a:ln>
+            <a:noFill/>
+          </a:ln>
+          <a:effectLst>
+            <a:outerShdw blurRad="60000" dist="20000" dir="5400000" rotWithShape="0">
+              <a:srgbClr val="12293D">
+                <a:alpha val="14000"/>
+              </a:srgbClr>
+            </a:outerShdw>
+          </a:effectLst>
+        </p:spPr>
+        <p:style>
+          <a:lnRef idx="1">
+            <a:schemeClr val="accent1"/>
+          </a:lnRef>
+          <a:fillRef idx="3">
+            <a:schemeClr val="accent1"/>
+          </a:fillRef>
+          <a:effectRef idx="2">
+            <a:schemeClr val="accent1"/>
+          </a:effectRef>
+          <a:fontRef idx="minor">
+            <a:schemeClr val="lt1"/>
+          </a:fontRef>
+        </p:style>
+        <p:txBody>
+          <a:bodyPr rtlCol="0" anchor="ctr"/>
+          <a:lstStyle/>
+          <a:p>
+            <a:pPr algn="ctr"/>
+          </a:p>
+        </p:txBody>
+      </p:sp>
+      <p:sp>
+        <p:nvSpPr>
+          <p:cNvPr id="8" name="TextBox 7"/>
+          <p:cNvSpPr txBox="1"/>
+          <p:nvPr/>
+        </p:nvSpPr>
+        <p:spPr>
+          <a:xfrm>
+            <a:off x="4937760" y="2514600"/>
+            <a:ext cx="2834640" cy="457200"/>
+          </a:xfrm>
+          <a:prstGeom prst="rect">
+            <a:avLst/>
+          </a:prstGeom>
+          <a:noFill/>
+        </p:spPr>
+        <p:txBody>
+          <a:bodyPr wrap="square" anchor="t" lIns="0" rIns="0" tIns="0" bIns="0">
+            <a:spAutoFit/>
+          </a:bodyPr>
+          <a:lstStyle/>
+          <a:p>
+            <a:pPr algn="l">
+              <a:spcAft>
+                <a:spcPts val="0"/>
+              </a:spcAft>
+            </a:pPr>
+            <a:r>
+              <a:rPr sz="1700" b="1">
+                <a:solidFill>
+                  <a:srgbClr val="0E7C7B"/>
+                </a:solidFill>
+                <a:latin typeface="Cambria"/>
+              </a:rPr>
+              <a:t>Suivi &amp; client</a:t>
+            </a:r>
+          </a:p>
+        </p:txBody>
+      </p:sp>
+      <p:sp>
+        <p:nvSpPr>
+          <p:cNvPr id="9" name="TextBox 8"/>
+          <p:cNvSpPr txBox="1"/>
+          <p:nvPr/>
+        </p:nvSpPr>
+        <p:spPr>
+          <a:xfrm>
+            <a:off x="4937760" y="3246120"/>
+            <a:ext cx="2834640" cy="1554480"/>
+          </a:xfrm>
+          <a:prstGeom prst="rect">
+            <a:avLst/>
+          </a:prstGeom>
+          <a:noFill/>
+        </p:spPr>
+        <p:txBody>
+          <a:bodyPr wrap="square" anchor="t" lIns="0" rIns="0" tIns="0" bIns="0">
+            <a:spAutoFit/>
+          </a:bodyPr>
+          <a:lstStyle/>
+          <a:p>
+            <a:pPr algn="l">
+              <a:lnSpc>
+                <a:spcPct val="112000"/>
+              </a:lnSpc>
+              <a:spcAft>
+                <a:spcPts val="0"/>
+              </a:spcAft>
+            </a:pPr>
+            <a:r>
+              <a:rPr sz="1350" b="0">
+                <a:solidFill>
+                  <a:srgbClr val="222B36"/>
+                </a:solidFill>
+                <a:latin typeface="Calibri"/>
+              </a:rPr>
+              <a:t>Un board Kanban (To Do / Doing / Done) et un point hebdomadaire avec Oxand.</a:t>
+            </a:r>
+          </a:p>
+        </p:txBody>
+      </p:sp>
+      <p:sp>
+        <p:nvSpPr>
+          <p:cNvPr id="10" name="Rounded Rectangle 9"/>
+          <p:cNvSpPr/>
+          <p:nvPr/>
+        </p:nvSpPr>
+        <p:spPr>
+          <a:xfrm>
+            <a:off x="8412480" y="2194560"/>
+            <a:ext cx="3383280" cy="2834640"/>
+          </a:xfrm>
+          <a:prstGeom prst="roundRect">
+            <a:avLst/>
+          </a:prstGeom>
+          <a:solidFill>
+            <a:srgbClr val="F5F8F7"/>
+          </a:solidFill>
+          <a:ln>
+            <a:noFill/>
+          </a:ln>
+          <a:effectLst>
+            <a:outerShdw blurRad="60000" dist="20000" dir="5400000" rotWithShape="0">
+              <a:srgbClr val="12293D">
+                <a:alpha val="14000"/>
+              </a:srgbClr>
+            </a:outerShdw>
+          </a:effectLst>
+        </p:spPr>
+        <p:style>
+          <a:lnRef idx="1">
+            <a:schemeClr val="accent1"/>
+          </a:lnRef>
+          <a:fillRef idx="3">
+            <a:schemeClr val="accent1"/>
+          </a:fillRef>
+          <a:effectRef idx="2">
+            <a:schemeClr val="accent1"/>
+          </a:effectRef>
+          <a:fontRef idx="minor">
+            <a:schemeClr val="lt1"/>
+          </a:fontRef>
+        </p:style>
+        <p:txBody>
+          <a:bodyPr rtlCol="0" anchor="ctr"/>
+          <a:lstStyle/>
+          <a:p>
+            <a:pPr algn="ctr"/>
+          </a:p>
+        </p:txBody>
+      </p:sp>
+      <p:sp>
+        <p:nvSpPr>
+          <p:cNvPr id="11" name="TextBox 10"/>
+          <p:cNvSpPr txBox="1"/>
+          <p:nvPr/>
+        </p:nvSpPr>
+        <p:spPr>
+          <a:xfrm>
+            <a:off x="8686800" y="2514600"/>
+            <a:ext cx="2834640" cy="457200"/>
+          </a:xfrm>
+          <a:prstGeom prst="rect">
+            <a:avLst/>
+          </a:prstGeom>
+          <a:noFill/>
+        </p:spPr>
+        <p:txBody>
+          <a:bodyPr wrap="square" anchor="t" lIns="0" rIns="0" tIns="0" bIns="0">
+            <a:spAutoFit/>
+          </a:bodyPr>
+          <a:lstStyle/>
+          <a:p>
+            <a:pPr algn="l">
+              <a:spcAft>
+                <a:spcPts val="0"/>
+              </a:spcAft>
+            </a:pPr>
+            <a:r>
+              <a:rPr sz="1700" b="1">
+                <a:solidFill>
+                  <a:srgbClr val="0E7C7B"/>
+                </a:solidFill>
+                <a:latin typeface="Cambria"/>
+              </a:rPr>
+              <a:t>Risques &amp; qualité</a:t>
+            </a:r>
+          </a:p>
+        </p:txBody>
+      </p:sp>
+      <p:sp>
+        <p:nvSpPr>
+          <p:cNvPr id="12" name="TextBox 11"/>
+          <p:cNvSpPr txBox="1"/>
+          <p:nvPr/>
+        </p:nvSpPr>
+        <p:spPr>
+          <a:xfrm>
+            <a:off x="8686800" y="3246120"/>
+            <a:ext cx="2834640" cy="1554480"/>
+          </a:xfrm>
+          <a:prstGeom prst="rect">
+            <a:avLst/>
+          </a:prstGeom>
+          <a:noFill/>
+        </p:spPr>
+        <p:txBody>
+          <a:bodyPr wrap="square" anchor="t" lIns="0" rIns="0" tIns="0" bIns="0">
+            <a:spAutoFit/>
+          </a:bodyPr>
+          <a:lstStyle/>
+          <a:p>
+            <a:pPr algn="l">
+              <a:lnSpc>
+                <a:spcPct val="112000"/>
+              </a:lnSpc>
+              <a:spcAft>
+                <a:spcPts val="0"/>
+              </a:spcAft>
+            </a:pPr>
+            <a:r>
+              <a:rPr sz="1350" b="0">
+                <a:solidFill>
+                  <a:srgbClr val="222B36"/>
+                </a:solidFill>
+                <a:latin typeface="Calibri"/>
+              </a:rPr>
+              <a:t>Risques anticipés (ex. API PVGIS → cache + secours) et 28 tests automatiques.</a:t>
             </a:r>
           </a:p>
         </p:txBody>
